--- a/SpOC3-Torso-Decompositions-AlbShkenca2026-EN.pptx
+++ b/SpOC3-Torso-Decompositions-AlbShkenca2026-EN.pptx
@@ -127,7 +127,7 @@
   <p:extLst>
     <p:ext uri="{521415D9-36F7-43E2-AB2F-B90AF26B5E84}">
       <p14:sectionLst xmlns:p14="http://schemas.microsoft.com/office/powerpoint/2010/main">
-        <p14:section name="Talk" id="{475ed296-3fa0-aeb7-6bbd-270e1117f7bf}">
+        <p14:section name="Talk" id="{014d1953-ae47-93d4-8d64-080fd0a58609}">
           <p14:sldIdLst>
             <p14:sldId id="256"/>
             <p14:sldId id="257"/>
@@ -146,7 +146,7 @@
             <p14:sldId id="270"/>
           </p14:sldIdLst>
         </p14:section>
-        <p14:section name="Backup" id="{026d7bc4-d404-62b2-3a66-6b3cdc39a3ea}">
+        <p14:section name="Backup" id="{a3eec936-0956-5142-9848-81e05606439c}">
           <p14:sldIdLst>
             <p14:sldId id="271"/>
             <p14:sldId id="272"/>
@@ -1616,7 +1616,7 @@
           <a:p>
             <a:r>
               <a:rPr lang="en-US" dirty="0"/>
-              <a:t>Backup, for questions about the search operators. Sources: harness/delta_check.log for exactness, harness/speed.log for the speed-up (re-measured 14 October: geometric mean 1.76×; an earlier 1.81× run kept no rows, so quote 1.8×).</a:t>
+              <a:t>Backup, for questions about the search operators. Sources: harness/delta_check.log for exactness, harness/speed.log for the speed-up (the author’s run: 1.70× sparse, 1.88× medium, 1.89× dense; an independent re-run on another machine gave 1.76×).</a:t>
             </a:r>
             <a:endParaRPr lang="en-US" dirty="0"/>
           </a:p>
@@ -3018,9 +3018,33 @@
           <a:chExt cx="0" cy="0"/>
         </a:xfrm>
       </p:grpSpPr>
-      <p:sp>
-        <p:nvSpPr>
-          <p:cNvPr id="2" name="Text 0"/>
+      <p:pic>
+        <p:nvPicPr>
+          <p:cNvPr id="2" name="Image 0" descr="University of Prishtina">    </p:cNvPr>
+          <p:cNvPicPr>
+            <a:picLocks noChangeAspect="1"/>
+          </p:cNvPicPr>
+          <p:nvPr/>
+        </p:nvPicPr>
+        <p:blipFill>
+          <a:blip r:embed="rId1"/>
+          <a:stretch>
+            <a:fillRect/>
+          </a:stretch>
+        </p:blipFill>
+        <p:spPr>
+          <a:xfrm>
+            <a:off x="640080" y="566928"/>
+            <a:ext cx="914400" cy="914400"/>
+          </a:xfrm>
+          <a:prstGeom prst="rect">
+            <a:avLst/>
+          </a:prstGeom>
+        </p:spPr>
+      </p:pic>
+      <p:sp>
+        <p:nvSpPr>
+          <p:cNvPr id="3" name="Text 0"/>
           <p:cNvSpPr txBox="1"/>
           <p:nvPr/>
         </p:nvSpPr>
@@ -3059,7 +3083,7 @@
       </p:sp>
       <p:sp>
         <p:nvSpPr>
-          <p:cNvPr id="3" name="Text 1"/>
+          <p:cNvPr id="4" name="Text 1"/>
           <p:cNvSpPr txBox="1"/>
           <p:nvPr/>
         </p:nvSpPr>
@@ -3121,7 +3145,7 @@
       </p:sp>
       <p:sp>
         <p:nvSpPr>
-          <p:cNvPr id="4" name="Text 2"/>
+          <p:cNvPr id="5" name="Text 2"/>
           <p:cNvSpPr txBox="1"/>
           <p:nvPr/>
         </p:nvSpPr>
@@ -3160,7 +3184,7 @@
       </p:sp>
       <p:sp>
         <p:nvSpPr>
-          <p:cNvPr id="5" name="Text 3"/>
+          <p:cNvPr id="6" name="Text 3"/>
           <p:cNvSpPr txBox="1"/>
           <p:nvPr/>
         </p:nvSpPr>
@@ -3199,7 +3223,7 @@
       </p:sp>
       <p:sp>
         <p:nvSpPr>
-          <p:cNvPr id="6" name="Text 4"/>
+          <p:cNvPr id="7" name="Text 4"/>
           <p:cNvSpPr txBox="1"/>
           <p:nvPr/>
         </p:nvSpPr>
@@ -3238,7 +3262,7 @@
       </p:sp>
       <p:sp>
         <p:nvSpPr>
-          <p:cNvPr id="7" name="Text 5"/>
+          <p:cNvPr id="8" name="Text 5"/>
           <p:cNvSpPr txBox="1"/>
           <p:nvPr/>
         </p:nvSpPr>
@@ -13052,9 +13076,33 @@
           <a:chExt cx="0" cy="0"/>
         </a:xfrm>
       </p:grpSpPr>
-      <p:sp>
-        <p:nvSpPr>
-          <p:cNvPr id="2" name="Text 0"/>
+      <p:pic>
+        <p:nvPicPr>
+          <p:cNvPr id="2" name="Image 0" descr="University of Prishtina">    </p:cNvPr>
+          <p:cNvPicPr>
+            <a:picLocks noChangeAspect="1"/>
+          </p:cNvPicPr>
+          <p:nvPr/>
+        </p:nvPicPr>
+        <p:blipFill>
+          <a:blip r:embed="rId1"/>
+          <a:stretch>
+            <a:fillRect/>
+          </a:stretch>
+        </p:blipFill>
+        <p:spPr>
+          <a:xfrm>
+            <a:off x="640080" y="274320"/>
+            <a:ext cx="713232" cy="713232"/>
+          </a:xfrm>
+          <a:prstGeom prst="rect">
+            <a:avLst/>
+          </a:prstGeom>
+        </p:spPr>
+      </p:pic>
+      <p:sp>
+        <p:nvSpPr>
+          <p:cNvPr id="3" name="Text 0"/>
           <p:cNvSpPr txBox="1"/>
           <p:nvPr/>
         </p:nvSpPr>
@@ -13093,7 +13141,7 @@
       </p:sp>
       <p:sp>
         <p:nvSpPr>
-          <p:cNvPr id="3" name="Text 1"/>
+          <p:cNvPr id="4" name="Text 1"/>
           <p:cNvSpPr txBox="1"/>
           <p:nvPr/>
         </p:nvSpPr>
@@ -13132,7 +13180,7 @@
       </p:sp>
       <p:sp>
         <p:nvSpPr>
-          <p:cNvPr id="4" name="Text 2"/>
+          <p:cNvPr id="5" name="Text 2"/>
           <p:cNvSpPr txBox="1"/>
           <p:nvPr/>
         </p:nvSpPr>
@@ -13171,7 +13219,7 @@
       </p:sp>
       <p:sp>
         <p:nvSpPr>
-          <p:cNvPr id="5" name="Text 3"/>
+          <p:cNvPr id="6" name="Text 3"/>
           <p:cNvSpPr txBox="1"/>
           <p:nvPr/>
         </p:nvSpPr>
@@ -13210,7 +13258,7 @@
       </p:sp>
       <p:sp>
         <p:nvSpPr>
-          <p:cNvPr id="6" name="Text 4"/>
+          <p:cNvPr id="7" name="Text 4"/>
           <p:cNvSpPr txBox="1"/>
           <p:nvPr/>
         </p:nvSpPr>
@@ -13249,7 +13297,7 @@
       </p:sp>
       <p:sp>
         <p:nvSpPr>
-          <p:cNvPr id="7" name="Text 5"/>
+          <p:cNvPr id="8" name="Text 5"/>
           <p:cNvSpPr txBox="1"/>
           <p:nvPr/>
         </p:nvSpPr>
@@ -13288,7 +13336,7 @@
       </p:sp>
       <p:sp>
         <p:nvSpPr>
-          <p:cNvPr id="8" name="Text 6"/>
+          <p:cNvPr id="9" name="Text 6"/>
           <p:cNvSpPr txBox="1"/>
           <p:nvPr/>
         </p:nvSpPr>
@@ -13327,7 +13375,7 @@
       </p:sp>
       <p:sp>
         <p:nvSpPr>
-          <p:cNvPr id="9" name="Text 7"/>
+          <p:cNvPr id="10" name="Text 7"/>
           <p:cNvSpPr txBox="1"/>
           <p:nvPr/>
         </p:nvSpPr>
@@ -13366,7 +13414,7 @@
       </p:sp>
       <p:sp>
         <p:nvSpPr>
-          <p:cNvPr id="10" name="Text 8"/>
+          <p:cNvPr id="11" name="Text 8"/>
           <p:cNvSpPr txBox="1"/>
           <p:nvPr/>
         </p:nvSpPr>
@@ -13405,7 +13453,7 @@
       </p:sp>
       <p:sp>
         <p:nvSpPr>
-          <p:cNvPr id="11" name="Text 9"/>
+          <p:cNvPr id="12" name="Text 9"/>
           <p:cNvSpPr txBox="1"/>
           <p:nvPr/>
         </p:nvSpPr>
@@ -13444,7 +13492,7 @@
       </p:sp>
       <p:sp>
         <p:nvSpPr>
-          <p:cNvPr id="12" name="Text 10"/>
+          <p:cNvPr id="13" name="Text 10"/>
           <p:cNvSpPr txBox="1"/>
           <p:nvPr/>
         </p:nvSpPr>
@@ -13483,7 +13531,7 @@
       </p:sp>
       <p:sp>
         <p:nvSpPr>
-          <p:cNvPr id="13" name="Text 11"/>
+          <p:cNvPr id="14" name="Text 11"/>
           <p:cNvSpPr txBox="1"/>
           <p:nvPr/>
         </p:nvSpPr>
@@ -13522,7 +13570,7 @@
       </p:sp>
       <p:sp>
         <p:nvSpPr>
-          <p:cNvPr id="14" name="Text 12"/>
+          <p:cNvPr id="15" name="Text 12"/>
           <p:cNvSpPr txBox="1"/>
           <p:nvPr/>
         </p:nvSpPr>
@@ -13561,7 +13609,7 @@
       </p:sp>
       <p:sp>
         <p:nvSpPr>
-          <p:cNvPr id="15" name="Text 13"/>
+          <p:cNvPr id="16" name="Text 13"/>
           <p:cNvSpPr txBox="1"/>
           <p:nvPr/>
         </p:nvSpPr>
@@ -13600,7 +13648,7 @@
       </p:sp>
       <p:sp>
         <p:nvSpPr>
-          <p:cNvPr id="16" name="Text 14"/>
+          <p:cNvPr id="17" name="Text 14"/>
           <p:cNvSpPr txBox="1"/>
           <p:nvPr/>
         </p:nvSpPr>
@@ -13639,7 +13687,7 @@
       </p:sp>
       <p:sp>
         <p:nvSpPr>
-          <p:cNvPr id="17" name="Text 15"/>
+          <p:cNvPr id="18" name="Text 15"/>
           <p:cNvSpPr txBox="1"/>
           <p:nvPr/>
         </p:nvSpPr>
@@ -13678,7 +13726,7 @@
       </p:sp>
       <p:sp>
         <p:nvSpPr>
-          <p:cNvPr id="18" name="Text 16"/>
+          <p:cNvPr id="19" name="Text 16"/>
           <p:cNvSpPr txBox="1"/>
           <p:nvPr/>
         </p:nvSpPr>
@@ -25237,7 +25285,7 @@
                 <a:ea typeface="Century Schoolbook" pitchFamily="34" charset="-122"/>
                 <a:cs typeface="Century Schoolbook" pitchFamily="34" charset="-120"/>
               </a:rPr>
-              <a:t>1.8×</a:t>
+              <a:t>1.81×</a:t>
             </a:r>
             <a:endParaRPr lang="en-US" sz="2600" dirty="0"/>
           </a:p>
@@ -25276,7 +25324,7 @@
                 <a:ea typeface="Calibri" pitchFamily="34" charset="-122"/>
                 <a:cs typeface="Calibri" pitchFamily="34" charset="-120"/>
               </a:rPr>
-              <a:t>more candidates in the same wall-clock, geometric mean over ten instances (1.6× sparse to 1.9× dense)</a:t>
+              <a:t>more candidates in the same wall-clock, geometric mean over ten instances (1.7× sparse to 1.9× dense)</a:t>
             </a:r>
             <a:endParaRPr lang="en-US" sz="1150" dirty="0"/>
           </a:p>

--- a/SpOC3-Torso-Decompositions-AlbShkenca2026-EN.pptx
+++ b/SpOC3-Torso-Decompositions-AlbShkenca2026-EN.pptx
@@ -127,7 +127,7 @@
   <p:extLst>
     <p:ext uri="{521415D9-36F7-43E2-AB2F-B90AF26B5E84}">
       <p14:sectionLst xmlns:p14="http://schemas.microsoft.com/office/powerpoint/2010/main">
-        <p14:section name="Talk" id="{014d1953-ae47-93d4-8d64-080fd0a58609}">
+        <p14:section name="Talk" id="{ad2f93c0-efb7-01c9-de7a-a493054d46c8}">
           <p14:sldIdLst>
             <p14:sldId id="256"/>
             <p14:sldId id="257"/>
@@ -143,16 +143,20 @@
             <p14:sldId id="267"/>
             <p14:sldId id="268"/>
             <p14:sldId id="269"/>
-            <p14:sldId id="270"/>
           </p14:sldIdLst>
         </p14:section>
-        <p14:section name="Backup" id="{a3eec936-0956-5142-9848-81e05606439c}">
+        <p14:section name="Backup" id="{b6e0c5b1-f3b3-3742-9606-a457fb794f3d}">
           <p14:sldIdLst>
+            <p14:sldId id="270"/>
             <p14:sldId id="271"/>
             <p14:sldId id="272"/>
             <p14:sldId id="273"/>
             <p14:sldId id="274"/>
             <p14:sldId id="275"/>
+          </p14:sldIdLst>
+        </p14:section>
+        <p14:section name="Closing" id="{fda49309-42cb-a86e-e604-ca532d3cc67b}">
+          <p14:sldIdLst>
             <p14:sldId id="276"/>
           </p14:sldIdLst>
         </p14:section>
@@ -1088,7 +1092,7 @@
           <a:p>
             <a:r>
               <a:rPr lang="en-US" dirty="0"/>
-              <a:t>Leave this up for the discussion; the six figures are the ones most likely to be challenged. Backup slides follow: the errors I caught, the protocol, every seed, why the sparse family is one-dimensional, the operator findings and the budget sweep in full.</a:t>
+              <a:t>Backup. All four errors were mine or in code I vendored, and none was caught by a test.</a:t>
             </a:r>
             <a:endParaRPr lang="en-US" dirty="0"/>
           </a:p>
@@ -1176,7 +1180,7 @@
           <a:p>
             <a:r>
               <a:rPr lang="en-US" dirty="0"/>
-              <a:t>Backup. All four errors were mine or in code I vendored, and none was caught by a test.</a:t>
+              <a:t>Backup, for questions about fairness. If asked how we know the scoring is ESA’s: harness/esa_crosscheck.py runs ESA’s published evaluation file beside ours; every check is identical, and the three competition graphs are byte-identical to ESA’s.</a:t>
             </a:r>
             <a:endParaRPr lang="en-US" dirty="0"/>
           </a:p>
@@ -1264,7 +1268,7 @@
           <a:p>
             <a:r>
               <a:rPr lang="en-US" dirty="0"/>
-              <a:t>Backup, for questions about fairness. If asked how we know the scoring is ESA’s: harness/esa_crosscheck.py runs ESA’s published evaluation file beside ours; every check is identical, and the three competition graphs are byte-identical to ESA’s.</a:t>
+              <a:t>Backup. Every number on the verdict slide can be read off this table.</a:t>
             </a:r>
             <a:endParaRPr lang="en-US" dirty="0"/>
           </a:p>
@@ -1352,7 +1356,7 @@
           <a:p>
             <a:r>
               <a:rPr lang="en-US" dirty="0"/>
-              <a:t>Backup. Every number on the verdict slide can be read off this table.</a:t>
+              <a:t>Backup. The first two paragraphs are a derivation, not a measurement.</a:t>
             </a:r>
             <a:endParaRPr lang="en-US" dirty="0"/>
           </a:p>
@@ -1440,7 +1444,7 @@
           <a:p>
             <a:r>
               <a:rPr lang="en-US" dirty="0"/>
-              <a:t>Backup. The first two paragraphs are a derivation, not a measurement.</a:t>
+              <a:t>Backup, for questions about the search operators. Sources: harness/delta_check.log for exactness, harness/speed.log for the speed-up (the author’s run: 1.70× sparse, 1.88× medium, 1.89× dense; an independent re-run on another machine gave 1.76×).</a:t>
             </a:r>
             <a:endParaRPr lang="en-US" dirty="0"/>
           </a:p>
@@ -1616,7 +1620,7 @@
           <a:p>
             <a:r>
               <a:rPr lang="en-US" dirty="0"/>
-              <a:t>Backup, for questions about the search operators. Sources: harness/delta_check.log for exactness, harness/speed.log for the speed-up (the author’s run: 1.70× sparse, 1.88× medium, 1.89× dense; an independent re-run on another machine gave 1.76×).</a:t>
+              <a:t>Backup. Lead is measured against the construction’s mean over the three budgets.</a:t>
             </a:r>
             <a:endParaRPr lang="en-US" dirty="0"/>
           </a:p>
@@ -1704,7 +1708,7 @@
           <a:p>
             <a:r>
               <a:rPr lang="en-US" dirty="0"/>
-              <a:t>Backup. Lead is measured against the construction’s mean over the three budgets.</a:t>
+              <a:t>Leave this up for the discussion; the six figures are the ones most likely to be challenged. This is the last slide. The backup slides sit just before it and are hidden in the slide show, so the talk goes straight from the requests to here; to open one during questions, type its number and press Enter: 15 the errors I caught, 16 the protocol, 17 every seed, 18 why the sparse family is one-dimensional, 19 the operator findings, 20 the budget sweep in full.</a:t>
             </a:r>
             <a:endParaRPr lang="en-US" dirty="0"/>
           </a:p>
@@ -13060,7 +13064,7 @@
 </file>
 
 <file path=ppt/slides/slide15.xml><?xml version="1.0" encoding="utf-8"?>
-<p:sld xmlns:a="http://schemas.openxmlformats.org/drawingml/2006/main" xmlns:r="http://schemas.openxmlformats.org/officeDocument/2006/relationships" xmlns:p="http://schemas.openxmlformats.org/presentationml/2006/main">
+<p:sld xmlns:a="http://schemas.openxmlformats.org/drawingml/2006/main" xmlns:r="http://schemas.openxmlformats.org/officeDocument/2006/relationships" xmlns:p="http://schemas.openxmlformats.org/presentationml/2006/main" show="0">
   <p:cSld name="Slide 15">
     <p:spTree>
       <p:nvGrpSpPr>
@@ -13076,40 +13080,98 @@
           <a:chExt cx="0" cy="0"/>
         </a:xfrm>
       </p:grpSpPr>
-      <p:pic>
-        <p:nvPicPr>
-          <p:cNvPr id="2" name="Image 0" descr="University of Prishtina">    </p:cNvPr>
-          <p:cNvPicPr>
-            <a:picLocks noChangeAspect="1"/>
-          </p:cNvPicPr>
-          <p:nvPr/>
-        </p:nvPicPr>
-        <p:blipFill>
-          <a:blip r:embed="rId1"/>
-          <a:stretch>
-            <a:fillRect/>
-          </a:stretch>
-        </p:blipFill>
-        <p:spPr>
-          <a:xfrm>
-            <a:off x="640080" y="274320"/>
-            <a:ext cx="713232" cy="713232"/>
-          </a:xfrm>
-          <a:prstGeom prst="rect">
-            <a:avLst/>
-          </a:prstGeom>
-        </p:spPr>
-      </p:pic>
-      <p:sp>
-        <p:nvSpPr>
-          <p:cNvPr id="3" name="Text 0"/>
+      <p:sp>
+        <p:nvSpPr>
+          <p:cNvPr id="2" name="Text 1"/>
+          <p:cNvSpPr/>
+          <p:nvPr>
+            <p:ph idx="101" type="body" hasCustomPrompt="1"/>
+          </p:nvPr>
+        </p:nvSpPr>
+        <p:spPr>
+          <a:xfrm>
+            <a:off x="640080" y="402336"/>
+            <a:ext cx="10911535" cy="256032"/>
+          </a:xfrm>
+          <a:prstGeom prst="rect">
+            <a:avLst/>
+          </a:prstGeom>
+          <a:noFill/>
+          <a:ln/>
+        </p:spPr>
+        <p:txBody>
+          <a:bodyPr wrap="square" lIns="0" tIns="0" rIns="0" bIns="0" rtlCol="0" anchor="t"/>
+          <a:lstStyle/>
+          <a:p>
+            <a:pPr algn="l" indent="0" marL="0">
+              <a:buNone/>
+            </a:pPr>
+            <a:r>
+              <a:rPr lang="en-US" sz="1050" b="1" spc="180" kern="0" dirty="0">
+                <a:solidFill>
+                  <a:srgbClr val="9AA6B6"/>
+                </a:solidFill>
+                <a:latin typeface="Calibri" pitchFamily="34" charset="0"/>
+                <a:ea typeface="Calibri" pitchFamily="34" charset="-122"/>
+                <a:cs typeface="Calibri" pitchFamily="34" charset="-120"/>
+              </a:rPr>
+              <a:t>BACKUP</a:t>
+            </a:r>
+            <a:endParaRPr lang="en-US" sz="1050" dirty="0"/>
+          </a:p>
+        </p:txBody>
+      </p:sp>
+      <p:sp>
+        <p:nvSpPr>
+          <p:cNvPr id="3" name="Text 1"/>
+          <p:cNvSpPr/>
+          <p:nvPr>
+            <p:ph idx="102" type="title" hasCustomPrompt="1"/>
+          </p:nvPr>
+        </p:nvSpPr>
+        <p:spPr>
+          <a:xfrm>
+            <a:off x="640080" y="676656"/>
+            <a:ext cx="10911535" cy="868680"/>
+          </a:xfrm>
+          <a:prstGeom prst="rect">
+            <a:avLst/>
+          </a:prstGeom>
+          <a:noFill/>
+          <a:ln/>
+        </p:spPr>
+        <p:txBody>
+          <a:bodyPr wrap="square" lIns="0" tIns="0" rIns="0" bIns="0" rtlCol="0" anchor="t"/>
+          <a:lstStyle/>
+          <a:p>
+            <a:pPr algn="l" indent="0" marL="0">
+              <a:buNone/>
+            </a:pPr>
+            <a:r>
+              <a:rPr lang="en-US" sz="2700" dirty="0">
+                <a:solidFill>
+                  <a:srgbClr val="E8ECF2"/>
+                </a:solidFill>
+                <a:latin typeface="Century Schoolbook" pitchFamily="34" charset="0"/>
+                <a:ea typeface="Century Schoolbook" pitchFamily="34" charset="-122"/>
+                <a:cs typeface="Century Schoolbook" pitchFamily="34" charset="-120"/>
+              </a:rPr>
+              <a:t>Four ways I fooled myself, and how each was caught</a:t>
+            </a:r>
+            <a:endParaRPr lang="en-US" sz="2700" dirty="0"/>
+          </a:p>
+        </p:txBody>
+      </p:sp>
+      <p:sp>
+        <p:nvSpPr>
+          <p:cNvPr id="4" name="Text 2"/>
           <p:cNvSpPr txBox="1"/>
           <p:nvPr/>
         </p:nvSpPr>
         <p:spPr>
           <a:xfrm>
-            <a:off x="640080" y="1143000"/>
-            <a:ext cx="5943600" cy="777240"/>
+            <a:off x="640080" y="1810512"/>
+            <a:ext cx="411480" cy="457200"/>
           </a:xfrm>
           <a:prstGeom prst="rect">
             <a:avLst/>
@@ -13125,30 +13187,30 @@
               <a:buNone/>
             </a:pPr>
             <a:r>
-              <a:rPr lang="en-US" sz="4400" dirty="0">
-                <a:solidFill>
-                  <a:srgbClr val="FFFFFF"/>
+              <a:rPr lang="en-US" sz="2200" dirty="0">
+                <a:solidFill>
+                  <a:srgbClr val="3DDC97"/>
                 </a:solidFill>
                 <a:latin typeface="Century Schoolbook" pitchFamily="34" charset="0"/>
                 <a:ea typeface="Century Schoolbook" pitchFamily="34" charset="-122"/>
                 <a:cs typeface="Century Schoolbook" pitchFamily="34" charset="-120"/>
               </a:rPr>
-              <a:t>Thank you</a:t>
-            </a:r>
-            <a:endParaRPr lang="en-US" sz="4400" dirty="0"/>
+              <a:t>1</a:t>
+            </a:r>
+            <a:endParaRPr lang="en-US" sz="2200" dirty="0"/>
           </a:p>
         </p:txBody>
       </p:sp>
       <p:sp>
         <p:nvSpPr>
-          <p:cNvPr id="4" name="Text 1"/>
+          <p:cNvPr id="5" name="Text 3"/>
           <p:cNvSpPr txBox="1"/>
           <p:nvPr/>
         </p:nvSpPr>
         <p:spPr>
           <a:xfrm>
-            <a:off x="640080" y="1901952"/>
-            <a:ext cx="5943600" cy="548640"/>
+            <a:off x="1097280" y="1837944"/>
+            <a:ext cx="2606040" cy="777240"/>
           </a:xfrm>
           <a:prstGeom prst="rect">
             <a:avLst/>
@@ -13164,30 +13226,30 @@
               <a:buNone/>
             </a:pPr>
             <a:r>
-              <a:rPr lang="en-US" sz="2800" dirty="0">
-                <a:solidFill>
-                  <a:srgbClr val="3DDC97"/>
-                </a:solidFill>
-                <a:latin typeface="Century Schoolbook" pitchFamily="34" charset="0"/>
-                <a:ea typeface="Century Schoolbook" pitchFamily="34" charset="-122"/>
-                <a:cs typeface="Century Schoolbook" pitchFamily="34" charset="-120"/>
-              </a:rPr>
-              <a:t>Questions</a:t>
-            </a:r>
-            <a:endParaRPr lang="en-US" sz="2800" dirty="0"/>
+              <a:rPr lang="en-US" sz="1400" b="1" dirty="0">
+                <a:solidFill>
+                  <a:srgbClr val="E8ECF2"/>
+                </a:solidFill>
+                <a:latin typeface="Calibri" pitchFamily="34" charset="0"/>
+                <a:ea typeface="Calibri" pitchFamily="34" charset="-122"/>
+                <a:cs typeface="Calibri" pitchFamily="34" charset="-120"/>
+              </a:rPr>
+              <a:t>A probe that leaked the answer</a:t>
+            </a:r>
+            <a:endParaRPr lang="en-US" sz="1400" dirty="0"/>
           </a:p>
         </p:txBody>
       </p:sp>
       <p:sp>
         <p:nvSpPr>
-          <p:cNvPr id="5" name="Text 2"/>
+          <p:cNvPr id="6" name="Text 4"/>
           <p:cNvSpPr txBox="1"/>
           <p:nvPr/>
         </p:nvSpPr>
         <p:spPr>
           <a:xfrm>
-            <a:off x="640080" y="2743200"/>
-            <a:ext cx="5943600" cy="237744"/>
+            <a:off x="3794760" y="1810512"/>
+            <a:ext cx="4572000" cy="822960"/>
           </a:xfrm>
           <a:prstGeom prst="rect">
             <a:avLst/>
@@ -13203,30 +13265,30 @@
               <a:buNone/>
             </a:pPr>
             <a:r>
-              <a:rPr lang="en-US" sz="1050" b="1" spc="160" kern="0" dirty="0">
-                <a:solidFill>
-                  <a:srgbClr val="9AA6B6"/>
+              <a:rPr lang="en-US" sz="1150" dirty="0">
+                <a:solidFill>
+                  <a:srgbClr val="E8ECF2"/>
                 </a:solidFill>
                 <a:latin typeface="Calibri" pitchFamily="34" charset="0"/>
                 <a:ea typeface="Calibri" pitchFamily="34" charset="-122"/>
                 <a:cs typeface="Calibri" pitchFamily="34" charset="-120"/>
               </a:rPr>
-              <a:t>FIGURES FOR THE DISCUSSION</a:t>
-            </a:r>
-            <a:endParaRPr lang="en-US" sz="1050" dirty="0"/>
+              <a:t>hill_climbing.py chose its target widths with a min-degree probe whatever start it was asked for, so --start random was quietly handed a min-degree solution: 1,607,522 HV on medium-graph for a run that accepted zero moves.</a:t>
+            </a:r>
+            <a:endParaRPr lang="en-US" sz="1150" dirty="0"/>
           </a:p>
         </p:txBody>
       </p:sp>
       <p:sp>
         <p:nvSpPr>
-          <p:cNvPr id="6" name="Text 3"/>
+          <p:cNvPr id="7" name="Text 5"/>
           <p:cNvSpPr txBox="1"/>
           <p:nvPr/>
         </p:nvSpPr>
         <p:spPr>
           <a:xfrm>
-            <a:off x="640080" y="3090672"/>
-            <a:ext cx="2926080" cy="365760"/>
+            <a:off x="8641080" y="1810512"/>
+            <a:ext cx="2910535" cy="822960"/>
           </a:xfrm>
           <a:prstGeom prst="rect">
             <a:avLst/>
@@ -13242,30 +13304,53 @@
               <a:buNone/>
             </a:pPr>
             <a:r>
-              <a:rPr lang="en-US" sz="1900" dirty="0">
-                <a:solidFill>
-                  <a:srgbClr val="FFFFFF"/>
-                </a:solidFill>
-                <a:latin typeface="Century Schoolbook" pitchFamily="34" charset="0"/>
-                <a:ea typeface="Century Schoolbook" pitchFamily="34" charset="-122"/>
-                <a:cs typeface="Century Schoolbook" pitchFamily="34" charset="-120"/>
-              </a:rPr>
-              <a:t>5 of 10</a:t>
-            </a:r>
-            <a:endParaRPr lang="en-US" sz="1900" dirty="0"/>
+              <a:rPr lang="en-US" sz="1150" i="1" dirty="0">
+                <a:solidFill>
+                  <a:srgbClr val="9AA6B6"/>
+                </a:solidFill>
+                <a:latin typeface="Calibri" pitchFamily="34" charset="0"/>
+                <a:ea typeface="Calibri" pitchFamily="34" charset="-122"/>
+                <a:cs typeface="Calibri" pitchFamily="34" charset="-120"/>
+              </a:rPr>
+              <a:t>Caught by asking why a run with no accepted moves had a score at all.</a:t>
+            </a:r>
+            <a:endParaRPr lang="en-US" sz="1150" dirty="0"/>
           </a:p>
         </p:txBody>
       </p:sp>
       <p:sp>
         <p:nvSpPr>
-          <p:cNvPr id="7" name="Text 4"/>
+          <p:cNvPr id="8" name="Shape 6"/>
+          <p:cNvSpPr/>
+          <p:nvPr/>
+        </p:nvSpPr>
+        <p:spPr>
+          <a:xfrm>
+            <a:off x="640080" y="2651760"/>
+            <a:ext cx="10911535" cy="0"/>
+          </a:xfrm>
+          <a:prstGeom prst="line">
+            <a:avLst/>
+          </a:prstGeom>
+          <a:noFill/>
+          <a:ln w="6350">
+            <a:solidFill>
+              <a:srgbClr val="2A3546"/>
+            </a:solidFill>
+            <a:prstDash val="solid"/>
+          </a:ln>
+        </p:spPr>
+      </p:sp>
+      <p:sp>
+        <p:nvSpPr>
+          <p:cNvPr id="9" name="Text 7"/>
           <p:cNvSpPr txBox="1"/>
           <p:nvPr/>
         </p:nvSpPr>
         <p:spPr>
           <a:xfrm>
-            <a:off x="640080" y="3438144"/>
-            <a:ext cx="2834640" cy="420624"/>
+            <a:off x="640080" y="2743200"/>
+            <a:ext cx="411480" cy="457200"/>
           </a:xfrm>
           <a:prstGeom prst="rect">
             <a:avLst/>
@@ -13281,30 +13366,30 @@
               <a:buNone/>
             </a:pPr>
             <a:r>
-              <a:rPr lang="en-US" sz="1050" dirty="0">
-                <a:solidFill>
-                  <a:srgbClr val="9AA6B6"/>
-                </a:solidFill>
-                <a:latin typeface="Calibri" pitchFamily="34" charset="0"/>
-                <a:ea typeface="Calibri" pitchFamily="34" charset="-122"/>
-                <a:cs typeface="Calibri" pitchFamily="34" charset="-120"/>
-              </a:rPr>
-              <a:t>rows the seeds resolve</a:t>
-            </a:r>
-            <a:endParaRPr lang="en-US" sz="1050" dirty="0"/>
+              <a:rPr lang="en-US" sz="2200" dirty="0">
+                <a:solidFill>
+                  <a:srgbClr val="3DDC97"/>
+                </a:solidFill>
+                <a:latin typeface="Century Schoolbook" pitchFamily="34" charset="0"/>
+                <a:ea typeface="Century Schoolbook" pitchFamily="34" charset="-122"/>
+                <a:cs typeface="Century Schoolbook" pitchFamily="34" charset="-120"/>
+              </a:rPr>
+              <a:t>2</a:t>
+            </a:r>
+            <a:endParaRPr lang="en-US" sz="2200" dirty="0"/>
           </a:p>
         </p:txBody>
       </p:sp>
       <p:sp>
         <p:nvSpPr>
-          <p:cNvPr id="8" name="Text 5"/>
+          <p:cNvPr id="10" name="Text 8"/>
           <p:cNvSpPr txBox="1"/>
           <p:nvPr/>
         </p:nvSpPr>
         <p:spPr>
           <a:xfrm>
-            <a:off x="3703320" y="3090672"/>
-            <a:ext cx="2926080" cy="365760"/>
+            <a:off x="1097280" y="2770632"/>
+            <a:ext cx="2606040" cy="777240"/>
           </a:xfrm>
           <a:prstGeom prst="rect">
             <a:avLst/>
@@ -13320,30 +13405,47 @@
               <a:buNone/>
             </a:pPr>
             <a:r>
-              <a:rPr lang="en-US" sz="1900" dirty="0">
-                <a:solidFill>
-                  <a:srgbClr val="FFFFFF"/>
-                </a:solidFill>
-                <a:latin typeface="Century Schoolbook" pitchFamily="34" charset="0"/>
-                <a:ea typeface="Century Schoolbook" pitchFamily="34" charset="-122"/>
-                <a:cs typeface="Century Schoolbook" pitchFamily="34" charset="-120"/>
-              </a:rPr>
-              <a:t>15.9×</a:t>
-            </a:r>
-            <a:endParaRPr lang="en-US" sz="1900" dirty="0"/>
+              <a:rPr lang="en-US" sz="1400" b="1" dirty="0">
+                <a:solidFill>
+                  <a:srgbClr val="E8ECF2"/>
+                </a:solidFill>
+                <a:latin typeface="Calibri" pitchFamily="34" charset="0"/>
+                <a:ea typeface="Calibri" pitchFamily="34" charset="-122"/>
+                <a:cs typeface="Calibri" pitchFamily="34" charset="-120"/>
+              </a:rPr>
+              <a:t>A verification that</a:t>
+            </a:r>
+            <a:endParaRPr lang="en-US" sz="1400" dirty="0"/>
+          </a:p>
+          <a:p>
+            <a:pPr indent="0" marL="0">
+              <a:buNone/>
+            </a:pPr>
+            <a:r>
+              <a:rPr lang="en-US" sz="1400" b="1" dirty="0">
+                <a:solidFill>
+                  <a:srgbClr val="E8ECF2"/>
+                </a:solidFill>
+                <a:latin typeface="Calibri" pitchFamily="34" charset="0"/>
+                <a:ea typeface="Calibri" pitchFamily="34" charset="-122"/>
+                <a:cs typeface="Calibri" pitchFamily="34" charset="-120"/>
+              </a:rPr>
+              <a:t>was itself wrong</a:t>
+            </a:r>
+            <a:endParaRPr lang="en-US" sz="1400" dirty="0"/>
           </a:p>
         </p:txBody>
       </p:sp>
       <p:sp>
         <p:nvSpPr>
-          <p:cNvPr id="9" name="Text 6"/>
+          <p:cNvPr id="11" name="Text 9"/>
           <p:cNvSpPr txBox="1"/>
           <p:nvPr/>
         </p:nvSpPr>
         <p:spPr>
           <a:xfrm>
-            <a:off x="3703320" y="3438144"/>
-            <a:ext cx="2834640" cy="420624"/>
+            <a:off x="3794760" y="2743200"/>
+            <a:ext cx="4572000" cy="822960"/>
           </a:xfrm>
           <a:prstGeom prst="rect">
             <a:avLst/>
@@ -13359,30 +13461,30 @@
               <a:buNone/>
             </a:pPr>
             <a:r>
-              <a:rPr lang="en-US" sz="1050" dirty="0">
-                <a:solidFill>
-                  <a:srgbClr val="9AA6B6"/>
+              <a:rPr lang="en-US" sz="1150" dirty="0">
+                <a:solidFill>
+                  <a:srgbClr val="E8ECF2"/>
                 </a:solidFill>
                 <a:latin typeface="Calibri" pitchFamily="34" charset="0"/>
                 <a:ea typeface="Calibri" pitchFamily="34" charset="-122"/>
                 <a:cs typeface="Calibri" pitchFamily="34" charset="-120"/>
               </a:rPr>
-              <a:t>construction against the control’s re-draw; search arms 0.4–2.0×</a:t>
-            </a:r>
-            <a:endParaRPr lang="en-US" sz="1050" dirty="0"/>
+              <a:t>Re-running the runs to confirm them gave mismatches on 29 of 30 rows. The climb stops on elapsed time, so a run can be re-sampled, never reproduced.</a:t>
+            </a:r>
+            <a:endParaRPr lang="en-US" sz="1150" dirty="0"/>
           </a:p>
         </p:txBody>
       </p:sp>
       <p:sp>
         <p:nvSpPr>
-          <p:cNvPr id="10" name="Text 7"/>
+          <p:cNvPr id="12" name="Text 10"/>
           <p:cNvSpPr txBox="1"/>
           <p:nvPr/>
         </p:nvSpPr>
         <p:spPr>
           <a:xfrm>
-            <a:off x="640080" y="3931920"/>
-            <a:ext cx="2926080" cy="365760"/>
+            <a:off x="8641080" y="2743200"/>
+            <a:ext cx="2910535" cy="822960"/>
           </a:xfrm>
           <a:prstGeom prst="rect">
             <a:avLst/>
@@ -13398,30 +13500,53 @@
               <a:buNone/>
             </a:pPr>
             <a:r>
-              <a:rPr lang="en-US" sz="1900" dirty="0">
-                <a:solidFill>
-                  <a:srgbClr val="FFFFFF"/>
-                </a:solidFill>
-                <a:latin typeface="Century Schoolbook" pitchFamily="34" charset="0"/>
-                <a:ea typeface="Century Schoolbook" pitchFamily="34" charset="-122"/>
-                <a:cs typeface="Century Schoolbook" pitchFamily="34" charset="-120"/>
-              </a:rPr>
-              <a:t>21,519 HV</a:t>
-            </a:r>
-            <a:endParaRPr lang="en-US" sz="1900" dirty="0"/>
+              <a:rPr lang="en-US" sz="1150" i="1" dirty="0">
+                <a:solidFill>
+                  <a:srgbClr val="9AA6B6"/>
+                </a:solidFill>
+                <a:latin typeface="Calibri" pitchFamily="34" charset="0"/>
+                <a:ea typeface="Calibri" pitchFamily="34" charset="-122"/>
+                <a:cs typeface="Calibri" pitchFamily="34" charset="-120"/>
+              </a:rPr>
+              <a:t>The check was wrong, not the harness, and the accident produced two independent controls.</a:t>
+            </a:r>
+            <a:endParaRPr lang="en-US" sz="1150" dirty="0"/>
           </a:p>
         </p:txBody>
       </p:sp>
       <p:sp>
         <p:nvSpPr>
-          <p:cNvPr id="11" name="Text 8"/>
+          <p:cNvPr id="13" name="Shape 11"/>
+          <p:cNvSpPr/>
+          <p:nvPr/>
+        </p:nvSpPr>
+        <p:spPr>
+          <a:xfrm>
+            <a:off x="640080" y="3584448"/>
+            <a:ext cx="10911535" cy="0"/>
+          </a:xfrm>
+          <a:prstGeom prst="line">
+            <a:avLst/>
+          </a:prstGeom>
+          <a:noFill/>
+          <a:ln w="6350">
+            <a:solidFill>
+              <a:srgbClr val="2A3546"/>
+            </a:solidFill>
+            <a:prstDash val="solid"/>
+          </a:ln>
+        </p:spPr>
+      </p:sp>
+      <p:sp>
+        <p:nvSpPr>
+          <p:cNvPr id="14" name="Text 12"/>
           <p:cNvSpPr txBox="1"/>
           <p:nvPr/>
         </p:nvSpPr>
         <p:spPr>
           <a:xfrm>
-            <a:off x="640080" y="4279392"/>
-            <a:ext cx="2834640" cy="420624"/>
+            <a:off x="640080" y="3675888"/>
+            <a:ext cx="411480" cy="457200"/>
           </a:xfrm>
           <a:prstGeom prst="rect">
             <a:avLst/>
@@ -13437,30 +13562,30 @@
               <a:buNone/>
             </a:pPr>
             <a:r>
-              <a:rPr lang="en-US" sz="1050" dirty="0">
-                <a:solidFill>
-                  <a:srgbClr val="9AA6B6"/>
-                </a:solidFill>
-                <a:latin typeface="Calibri" pitchFamily="34" charset="0"/>
-                <a:ea typeface="Calibri" pitchFamily="34" charset="-122"/>
-                <a:cs typeface="Calibri" pitchFamily="34" charset="-120"/>
-              </a:rPr>
-              <a:t>session shift of the ten-instance total (p ≈ 0.05)</a:t>
-            </a:r>
-            <a:endParaRPr lang="en-US" sz="1050" dirty="0"/>
+              <a:rPr lang="en-US" sz="2200" dirty="0">
+                <a:solidFill>
+                  <a:srgbClr val="3DDC97"/>
+                </a:solidFill>
+                <a:latin typeface="Century Schoolbook" pitchFamily="34" charset="0"/>
+                <a:ea typeface="Century Schoolbook" pitchFamily="34" charset="-122"/>
+                <a:cs typeface="Century Schoolbook" pitchFamily="34" charset="-120"/>
+              </a:rPr>
+              <a:t>3</a:t>
+            </a:r>
+            <a:endParaRPr lang="en-US" sz="2200" dirty="0"/>
           </a:p>
         </p:txBody>
       </p:sp>
       <p:sp>
         <p:nvSpPr>
-          <p:cNvPr id="12" name="Text 9"/>
+          <p:cNvPr id="15" name="Text 13"/>
           <p:cNvSpPr txBox="1"/>
           <p:nvPr/>
         </p:nvSpPr>
         <p:spPr>
           <a:xfrm>
-            <a:off x="3703320" y="3931920"/>
-            <a:ext cx="2926080" cy="365760"/>
+            <a:off x="1097280" y="3703320"/>
+            <a:ext cx="2606040" cy="777240"/>
           </a:xfrm>
           <a:prstGeom prst="rect">
             <a:avLst/>
@@ -13476,30 +13601,30 @@
               <a:buNone/>
             </a:pPr>
             <a:r>
-              <a:rPr lang="en-US" sz="1900" dirty="0">
-                <a:solidFill>
-                  <a:srgbClr val="FFFFFF"/>
-                </a:solidFill>
-                <a:latin typeface="Century Schoolbook" pitchFamily="34" charset="0"/>
-                <a:ea typeface="Century Schoolbook" pitchFamily="34" charset="-122"/>
-                <a:cs typeface="Century Schoolbook" pitchFamily="34" charset="-120"/>
-              </a:rPr>
-              <a:t>0.23%</a:t>
-            </a:r>
-            <a:endParaRPr lang="en-US" sz="1900" dirty="0"/>
+              <a:rPr lang="en-US" sz="1400" b="1" dirty="0">
+                <a:solidFill>
+                  <a:srgbClr val="E8ECF2"/>
+                </a:solidFill>
+                <a:latin typeface="Calibri" pitchFamily="34" charset="0"/>
+                <a:ea typeface="Calibri" pitchFamily="34" charset="-122"/>
+                <a:cs typeface="Calibri" pitchFamily="34" charset="-120"/>
+              </a:rPr>
+              <a:t>A 32-bit overflow in someone else’s kernel</a:t>
+            </a:r>
+            <a:endParaRPr lang="en-US" sz="1400" dirty="0"/>
           </a:p>
         </p:txBody>
       </p:sp>
       <p:sp>
         <p:nvSpPr>
-          <p:cNvPr id="13" name="Text 10"/>
+          <p:cNvPr id="16" name="Text 14"/>
           <p:cNvSpPr txBox="1"/>
           <p:nvPr/>
         </p:nvSpPr>
         <p:spPr>
           <a:xfrm>
-            <a:off x="3703320" y="4279392"/>
-            <a:ext cx="2834640" cy="420624"/>
+            <a:off x="3794760" y="3675888"/>
+            <a:ext cx="4572000" cy="822960"/>
           </a:xfrm>
           <a:prstGeom prst="rect">
             <a:avLst/>
@@ -13515,30 +13640,30 @@
               <a:buNone/>
             </a:pPr>
             <a:r>
-              <a:rPr lang="en-US" sz="1050" dirty="0">
-                <a:solidFill>
-                  <a:srgbClr val="9AA6B6"/>
+              <a:rPr lang="en-US" sz="1150" dirty="0">
+                <a:solidFill>
+                  <a:srgbClr val="E8ECF2"/>
                 </a:solidFill>
                 <a:latin typeface="Calibri" pitchFamily="34" charset="0"/>
                 <a:ea typeface="Calibri" pitchFamily="34" charset="-122"/>
                 <a:cs typeface="Calibri" pitchFamily="34" charset="-120"/>
               </a:rPr>
-              <a:t>the highest accept rate measured anywhere</a:t>
-            </a:r>
-            <a:endParaRPr lang="en-US" sz="1050" dirty="0"/>
+              <a:t>The vendored CUDA evaluator indexed a B×N×N array with an int offset, which wraps past 2³¹ at n = 2,426, thread 365 of 1,024.</a:t>
+            </a:r>
+            <a:endParaRPr lang="en-US" sz="1150" dirty="0"/>
           </a:p>
         </p:txBody>
       </p:sp>
       <p:sp>
         <p:nvSpPr>
-          <p:cNvPr id="14" name="Text 11"/>
+          <p:cNvPr id="17" name="Text 15"/>
           <p:cNvSpPr txBox="1"/>
           <p:nvPr/>
         </p:nvSpPr>
         <p:spPr>
           <a:xfrm>
-            <a:off x="640080" y="4773168"/>
-            <a:ext cx="2926080" cy="365760"/>
+            <a:off x="8641080" y="3675888"/>
+            <a:ext cx="2910535" cy="822960"/>
           </a:xfrm>
           <a:prstGeom prst="rect">
             <a:avLst/>
@@ -13554,30 +13679,53 @@
               <a:buNone/>
             </a:pPr>
             <a:r>
-              <a:rPr lang="en-US" sz="1900" dirty="0">
-                <a:solidFill>
-                  <a:srgbClr val="FFFFFF"/>
-                </a:solidFill>
-                <a:latin typeface="Century Schoolbook" pitchFamily="34" charset="0"/>
-                <a:ea typeface="Century Schoolbook" pitchFamily="34" charset="-122"/>
-                <a:cs typeface="Century Schoolbook" pitchFamily="34" charset="-120"/>
-              </a:rPr>
-              <a:t>+33,043 HV</a:t>
-            </a:r>
-            <a:endParaRPr lang="en-US" sz="1900" dirty="0"/>
+              <a:rPr lang="en-US" sz="1150" i="1" dirty="0">
+                <a:solidFill>
+                  <a:srgbClr val="9AA6B6"/>
+                </a:solidFill>
+                <a:latin typeface="Calibri" pitchFamily="34" charset="0"/>
+                <a:ea typeface="Calibri" pitchFamily="34" charset="-122"/>
+                <a:cs typeface="Calibri" pitchFamily="34" charset="-120"/>
+              </a:rPr>
+              <a:t>Caught because every n = 2,426 run died early with an illegal memory access; one type change fixed it.</a:t>
+            </a:r>
+            <a:endParaRPr lang="en-US" sz="1150" dirty="0"/>
           </a:p>
         </p:txBody>
       </p:sp>
       <p:sp>
         <p:nvSpPr>
-          <p:cNvPr id="15" name="Text 12"/>
+          <p:cNvPr id="18" name="Shape 16"/>
+          <p:cNvSpPr/>
+          <p:nvPr/>
+        </p:nvSpPr>
+        <p:spPr>
+          <a:xfrm>
+            <a:off x="640080" y="4517136"/>
+            <a:ext cx="10911535" cy="0"/>
+          </a:xfrm>
+          <a:prstGeom prst="line">
+            <a:avLst/>
+          </a:prstGeom>
+          <a:noFill/>
+          <a:ln w="6350">
+            <a:solidFill>
+              <a:srgbClr val="2A3546"/>
+            </a:solidFill>
+            <a:prstDash val="solid"/>
+          </a:ln>
+        </p:spPr>
+      </p:sp>
+      <p:sp>
+        <p:nvSpPr>
+          <p:cNvPr id="19" name="Text 17"/>
           <p:cNvSpPr txBox="1"/>
           <p:nvPr/>
         </p:nvSpPr>
         <p:spPr>
           <a:xfrm>
-            <a:off x="640080" y="5120640"/>
-            <a:ext cx="2834640" cy="420624"/>
+            <a:off x="640080" y="4608576"/>
+            <a:ext cx="411480" cy="457200"/>
           </a:xfrm>
           <a:prstGeom prst="rect">
             <a:avLst/>
@@ -13593,30 +13741,30 @@
               <a:buNone/>
             </a:pPr>
             <a:r>
-              <a:rPr lang="en-US" sz="1050" dirty="0">
-                <a:solidFill>
-                  <a:srgbClr val="9AA6B6"/>
-                </a:solidFill>
-                <a:latin typeface="Calibri" pitchFamily="34" charset="0"/>
-                <a:ea typeface="Calibri" pitchFamily="34" charset="-122"/>
-                <a:cs typeface="Calibri" pitchFamily="34" charset="-120"/>
-              </a:rPr>
-              <a:t>what 10× the budget buys search, against a lead ≥ 269,607</a:t>
-            </a:r>
-            <a:endParaRPr lang="en-US" sz="1050" dirty="0"/>
+              <a:rPr lang="en-US" sz="2200" dirty="0">
+                <a:solidFill>
+                  <a:srgbClr val="F2C14E"/>
+                </a:solidFill>
+                <a:latin typeface="Century Schoolbook" pitchFamily="34" charset="0"/>
+                <a:ea typeface="Century Schoolbook" pitchFamily="34" charset="-122"/>
+                <a:cs typeface="Century Schoolbook" pitchFamily="34" charset="-120"/>
+              </a:rPr>
+              <a:t>4</a:t>
+            </a:r>
+            <a:endParaRPr lang="en-US" sz="2200" dirty="0"/>
           </a:p>
         </p:txBody>
       </p:sp>
       <p:sp>
         <p:nvSpPr>
-          <p:cNvPr id="16" name="Text 13"/>
+          <p:cNvPr id="20" name="Text 18"/>
           <p:cNvSpPr txBox="1"/>
           <p:nvPr/>
         </p:nvSpPr>
         <p:spPr>
           <a:xfrm>
-            <a:off x="3703320" y="4773168"/>
-            <a:ext cx="2926080" cy="365760"/>
+            <a:off x="1097280" y="4636008"/>
+            <a:ext cx="2606040" cy="777240"/>
           </a:xfrm>
           <a:prstGeom prst="rect">
             <a:avLst/>
@@ -13632,30 +13780,30 @@
               <a:buNone/>
             </a:pPr>
             <a:r>
-              <a:rPr lang="en-US" sz="1900" dirty="0">
-                <a:solidFill>
-                  <a:srgbClr val="FFFFFF"/>
-                </a:solidFill>
-                <a:latin typeface="Century Schoolbook" pitchFamily="34" charset="0"/>
-                <a:ea typeface="Century Schoolbook" pitchFamily="34" charset="-122"/>
-                <a:cs typeface="Century Schoolbook" pitchFamily="34" charset="-120"/>
-              </a:rPr>
-              <a:t>0.63%</a:t>
-            </a:r>
-            <a:endParaRPr lang="en-US" sz="1900" dirty="0"/>
+              <a:rPr lang="en-US" sz="1400" b="1" dirty="0">
+                <a:solidFill>
+                  <a:srgbClr val="E8ECF2"/>
+                </a:solidFill>
+                <a:latin typeface="Calibri" pitchFamily="34" charset="0"/>
+                <a:ea typeface="Calibri" pitchFamily="34" charset="-122"/>
+                <a:cs typeface="Calibri" pitchFamily="34" charset="-120"/>
+              </a:rPr>
+              <a:t>A threshold borrowed from one method</a:t>
+            </a:r>
+            <a:endParaRPr lang="en-US" sz="1400" dirty="0"/>
           </a:p>
         </p:txBody>
       </p:sp>
       <p:sp>
         <p:nvSpPr>
-          <p:cNvPr id="17" name="Text 14"/>
+          <p:cNvPr id="21" name="Text 19"/>
           <p:cNvSpPr txBox="1"/>
           <p:nvPr/>
         </p:nvSpPr>
         <p:spPr>
           <a:xfrm>
-            <a:off x="3703320" y="5120640"/>
-            <a:ext cx="2834640" cy="420624"/>
+            <a:off x="3794760" y="4608576"/>
+            <a:ext cx="4572000" cy="822960"/>
           </a:xfrm>
           <a:prstGeom prst="rect">
             <a:avLst/>
@@ -13671,30 +13819,30 @@
               <a:buNone/>
             </a:pPr>
             <a:r>
-              <a:rPr lang="en-US" sz="1050" dirty="0">
-                <a:solidFill>
-                  <a:srgbClr val="9AA6B6"/>
+              <a:rPr lang="en-US" sz="1150" dirty="0">
+                <a:solidFill>
+                  <a:srgbClr val="E8ECF2"/>
                 </a:solidFill>
                 <a:latin typeface="Calibri" pitchFamily="34" charset="0"/>
                 <a:ea typeface="Calibri" pitchFamily="34" charset="-122"/>
                 <a:cs typeface="Calibri" pitchFamily="34" charset="-120"/>
               </a:rPr>
-              <a:t>best known small-graph score below a provable ceiling</a:t>
-            </a:r>
-            <a:endParaRPr lang="en-US" sz="1050" dirty="0"/>
+              <a:t>One 7,881 HV floor, taken from Hill Climbing’s worst instance, judged every method’s rows, while Team HRI’s own seeds on medium-graph span 80,376 HV.</a:t>
+            </a:r>
+            <a:endParaRPr lang="en-US" sz="1150" dirty="0"/>
           </a:p>
         </p:txBody>
       </p:sp>
       <p:sp>
         <p:nvSpPr>
-          <p:cNvPr id="18" name="Text 15"/>
+          <p:cNvPr id="22" name="Text 20"/>
           <p:cNvSpPr txBox="1"/>
           <p:nvPr/>
         </p:nvSpPr>
         <p:spPr>
           <a:xfrm>
-            <a:off x="640080" y="5833872"/>
-            <a:ext cx="6858000" cy="274320"/>
+            <a:off x="8641080" y="4608576"/>
+            <a:ext cx="2910535" cy="822960"/>
           </a:xfrm>
           <a:prstGeom prst="rect">
             <a:avLst/>
@@ -13710,30 +13858,30 @@
               <a:buNone/>
             </a:pPr>
             <a:r>
-              <a:rPr lang="en-US" sz="1300" dirty="0">
-                <a:solidFill>
-                  <a:srgbClr val="E8ECF2"/>
+              <a:rPr lang="en-US" sz="1150" i="1" dirty="0">
+                <a:solidFill>
+                  <a:srgbClr val="9AA6B6"/>
                 </a:solidFill>
                 <a:latin typeface="Calibri" pitchFamily="34" charset="0"/>
                 <a:ea typeface="Calibri" pitchFamily="34" charset="-122"/>
                 <a:cs typeface="Calibri" pitchFamily="34" charset="-120"/>
               </a:rPr>
-              <a:t>Adrian Ymeri · adrian.ymeri@uni-pr.edu · University of Prishtina</a:t>
-            </a:r>
-            <a:endParaRPr lang="en-US" sz="1300" dirty="0"/>
+              <a:t>Caught by reading the seeds instead of the best of three: four of ten verdicts changed.</a:t>
+            </a:r>
+            <a:endParaRPr lang="en-US" sz="1150" dirty="0"/>
           </a:p>
         </p:txBody>
       </p:sp>
       <p:sp>
         <p:nvSpPr>
-          <p:cNvPr id="19" name="Text 16"/>
+          <p:cNvPr id="23" name="Text 21"/>
           <p:cNvSpPr txBox="1"/>
           <p:nvPr/>
         </p:nvSpPr>
         <p:spPr>
           <a:xfrm>
-            <a:off x="640080" y="6163056"/>
-            <a:ext cx="6858000" cy="237744"/>
+            <a:off x="640080" y="5650992"/>
+            <a:ext cx="10911535" cy="502920"/>
           </a:xfrm>
           <a:prstGeom prst="rect">
             <a:avLst/>
@@ -13749,17 +13897,65 @@
               <a:buNone/>
             </a:pPr>
             <a:r>
-              <a:rPr lang="en-US" sz="1050" dirty="0">
+              <a:rPr lang="en-US" sz="1550" i="1" dirty="0">
+                <a:solidFill>
+                  <a:srgbClr val="E8ECF2"/>
+                </a:solidFill>
+                <a:latin typeface="Century Schoolbook" pitchFamily="34" charset="0"/>
+                <a:ea typeface="Century Schoolbook" pitchFamily="34" charset="-122"/>
+                <a:cs typeface="Century Schoolbook" pitchFamily="34" charset="-120"/>
+              </a:rPr>
+              <a:t>None was caught by a test suite. Each was caught by a number that was the wrong shape for its story.</a:t>
+            </a:r>
+            <a:endParaRPr lang="en-US" sz="1550" dirty="0"/>
+          </a:p>
+        </p:txBody>
+      </p:sp>
+      <p:sp>
+        <p:nvSpPr>
+          <p:cNvPr id="25" name="Slide Number Placeholder 0"/>
+          <p:cNvSpPr>
+            <a:spLocks noGrp="1"/>
+          </p:cNvSpPr>
+          <p:nvPr>
+            <p:ph type="sldNum" sz="quarter" idx="4294967295"/>
+          </p:nvPr>
+        </p:nvSpPr>
+        <p:spPr>
+          <a:xfrm>
+            <a:off x="11002975" y="6446520"/>
+            <a:ext cx="548640" cy="219456"/>
+          </a:xfrm>
+          <a:prstGeom prst="rect">
+            <a:avLst/>
+          </a:prstGeom>
+          <a:extLst>
+            <a:ext uri="{C572A759-6A51-4108-AA02-DFA0A04FC94B}">
+              <ma14:wrappingTextBoxFlag xmlns:ma14="http://schemas.microsoft.com/office/mac/drawingml/2011/main" val="0"/>
+            </a:ext>
+          </a:extLst>
+        </p:spPr>
+        <p:txBody>
+          <a:bodyPr/>
+          <a:lstStyle>
+            <a:lvl1pPr>
+              <a:defRPr sz="1000">
                 <a:solidFill>
                   <a:srgbClr val="7D8AA0"/>
                 </a:solidFill>
-                <a:latin typeface="Calibri" pitchFamily="34" charset="0"/>
-                <a:ea typeface="Calibri" pitchFamily="34" charset="-122"/>
-                <a:cs typeface="Calibri" pitchFamily="34" charset="-120"/>
-              </a:rPr>
-              <a:t>Code, raw CSVs and every figure in this talk regenerate from the study’s harness.</a:t>
-            </a:r>
-            <a:endParaRPr lang="en-US" sz="1050" dirty="0"/>
+                <a:latin typeface="Calibri"/>
+                <a:ea typeface="Calibri"/>
+                <a:cs typeface="Calibri"/>
+              </a:defRPr>
+            </a:lvl1pPr>
+          </a:lstStyle>
+          <a:p>
+            <a:pPr algn="r"/>
+            <a:fld id="{F7021451-1387-4CA6-816F-3879F97B5CBC}" type="slidenum">
+              <a:rPr b="0" lang="en-US"/>
+              <a:t>15</a:t>
+            </a:fld>
+            <a:endParaRPr lang="en-US"/>
           </a:p>
         </p:txBody>
       </p:sp>
@@ -13772,7 +13968,7 @@
 </file>
 
 <file path=ppt/slides/slide16.xml><?xml version="1.0" encoding="utf-8"?>
-<p:sld xmlns:a="http://schemas.openxmlformats.org/drawingml/2006/main" xmlns:r="http://schemas.openxmlformats.org/officeDocument/2006/relationships" xmlns:p="http://schemas.openxmlformats.org/presentationml/2006/main">
+<p:sld xmlns:a="http://schemas.openxmlformats.org/drawingml/2006/main" xmlns:r="http://schemas.openxmlformats.org/officeDocument/2006/relationships" xmlns:p="http://schemas.openxmlformats.org/presentationml/2006/main" show="0">
   <p:cSld name="Slide 16">
     <p:spTree>
       <p:nvGrpSpPr>
@@ -13864,7 +14060,7 @@
                 <a:ea typeface="Century Schoolbook" pitchFamily="34" charset="-122"/>
                 <a:cs typeface="Century Schoolbook" pitchFamily="34" charset="-120"/>
               </a:rPr>
-              <a:t>Four ways I fooled myself, and how each was caught</a:t>
+              <a:t>Protocol, and what it does not control</a:t>
             </a:r>
             <a:endParaRPr lang="en-US" sz="2700" dirty="0"/>
           </a:p>
@@ -13879,7 +14075,7 @@
         <p:spPr>
           <a:xfrm>
             <a:off x="640080" y="1810512"/>
-            <a:ext cx="411480" cy="457200"/>
+            <a:ext cx="2011680" cy="548640"/>
           </a:xfrm>
           <a:prstGeom prst="rect">
             <a:avLst/>
@@ -13895,17 +14091,17 @@
               <a:buNone/>
             </a:pPr>
             <a:r>
-              <a:rPr lang="en-US" sz="2200" dirty="0">
+              <a:rPr lang="en-US" sz="1400" b="1" dirty="0">
                 <a:solidFill>
                   <a:srgbClr val="3DDC97"/>
                 </a:solidFill>
-                <a:latin typeface="Century Schoolbook" pitchFamily="34" charset="0"/>
-                <a:ea typeface="Century Schoolbook" pitchFamily="34" charset="-122"/>
-                <a:cs typeface="Century Schoolbook" pitchFamily="34" charset="-120"/>
-              </a:rPr>
-              <a:t>1</a:t>
-            </a:r>
-            <a:endParaRPr lang="en-US" sz="2200" dirty="0"/>
+                <a:latin typeface="Calibri" pitchFamily="34" charset="0"/>
+                <a:ea typeface="Calibri" pitchFamily="34" charset="-122"/>
+                <a:cs typeface="Calibri" pitchFamily="34" charset="-120"/>
+              </a:rPr>
+              <a:t>Budget</a:t>
+            </a:r>
+            <a:endParaRPr lang="en-US" sz="1400" dirty="0"/>
           </a:p>
         </p:txBody>
       </p:sp>
@@ -13917,8 +14113,8 @@
         </p:nvSpPr>
         <p:spPr>
           <a:xfrm>
-            <a:off x="1097280" y="1837944"/>
-            <a:ext cx="2606040" cy="777240"/>
+            <a:off x="2834640" y="1810512"/>
+            <a:ext cx="8716975" cy="603504"/>
           </a:xfrm>
           <a:prstGeom prst="rect">
             <a:avLst/>
@@ -13934,7 +14130,7 @@
               <a:buNone/>
             </a:pPr>
             <a:r>
-              <a:rPr lang="en-US" sz="1400" b="1" dirty="0">
+              <a:rPr lang="en-US" sz="1300" dirty="0">
                 <a:solidFill>
                   <a:srgbClr val="E8ECF2"/>
                 </a:solidFill>
@@ -13942,99 +14138,21 @@
                 <a:ea typeface="Calibri" pitchFamily="34" charset="-122"/>
                 <a:cs typeface="Calibri" pitchFamily="34" charset="-120"/>
               </a:rPr>
-              <a:t>A probe that leaked the answer</a:t>
-            </a:r>
-            <a:endParaRPr lang="en-US" sz="1400" dirty="0"/>
+              <a:t>1,200 s wall-clock per run, three seeds, ten instances. Four runs fell outside 1,150–1,400 s after machine stalls; none of them supplies a best-of-3 value.</a:t>
+            </a:r>
+            <a:endParaRPr lang="en-US" sz="1300" dirty="0"/>
           </a:p>
         </p:txBody>
       </p:sp>
       <p:sp>
         <p:nvSpPr>
-          <p:cNvPr id="6" name="Text 4"/>
-          <p:cNvSpPr txBox="1"/>
-          <p:nvPr/>
-        </p:nvSpPr>
-        <p:spPr>
-          <a:xfrm>
-            <a:off x="3794760" y="1810512"/>
-            <a:ext cx="4572000" cy="822960"/>
-          </a:xfrm>
-          <a:prstGeom prst="rect">
-            <a:avLst/>
-          </a:prstGeom>
-          <a:noFill/>
-          <a:ln/>
-        </p:spPr>
-        <p:txBody>
-          <a:bodyPr wrap="square" lIns="0" tIns="0" rIns="0" bIns="0" rtlCol="0" anchor="t"/>
-          <a:lstStyle/>
-          <a:p>
-            <a:pPr indent="0" marL="0">
-              <a:buNone/>
-            </a:pPr>
-            <a:r>
-              <a:rPr lang="en-US" sz="1150" dirty="0">
-                <a:solidFill>
-                  <a:srgbClr val="E8ECF2"/>
-                </a:solidFill>
-                <a:latin typeface="Calibri" pitchFamily="34" charset="0"/>
-                <a:ea typeface="Calibri" pitchFamily="34" charset="-122"/>
-                <a:cs typeface="Calibri" pitchFamily="34" charset="-120"/>
-              </a:rPr>
-              <a:t>hill_climbing.py chose its target widths with a min-degree probe whatever start it was asked for, so --start random was quietly handed a min-degree solution: 1,607,522 HV on medium-graph for a run that accepted zero moves.</a:t>
-            </a:r>
-            <a:endParaRPr lang="en-US" sz="1150" dirty="0"/>
-          </a:p>
-        </p:txBody>
-      </p:sp>
-      <p:sp>
-        <p:nvSpPr>
-          <p:cNvPr id="7" name="Text 5"/>
-          <p:cNvSpPr txBox="1"/>
-          <p:nvPr/>
-        </p:nvSpPr>
-        <p:spPr>
-          <a:xfrm>
-            <a:off x="8641080" y="1810512"/>
-            <a:ext cx="2910535" cy="822960"/>
-          </a:xfrm>
-          <a:prstGeom prst="rect">
-            <a:avLst/>
-          </a:prstGeom>
-          <a:noFill/>
-          <a:ln/>
-        </p:spPr>
-        <p:txBody>
-          <a:bodyPr wrap="square" lIns="0" tIns="0" rIns="0" bIns="0" rtlCol="0" anchor="t"/>
-          <a:lstStyle/>
-          <a:p>
-            <a:pPr indent="0" marL="0">
-              <a:buNone/>
-            </a:pPr>
-            <a:r>
-              <a:rPr lang="en-US" sz="1150" i="1" dirty="0">
-                <a:solidFill>
-                  <a:srgbClr val="9AA6B6"/>
-                </a:solidFill>
-                <a:latin typeface="Calibri" pitchFamily="34" charset="0"/>
-                <a:ea typeface="Calibri" pitchFamily="34" charset="-122"/>
-                <a:cs typeface="Calibri" pitchFamily="34" charset="-120"/>
-              </a:rPr>
-              <a:t>Caught by asking why a run with no accepted moves had a score at all.</a:t>
-            </a:r>
-            <a:endParaRPr lang="en-US" sz="1150" dirty="0"/>
-          </a:p>
-        </p:txBody>
-      </p:sp>
-      <p:sp>
-        <p:nvSpPr>
-          <p:cNvPr id="8" name="Shape 6"/>
-          <p:cNvSpPr/>
-          <p:nvPr/>
-        </p:nvSpPr>
-        <p:spPr>
-          <a:xfrm>
-            <a:off x="640080" y="2651760"/>
+          <p:cNvPr id="6" name="Shape 4"/>
+          <p:cNvSpPr/>
+          <p:nvPr/>
+        </p:nvSpPr>
+        <p:spPr>
+          <a:xfrm>
+            <a:off x="640080" y="2432304"/>
             <a:ext cx="10911535" cy="0"/>
           </a:xfrm>
           <a:prstGeom prst="line">
@@ -14051,14 +14169,14 @@
       </p:sp>
       <p:sp>
         <p:nvSpPr>
-          <p:cNvPr id="9" name="Text 7"/>
+          <p:cNvPr id="7" name="Text 5"/>
           <p:cNvSpPr txBox="1"/>
           <p:nvPr/>
         </p:nvSpPr>
         <p:spPr>
           <a:xfrm>
-            <a:off x="640080" y="2743200"/>
-            <a:ext cx="411480" cy="457200"/>
+            <a:off x="640080" y="2523744"/>
+            <a:ext cx="2011680" cy="548640"/>
           </a:xfrm>
           <a:prstGeom prst="rect">
             <a:avLst/>
@@ -14074,30 +14192,30 @@
               <a:buNone/>
             </a:pPr>
             <a:r>
-              <a:rPr lang="en-US" sz="2200" dirty="0">
+              <a:rPr lang="en-US" sz="1400" b="1" dirty="0">
                 <a:solidFill>
                   <a:srgbClr val="3DDC97"/>
                 </a:solidFill>
-                <a:latin typeface="Century Schoolbook" pitchFamily="34" charset="0"/>
-                <a:ea typeface="Century Schoolbook" pitchFamily="34" charset="-122"/>
-                <a:cs typeface="Century Schoolbook" pitchFamily="34" charset="-120"/>
-              </a:rPr>
-              <a:t>2</a:t>
-            </a:r>
-            <a:endParaRPr lang="en-US" sz="2200" dirty="0"/>
+                <a:latin typeface="Calibri" pitchFamily="34" charset="0"/>
+                <a:ea typeface="Calibri" pitchFamily="34" charset="-122"/>
+                <a:cs typeface="Calibri" pitchFamily="34" charset="-120"/>
+              </a:rPr>
+              <a:t>Hardware</a:t>
+            </a:r>
+            <a:endParaRPr lang="en-US" sz="1400" dirty="0"/>
           </a:p>
         </p:txBody>
       </p:sp>
       <p:sp>
         <p:nvSpPr>
-          <p:cNvPr id="10" name="Text 8"/>
+          <p:cNvPr id="8" name="Text 6"/>
           <p:cNvSpPr txBox="1"/>
           <p:nvPr/>
         </p:nvSpPr>
         <p:spPr>
           <a:xfrm>
-            <a:off x="1097280" y="2770632"/>
-            <a:ext cx="2606040" cy="777240"/>
+            <a:off x="2834640" y="2523744"/>
+            <a:ext cx="8716975" cy="603504"/>
           </a:xfrm>
           <a:prstGeom prst="rect">
             <a:avLst/>
@@ -14113,7 +14231,7 @@
               <a:buNone/>
             </a:pPr>
             <a:r>
-              <a:rPr lang="en-US" sz="1400" b="1" dirty="0">
+              <a:rPr lang="en-US" sz="1300" dirty="0">
                 <a:solidFill>
                   <a:srgbClr val="E8ECF2"/>
                 </a:solidFill>
@@ -14121,116 +14239,21 @@
                 <a:ea typeface="Calibri" pitchFamily="34" charset="-122"/>
                 <a:cs typeface="Calibri" pitchFamily="34" charset="-120"/>
               </a:rPr>
-              <a:t>A verification that</a:t>
-            </a:r>
-            <a:endParaRPr lang="en-US" sz="1400" dirty="0"/>
-          </a:p>
-          <a:p>
-            <a:pPr indent="0" marL="0">
-              <a:buNone/>
-            </a:pPr>
-            <a:r>
-              <a:rPr lang="en-US" sz="1400" b="1" dirty="0">
-                <a:solidFill>
-                  <a:srgbClr val="E8ECF2"/>
-                </a:solidFill>
-                <a:latin typeface="Calibri" pitchFamily="34" charset="0"/>
-                <a:ea typeface="Calibri" pitchFamily="34" charset="-122"/>
-                <a:cs typeface="Calibri" pitchFamily="34" charset="-120"/>
-              </a:rPr>
-              <a:t>was itself wrong</a:t>
-            </a:r>
-            <a:endParaRPr lang="en-US" sz="1400" dirty="0"/>
+              <a:t>fcmaes, Team HRI and Hill Climbing on one pinned CPU core each. Spacekangaroos on its own CUDA code on a Kaggle T4, batch 1,024 (512 at n = 2,426).</a:t>
+            </a:r>
+            <a:endParaRPr lang="en-US" sz="1300" dirty="0"/>
           </a:p>
         </p:txBody>
       </p:sp>
       <p:sp>
         <p:nvSpPr>
-          <p:cNvPr id="11" name="Text 9"/>
-          <p:cNvSpPr txBox="1"/>
-          <p:nvPr/>
-        </p:nvSpPr>
-        <p:spPr>
-          <a:xfrm>
-            <a:off x="3794760" y="2743200"/>
-            <a:ext cx="4572000" cy="822960"/>
-          </a:xfrm>
-          <a:prstGeom prst="rect">
-            <a:avLst/>
-          </a:prstGeom>
-          <a:noFill/>
-          <a:ln/>
-        </p:spPr>
-        <p:txBody>
-          <a:bodyPr wrap="square" lIns="0" tIns="0" rIns="0" bIns="0" rtlCol="0" anchor="t"/>
-          <a:lstStyle/>
-          <a:p>
-            <a:pPr indent="0" marL="0">
-              <a:buNone/>
-            </a:pPr>
-            <a:r>
-              <a:rPr lang="en-US" sz="1150" dirty="0">
-                <a:solidFill>
-                  <a:srgbClr val="E8ECF2"/>
-                </a:solidFill>
-                <a:latin typeface="Calibri" pitchFamily="34" charset="0"/>
-                <a:ea typeface="Calibri" pitchFamily="34" charset="-122"/>
-                <a:cs typeface="Calibri" pitchFamily="34" charset="-120"/>
-              </a:rPr>
-              <a:t>Re-running the runs to confirm them gave mismatches on 29 of 30 rows. The climb stops on elapsed time, so a run can be re-sampled, never reproduced.</a:t>
-            </a:r>
-            <a:endParaRPr lang="en-US" sz="1150" dirty="0"/>
-          </a:p>
-        </p:txBody>
-      </p:sp>
-      <p:sp>
-        <p:nvSpPr>
-          <p:cNvPr id="12" name="Text 10"/>
-          <p:cNvSpPr txBox="1"/>
-          <p:nvPr/>
-        </p:nvSpPr>
-        <p:spPr>
-          <a:xfrm>
-            <a:off x="8641080" y="2743200"/>
-            <a:ext cx="2910535" cy="822960"/>
-          </a:xfrm>
-          <a:prstGeom prst="rect">
-            <a:avLst/>
-          </a:prstGeom>
-          <a:noFill/>
-          <a:ln/>
-        </p:spPr>
-        <p:txBody>
-          <a:bodyPr wrap="square" lIns="0" tIns="0" rIns="0" bIns="0" rtlCol="0" anchor="t"/>
-          <a:lstStyle/>
-          <a:p>
-            <a:pPr indent="0" marL="0">
-              <a:buNone/>
-            </a:pPr>
-            <a:r>
-              <a:rPr lang="en-US" sz="1150" i="1" dirty="0">
-                <a:solidFill>
-                  <a:srgbClr val="9AA6B6"/>
-                </a:solidFill>
-                <a:latin typeface="Calibri" pitchFamily="34" charset="0"/>
-                <a:ea typeface="Calibri" pitchFamily="34" charset="-122"/>
-                <a:cs typeface="Calibri" pitchFamily="34" charset="-120"/>
-              </a:rPr>
-              <a:t>The check was wrong, not the harness, and the accident produced two independent controls.</a:t>
-            </a:r>
-            <a:endParaRPr lang="en-US" sz="1150" dirty="0"/>
-          </a:p>
-        </p:txBody>
-      </p:sp>
-      <p:sp>
-        <p:nvSpPr>
-          <p:cNvPr id="13" name="Shape 11"/>
-          <p:cNvSpPr/>
-          <p:nvPr/>
-        </p:nvSpPr>
-        <p:spPr>
-          <a:xfrm>
-            <a:off x="640080" y="3584448"/>
+          <p:cNvPr id="9" name="Shape 7"/>
+          <p:cNvSpPr/>
+          <p:nvPr/>
+        </p:nvSpPr>
+        <p:spPr>
+          <a:xfrm>
+            <a:off x="640080" y="3145536"/>
             <a:ext cx="10911535" cy="0"/>
           </a:xfrm>
           <a:prstGeom prst="line">
@@ -14247,14 +14270,14 @@
       </p:sp>
       <p:sp>
         <p:nvSpPr>
-          <p:cNvPr id="14" name="Text 12"/>
+          <p:cNvPr id="10" name="Text 8"/>
           <p:cNvSpPr txBox="1"/>
           <p:nvPr/>
         </p:nvSpPr>
         <p:spPr>
           <a:xfrm>
-            <a:off x="640080" y="3675888"/>
-            <a:ext cx="411480" cy="457200"/>
+            <a:off x="640080" y="3236976"/>
+            <a:ext cx="2011680" cy="548640"/>
           </a:xfrm>
           <a:prstGeom prst="rect">
             <a:avLst/>
@@ -14270,30 +14293,30 @@
               <a:buNone/>
             </a:pPr>
             <a:r>
-              <a:rPr lang="en-US" sz="2200" dirty="0">
+              <a:rPr lang="en-US" sz="1400" b="1" dirty="0">
                 <a:solidFill>
                   <a:srgbClr val="3DDC97"/>
                 </a:solidFill>
-                <a:latin typeface="Century Schoolbook" pitchFamily="34" charset="0"/>
-                <a:ea typeface="Century Schoolbook" pitchFamily="34" charset="-122"/>
-                <a:cs typeface="Century Schoolbook" pitchFamily="34" charset="-120"/>
-              </a:rPr>
-              <a:t>3</a:t>
-            </a:r>
-            <a:endParaRPr lang="en-US" sz="2200" dirty="0"/>
+                <a:latin typeface="Calibri" pitchFamily="34" charset="0"/>
+                <a:ea typeface="Calibri" pitchFamily="34" charset="-122"/>
+                <a:cs typeface="Calibri" pitchFamily="34" charset="-120"/>
+              </a:rPr>
+              <a:t>Implementations</a:t>
+            </a:r>
+            <a:endParaRPr lang="en-US" sz="1400" dirty="0"/>
           </a:p>
         </p:txBody>
       </p:sp>
       <p:sp>
         <p:nvSpPr>
-          <p:cNvPr id="15" name="Text 13"/>
+          <p:cNvPr id="11" name="Text 9"/>
           <p:cNvSpPr txBox="1"/>
           <p:nvPr/>
         </p:nvSpPr>
         <p:spPr>
           <a:xfrm>
-            <a:off x="1097280" y="3703320"/>
-            <a:ext cx="2606040" cy="777240"/>
+            <a:off x="2834640" y="3236976"/>
+            <a:ext cx="8716975" cy="603504"/>
           </a:xfrm>
           <a:prstGeom prst="rect">
             <a:avLst/>
@@ -14309,7 +14332,7 @@
               <a:buNone/>
             </a:pPr>
             <a:r>
-              <a:rPr lang="en-US" sz="1400" b="1" dirty="0">
+              <a:rPr lang="en-US" sz="1300" dirty="0">
                 <a:solidFill>
                   <a:srgbClr val="E8ECF2"/>
                 </a:solidFill>
@@ -14317,99 +14340,21 @@
                 <a:ea typeface="Calibri" pitchFamily="34" charset="-122"/>
                 <a:cs typeface="Calibri" pitchFamily="34" charset="-120"/>
               </a:rPr>
-              <a:t>A 32-bit overflow in someone else’s kernel</a:t>
-            </a:r>
-            <a:endParaRPr lang="en-US" sz="1400" dirty="0"/>
+              <a:t>fcmaes ported from the fast-cma-es approach; Team HRI re-implemented from its paper, as no code was published; Spacekangaroos run as published, plus a 32-bit overflow fix.</a:t>
+            </a:r>
+            <a:endParaRPr lang="en-US" sz="1300" dirty="0"/>
           </a:p>
         </p:txBody>
       </p:sp>
       <p:sp>
         <p:nvSpPr>
-          <p:cNvPr id="16" name="Text 14"/>
-          <p:cNvSpPr txBox="1"/>
-          <p:nvPr/>
-        </p:nvSpPr>
-        <p:spPr>
-          <a:xfrm>
-            <a:off x="3794760" y="3675888"/>
-            <a:ext cx="4572000" cy="822960"/>
-          </a:xfrm>
-          <a:prstGeom prst="rect">
-            <a:avLst/>
-          </a:prstGeom>
-          <a:noFill/>
-          <a:ln/>
-        </p:spPr>
-        <p:txBody>
-          <a:bodyPr wrap="square" lIns="0" tIns="0" rIns="0" bIns="0" rtlCol="0" anchor="t"/>
-          <a:lstStyle/>
-          <a:p>
-            <a:pPr indent="0" marL="0">
-              <a:buNone/>
-            </a:pPr>
-            <a:r>
-              <a:rPr lang="en-US" sz="1150" dirty="0">
-                <a:solidFill>
-                  <a:srgbClr val="E8ECF2"/>
-                </a:solidFill>
-                <a:latin typeface="Calibri" pitchFamily="34" charset="0"/>
-                <a:ea typeface="Calibri" pitchFamily="34" charset="-122"/>
-                <a:cs typeface="Calibri" pitchFamily="34" charset="-120"/>
-              </a:rPr>
-              <a:t>The vendored CUDA evaluator indexed a B×N×N array with an int offset, which wraps past 2³¹ at n = 2,426, thread 365 of 1,024.</a:t>
-            </a:r>
-            <a:endParaRPr lang="en-US" sz="1150" dirty="0"/>
-          </a:p>
-        </p:txBody>
-      </p:sp>
-      <p:sp>
-        <p:nvSpPr>
-          <p:cNvPr id="17" name="Text 15"/>
-          <p:cNvSpPr txBox="1"/>
-          <p:nvPr/>
-        </p:nvSpPr>
-        <p:spPr>
-          <a:xfrm>
-            <a:off x="8641080" y="3675888"/>
-            <a:ext cx="2910535" cy="822960"/>
-          </a:xfrm>
-          <a:prstGeom prst="rect">
-            <a:avLst/>
-          </a:prstGeom>
-          <a:noFill/>
-          <a:ln/>
-        </p:spPr>
-        <p:txBody>
-          <a:bodyPr wrap="square" lIns="0" tIns="0" rIns="0" bIns="0" rtlCol="0" anchor="t"/>
-          <a:lstStyle/>
-          <a:p>
-            <a:pPr indent="0" marL="0">
-              <a:buNone/>
-            </a:pPr>
-            <a:r>
-              <a:rPr lang="en-US" sz="1150" i="1" dirty="0">
-                <a:solidFill>
-                  <a:srgbClr val="9AA6B6"/>
-                </a:solidFill>
-                <a:latin typeface="Calibri" pitchFamily="34" charset="0"/>
-                <a:ea typeface="Calibri" pitchFamily="34" charset="-122"/>
-                <a:cs typeface="Calibri" pitchFamily="34" charset="-120"/>
-              </a:rPr>
-              <a:t>Caught because every n = 2,426 run died early with an illegal memory access; one type change fixed it.</a:t>
-            </a:r>
-            <a:endParaRPr lang="en-US" sz="1150" dirty="0"/>
-          </a:p>
-        </p:txBody>
-      </p:sp>
-      <p:sp>
-        <p:nvSpPr>
-          <p:cNvPr id="18" name="Shape 16"/>
-          <p:cNvSpPr/>
-          <p:nvPr/>
-        </p:nvSpPr>
-        <p:spPr>
-          <a:xfrm>
-            <a:off x="640080" y="4517136"/>
+          <p:cNvPr id="12" name="Shape 10"/>
+          <p:cNvSpPr/>
+          <p:nvPr/>
+        </p:nvSpPr>
+        <p:spPr>
+          <a:xfrm>
+            <a:off x="640080" y="3858768"/>
             <a:ext cx="10911535" cy="0"/>
           </a:xfrm>
           <a:prstGeom prst="line">
@@ -14426,14 +14371,14 @@
       </p:sp>
       <p:sp>
         <p:nvSpPr>
-          <p:cNvPr id="19" name="Text 17"/>
+          <p:cNvPr id="13" name="Text 11"/>
           <p:cNvSpPr txBox="1"/>
           <p:nvPr/>
         </p:nvSpPr>
         <p:spPr>
           <a:xfrm>
-            <a:off x="640080" y="4608576"/>
-            <a:ext cx="411480" cy="457200"/>
+            <a:off x="640080" y="3950208"/>
+            <a:ext cx="2011680" cy="548640"/>
           </a:xfrm>
           <a:prstGeom prst="rect">
             <a:avLst/>
@@ -14449,30 +14394,30 @@
               <a:buNone/>
             </a:pPr>
             <a:r>
-              <a:rPr lang="en-US" sz="2200" dirty="0">
-                <a:solidFill>
-                  <a:srgbClr val="F2C14E"/>
-                </a:solidFill>
-                <a:latin typeface="Century Schoolbook" pitchFamily="34" charset="0"/>
-                <a:ea typeface="Century Schoolbook" pitchFamily="34" charset="-122"/>
-                <a:cs typeface="Century Schoolbook" pitchFamily="34" charset="-120"/>
-              </a:rPr>
-              <a:t>4</a:t>
-            </a:r>
-            <a:endParaRPr lang="en-US" sz="2200" dirty="0"/>
+              <a:rPr lang="en-US" sz="1400" b="1" dirty="0">
+                <a:solidFill>
+                  <a:srgbClr val="3DDC97"/>
+                </a:solidFill>
+                <a:latin typeface="Calibri" pitchFamily="34" charset="0"/>
+                <a:ea typeface="Calibri" pitchFamily="34" charset="-122"/>
+                <a:cs typeface="Calibri" pitchFamily="34" charset="-120"/>
+              </a:rPr>
+              <a:t>Starts</a:t>
+            </a:r>
+            <a:endParaRPr lang="en-US" sz="1400" dirty="0"/>
           </a:p>
         </p:txBody>
       </p:sp>
       <p:sp>
         <p:nvSpPr>
-          <p:cNvPr id="20" name="Text 18"/>
+          <p:cNvPr id="14" name="Text 12"/>
           <p:cNvSpPr txBox="1"/>
           <p:nvPr/>
         </p:nvSpPr>
         <p:spPr>
           <a:xfrm>
-            <a:off x="1097280" y="4636008"/>
-            <a:ext cx="2606040" cy="777240"/>
+            <a:off x="2834640" y="3950208"/>
+            <a:ext cx="8716975" cy="603504"/>
           </a:xfrm>
           <a:prstGeom prst="rect">
             <a:avLst/>
@@ -14488,7 +14433,7 @@
               <a:buNone/>
             </a:pPr>
             <a:r>
-              <a:rPr lang="en-US" sz="1400" b="1" dirty="0">
+              <a:rPr lang="en-US" sz="1300" dirty="0">
                 <a:solidFill>
                   <a:srgbClr val="E8ECF2"/>
                 </a:solidFill>
@@ -14496,22 +14441,45 @@
                 <a:ea typeface="Calibri" pitchFamily="34" charset="-122"/>
                 <a:cs typeface="Calibri" pitchFamily="34" charset="-120"/>
               </a:rPr>
-              <a:t>A threshold borrowed from one method</a:t>
-            </a:r>
-            <a:endParaRPr lang="en-US" sz="1400" dirty="0"/>
+              <a:t>Both permutation-space solvers start from the same min-degree construction, computed fresh inside every run.</a:t>
+            </a:r>
+            <a:endParaRPr lang="en-US" sz="1300" dirty="0"/>
           </a:p>
         </p:txBody>
       </p:sp>
       <p:sp>
         <p:nvSpPr>
-          <p:cNvPr id="21" name="Text 19"/>
+          <p:cNvPr id="15" name="Shape 13"/>
+          <p:cNvSpPr/>
+          <p:nvPr/>
+        </p:nvSpPr>
+        <p:spPr>
+          <a:xfrm>
+            <a:off x="640080" y="4572000"/>
+            <a:ext cx="10911535" cy="0"/>
+          </a:xfrm>
+          <a:prstGeom prst="line">
+            <a:avLst/>
+          </a:prstGeom>
+          <a:noFill/>
+          <a:ln w="6350">
+            <a:solidFill>
+              <a:srgbClr val="2A3546"/>
+            </a:solidFill>
+            <a:prstDash val="solid"/>
+          </a:ln>
+        </p:spPr>
+      </p:sp>
+      <p:sp>
+        <p:nvSpPr>
+          <p:cNvPr id="16" name="Text 14"/>
           <p:cNvSpPr txBox="1"/>
           <p:nvPr/>
         </p:nvSpPr>
         <p:spPr>
           <a:xfrm>
-            <a:off x="3794760" y="4608576"/>
-            <a:ext cx="4572000" cy="822960"/>
+            <a:off x="640080" y="4663440"/>
+            <a:ext cx="2011680" cy="548640"/>
           </a:xfrm>
           <a:prstGeom prst="rect">
             <a:avLst/>
@@ -14527,30 +14495,30 @@
               <a:buNone/>
             </a:pPr>
             <a:r>
-              <a:rPr lang="en-US" sz="1150" dirty="0">
-                <a:solidFill>
-                  <a:srgbClr val="E8ECF2"/>
+              <a:rPr lang="en-US" sz="1400" b="1" dirty="0">
+                <a:solidFill>
+                  <a:srgbClr val="3DDC97"/>
                 </a:solidFill>
                 <a:latin typeface="Calibri" pitchFamily="34" charset="0"/>
                 <a:ea typeface="Calibri" pitchFamily="34" charset="-122"/>
                 <a:cs typeface="Calibri" pitchFamily="34" charset="-120"/>
               </a:rPr>
-              <a:t>One 7,881 HV floor, taken from Hill Climbing’s worst instance, judged every method’s rows, while Team HRI’s own seeds on medium-graph span 80,376 HV.</a:t>
-            </a:r>
-            <a:endParaRPr lang="en-US" sz="1150" dirty="0"/>
+              <a:t>Scoring</a:t>
+            </a:r>
+            <a:endParaRPr lang="en-US" sz="1400" dirty="0"/>
           </a:p>
         </p:txBody>
       </p:sp>
       <p:sp>
         <p:nvSpPr>
-          <p:cNvPr id="22" name="Text 20"/>
+          <p:cNvPr id="17" name="Text 15"/>
           <p:cNvSpPr txBox="1"/>
           <p:nvPr/>
         </p:nvSpPr>
         <p:spPr>
           <a:xfrm>
-            <a:off x="8641080" y="4608576"/>
-            <a:ext cx="2910535" cy="822960"/>
+            <a:off x="2834640" y="4663440"/>
+            <a:ext cx="8716975" cy="603504"/>
           </a:xfrm>
           <a:prstGeom prst="rect">
             <a:avLst/>
@@ -14566,30 +14534,53 @@
               <a:buNone/>
             </a:pPr>
             <a:r>
-              <a:rPr lang="en-US" sz="1150" i="1" dirty="0">
-                <a:solidFill>
-                  <a:srgbClr val="9AA6B6"/>
+              <a:rPr lang="en-US" sz="1300" dirty="0">
+                <a:solidFill>
+                  <a:srgbClr val="E8ECF2"/>
                 </a:solidFill>
                 <a:latin typeface="Calibri" pitchFamily="34" charset="0"/>
                 <a:ea typeface="Calibri" pitchFamily="34" charset="-122"/>
                 <a:cs typeface="Calibri" pitchFamily="34" charset="-120"/>
               </a:rPr>
-              <a:t>Caught by reading the seeds instead of the best of three: four of ten verdicts changed.</a:t>
-            </a:r>
-            <a:endParaRPr lang="en-US" sz="1150" dirty="0"/>
+              <a:t>Every answer re-scored by esa_eval.py. ESA’s own evaluation code, run beside it, agrees on all ten instances: 220 orderings, 2,000 hypervolumes, the min-degree ×8 column. ESA scores an over-cap vector as width 501; this harness discards the submission.</a:t>
+            </a:r>
+            <a:endParaRPr lang="en-US" sz="1300" dirty="0"/>
           </a:p>
         </p:txBody>
       </p:sp>
       <p:sp>
         <p:nvSpPr>
-          <p:cNvPr id="23" name="Text 21"/>
+          <p:cNvPr id="18" name="Shape 16"/>
+          <p:cNvSpPr/>
+          <p:nvPr/>
+        </p:nvSpPr>
+        <p:spPr>
+          <a:xfrm>
+            <a:off x="640080" y="5285232"/>
+            <a:ext cx="10911535" cy="0"/>
+          </a:xfrm>
+          <a:prstGeom prst="line">
+            <a:avLst/>
+          </a:prstGeom>
+          <a:noFill/>
+          <a:ln w="6350">
+            <a:solidFill>
+              <a:srgbClr val="2A3546"/>
+            </a:solidFill>
+            <a:prstDash val="solid"/>
+          </a:ln>
+        </p:spPr>
+      </p:sp>
+      <p:sp>
+        <p:nvSpPr>
+          <p:cNvPr id="19" name="Text 17"/>
           <p:cNvSpPr txBox="1"/>
           <p:nvPr/>
         </p:nvSpPr>
         <p:spPr>
           <a:xfrm>
-            <a:off x="640080" y="5650992"/>
-            <a:ext cx="10911535" cy="502920"/>
+            <a:off x="640080" y="5376672"/>
+            <a:ext cx="2011680" cy="548640"/>
           </a:xfrm>
           <a:prstGeom prst="rect">
             <a:avLst/>
@@ -14605,17 +14596,56 @@
               <a:buNone/>
             </a:pPr>
             <a:r>
-              <a:rPr lang="en-US" sz="1550" i="1" dirty="0">
+              <a:rPr lang="en-US" sz="1400" b="1" dirty="0">
+                <a:solidFill>
+                  <a:srgbClr val="F2C14E"/>
+                </a:solidFill>
+                <a:latin typeface="Calibri" pitchFamily="34" charset="0"/>
+                <a:ea typeface="Calibri" pitchFamily="34" charset="-122"/>
+                <a:cs typeface="Calibri" pitchFamily="34" charset="-120"/>
+              </a:rPr>
+              <a:t>Not controlled</a:t>
+            </a:r>
+            <a:endParaRPr lang="en-US" sz="1400" dirty="0"/>
+          </a:p>
+        </p:txBody>
+      </p:sp>
+      <p:sp>
+        <p:nvSpPr>
+          <p:cNvPr id="20" name="Text 18"/>
+          <p:cNvSpPr txBox="1"/>
+          <p:nvPr/>
+        </p:nvSpPr>
+        <p:spPr>
+          <a:xfrm>
+            <a:off x="2834640" y="5376672"/>
+            <a:ext cx="8716975" cy="603504"/>
+          </a:xfrm>
+          <a:prstGeom prst="rect">
+            <a:avLst/>
+          </a:prstGeom>
+          <a:noFill/>
+          <a:ln/>
+        </p:spPr>
+        <p:txBody>
+          <a:bodyPr wrap="square" lIns="0" tIns="0" rIns="0" bIns="0" rtlCol="0" anchor="t"/>
+          <a:lstStyle/>
+          <a:p>
+            <a:pPr indent="0" marL="0">
+              <a:buNone/>
+            </a:pPr>
+            <a:r>
+              <a:rPr lang="en-US" sz="1300" dirty="0">
                 <a:solidFill>
                   <a:srgbClr val="E8ECF2"/>
                 </a:solidFill>
-                <a:latin typeface="Century Schoolbook" pitchFamily="34" charset="0"/>
-                <a:ea typeface="Century Schoolbook" pitchFamily="34" charset="-122"/>
-                <a:cs typeface="Century Schoolbook" pitchFamily="34" charset="-120"/>
-              </a:rPr>
-              <a:t>None was caught by a test suite. Each was caught by a number that was the wrong shape for its story.</a:t>
-            </a:r>
-            <a:endParaRPr lang="en-US" sz="1550" dirty="0"/>
+                <a:latin typeface="Calibri" pitchFamily="34" charset="0"/>
+                <a:ea typeface="Calibri" pitchFamily="34" charset="-122"/>
+                <a:cs typeface="Calibri" pitchFamily="34" charset="-120"/>
+              </a:rPr>
+              <a:t>Best of three favours noisy methods, hence the seed-level verdicts. Three seeds per cell. The dense family is three variants of one graph.</a:t>
+            </a:r>
+            <a:endParaRPr lang="en-US" sz="1300" dirty="0"/>
           </a:p>
         </p:txBody>
       </p:sp>
@@ -14676,7 +14706,7 @@
 </file>
 
 <file path=ppt/slides/slide17.xml><?xml version="1.0" encoding="utf-8"?>
-<p:sld xmlns:a="http://schemas.openxmlformats.org/drawingml/2006/main" xmlns:r="http://schemas.openxmlformats.org/officeDocument/2006/relationships" xmlns:p="http://schemas.openxmlformats.org/presentationml/2006/main">
+<p:sld xmlns:a="http://schemas.openxmlformats.org/drawingml/2006/main" xmlns:r="http://schemas.openxmlformats.org/officeDocument/2006/relationships" xmlns:p="http://schemas.openxmlformats.org/presentationml/2006/main" show="0">
   <p:cSld name="Slide 17">
     <p:spTree>
       <p:nvGrpSpPr>
@@ -14768,753 +14798,15 @@
                 <a:ea typeface="Century Schoolbook" pitchFamily="34" charset="-122"/>
                 <a:cs typeface="Century Schoolbook" pitchFamily="34" charset="-120"/>
               </a:rPr>
-              <a:t>Protocol, and what it does not control</a:t>
+              <a:t>Every seed behind the table</a:t>
             </a:r>
             <a:endParaRPr lang="en-US" sz="2700" dirty="0"/>
           </a:p>
         </p:txBody>
       </p:sp>
-      <p:sp>
-        <p:nvSpPr>
-          <p:cNvPr id="4" name="Text 2"/>
-          <p:cNvSpPr txBox="1"/>
-          <p:nvPr/>
-        </p:nvSpPr>
-        <p:spPr>
-          <a:xfrm>
-            <a:off x="640080" y="1810512"/>
-            <a:ext cx="2011680" cy="548640"/>
-          </a:xfrm>
-          <a:prstGeom prst="rect">
-            <a:avLst/>
-          </a:prstGeom>
-          <a:noFill/>
-          <a:ln/>
-        </p:spPr>
-        <p:txBody>
-          <a:bodyPr wrap="square" lIns="0" tIns="0" rIns="0" bIns="0" rtlCol="0" anchor="t"/>
-          <a:lstStyle/>
-          <a:p>
-            <a:pPr indent="0" marL="0">
-              <a:buNone/>
-            </a:pPr>
-            <a:r>
-              <a:rPr lang="en-US" sz="1400" b="1" dirty="0">
-                <a:solidFill>
-                  <a:srgbClr val="3DDC97"/>
-                </a:solidFill>
-                <a:latin typeface="Calibri" pitchFamily="34" charset="0"/>
-                <a:ea typeface="Calibri" pitchFamily="34" charset="-122"/>
-                <a:cs typeface="Calibri" pitchFamily="34" charset="-120"/>
-              </a:rPr>
-              <a:t>Budget</a:t>
-            </a:r>
-            <a:endParaRPr lang="en-US" sz="1400" dirty="0"/>
-          </a:p>
-        </p:txBody>
-      </p:sp>
-      <p:sp>
-        <p:nvSpPr>
-          <p:cNvPr id="5" name="Text 3"/>
-          <p:cNvSpPr txBox="1"/>
-          <p:nvPr/>
-        </p:nvSpPr>
-        <p:spPr>
-          <a:xfrm>
-            <a:off x="2834640" y="1810512"/>
-            <a:ext cx="8716975" cy="603504"/>
-          </a:xfrm>
-          <a:prstGeom prst="rect">
-            <a:avLst/>
-          </a:prstGeom>
-          <a:noFill/>
-          <a:ln/>
-        </p:spPr>
-        <p:txBody>
-          <a:bodyPr wrap="square" lIns="0" tIns="0" rIns="0" bIns="0" rtlCol="0" anchor="t"/>
-          <a:lstStyle/>
-          <a:p>
-            <a:pPr indent="0" marL="0">
-              <a:buNone/>
-            </a:pPr>
-            <a:r>
-              <a:rPr lang="en-US" sz="1300" dirty="0">
-                <a:solidFill>
-                  <a:srgbClr val="E8ECF2"/>
-                </a:solidFill>
-                <a:latin typeface="Calibri" pitchFamily="34" charset="0"/>
-                <a:ea typeface="Calibri" pitchFamily="34" charset="-122"/>
-                <a:cs typeface="Calibri" pitchFamily="34" charset="-120"/>
-              </a:rPr>
-              <a:t>1,200 s wall-clock per run, three seeds, ten instances. Four runs fell outside 1,150–1,400 s after machine stalls; none of them supplies a best-of-3 value.</a:t>
-            </a:r>
-            <a:endParaRPr lang="en-US" sz="1300" dirty="0"/>
-          </a:p>
-        </p:txBody>
-      </p:sp>
-      <p:sp>
-        <p:nvSpPr>
-          <p:cNvPr id="6" name="Shape 4"/>
-          <p:cNvSpPr/>
-          <p:nvPr/>
-        </p:nvSpPr>
-        <p:spPr>
-          <a:xfrm>
-            <a:off x="640080" y="2432304"/>
-            <a:ext cx="10911535" cy="0"/>
-          </a:xfrm>
-          <a:prstGeom prst="line">
-            <a:avLst/>
-          </a:prstGeom>
-          <a:noFill/>
-          <a:ln w="6350">
-            <a:solidFill>
-              <a:srgbClr val="2A3546"/>
-            </a:solidFill>
-            <a:prstDash val="solid"/>
-          </a:ln>
-        </p:spPr>
-      </p:sp>
-      <p:sp>
-        <p:nvSpPr>
-          <p:cNvPr id="7" name="Text 5"/>
-          <p:cNvSpPr txBox="1"/>
-          <p:nvPr/>
-        </p:nvSpPr>
-        <p:spPr>
-          <a:xfrm>
-            <a:off x="640080" y="2523744"/>
-            <a:ext cx="2011680" cy="548640"/>
-          </a:xfrm>
-          <a:prstGeom prst="rect">
-            <a:avLst/>
-          </a:prstGeom>
-          <a:noFill/>
-          <a:ln/>
-        </p:spPr>
-        <p:txBody>
-          <a:bodyPr wrap="square" lIns="0" tIns="0" rIns="0" bIns="0" rtlCol="0" anchor="t"/>
-          <a:lstStyle/>
-          <a:p>
-            <a:pPr indent="0" marL="0">
-              <a:buNone/>
-            </a:pPr>
-            <a:r>
-              <a:rPr lang="en-US" sz="1400" b="1" dirty="0">
-                <a:solidFill>
-                  <a:srgbClr val="3DDC97"/>
-                </a:solidFill>
-                <a:latin typeface="Calibri" pitchFamily="34" charset="0"/>
-                <a:ea typeface="Calibri" pitchFamily="34" charset="-122"/>
-                <a:cs typeface="Calibri" pitchFamily="34" charset="-120"/>
-              </a:rPr>
-              <a:t>Hardware</a:t>
-            </a:r>
-            <a:endParaRPr lang="en-US" sz="1400" dirty="0"/>
-          </a:p>
-        </p:txBody>
-      </p:sp>
-      <p:sp>
-        <p:nvSpPr>
-          <p:cNvPr id="8" name="Text 6"/>
-          <p:cNvSpPr txBox="1"/>
-          <p:nvPr/>
-        </p:nvSpPr>
-        <p:spPr>
-          <a:xfrm>
-            <a:off x="2834640" y="2523744"/>
-            <a:ext cx="8716975" cy="603504"/>
-          </a:xfrm>
-          <a:prstGeom prst="rect">
-            <a:avLst/>
-          </a:prstGeom>
-          <a:noFill/>
-          <a:ln/>
-        </p:spPr>
-        <p:txBody>
-          <a:bodyPr wrap="square" lIns="0" tIns="0" rIns="0" bIns="0" rtlCol="0" anchor="t"/>
-          <a:lstStyle/>
-          <a:p>
-            <a:pPr indent="0" marL="0">
-              <a:buNone/>
-            </a:pPr>
-            <a:r>
-              <a:rPr lang="en-US" sz="1300" dirty="0">
-                <a:solidFill>
-                  <a:srgbClr val="E8ECF2"/>
-                </a:solidFill>
-                <a:latin typeface="Calibri" pitchFamily="34" charset="0"/>
-                <a:ea typeface="Calibri" pitchFamily="34" charset="-122"/>
-                <a:cs typeface="Calibri" pitchFamily="34" charset="-120"/>
-              </a:rPr>
-              <a:t>fcmaes, Team HRI and Hill Climbing on one pinned CPU core each. Spacekangaroos on its own CUDA code on a Kaggle T4, batch 1,024 (512 at n = 2,426).</a:t>
-            </a:r>
-            <a:endParaRPr lang="en-US" sz="1300" dirty="0"/>
-          </a:p>
-        </p:txBody>
-      </p:sp>
-      <p:sp>
-        <p:nvSpPr>
-          <p:cNvPr id="9" name="Shape 7"/>
-          <p:cNvSpPr/>
-          <p:nvPr/>
-        </p:nvSpPr>
-        <p:spPr>
-          <a:xfrm>
-            <a:off x="640080" y="3145536"/>
-            <a:ext cx="10911535" cy="0"/>
-          </a:xfrm>
-          <a:prstGeom prst="line">
-            <a:avLst/>
-          </a:prstGeom>
-          <a:noFill/>
-          <a:ln w="6350">
-            <a:solidFill>
-              <a:srgbClr val="2A3546"/>
-            </a:solidFill>
-            <a:prstDash val="solid"/>
-          </a:ln>
-        </p:spPr>
-      </p:sp>
-      <p:sp>
-        <p:nvSpPr>
-          <p:cNvPr id="10" name="Text 8"/>
-          <p:cNvSpPr txBox="1"/>
-          <p:nvPr/>
-        </p:nvSpPr>
-        <p:spPr>
-          <a:xfrm>
-            <a:off x="640080" y="3236976"/>
-            <a:ext cx="2011680" cy="548640"/>
-          </a:xfrm>
-          <a:prstGeom prst="rect">
-            <a:avLst/>
-          </a:prstGeom>
-          <a:noFill/>
-          <a:ln/>
-        </p:spPr>
-        <p:txBody>
-          <a:bodyPr wrap="square" lIns="0" tIns="0" rIns="0" bIns="0" rtlCol="0" anchor="t"/>
-          <a:lstStyle/>
-          <a:p>
-            <a:pPr indent="0" marL="0">
-              <a:buNone/>
-            </a:pPr>
-            <a:r>
-              <a:rPr lang="en-US" sz="1400" b="1" dirty="0">
-                <a:solidFill>
-                  <a:srgbClr val="3DDC97"/>
-                </a:solidFill>
-                <a:latin typeface="Calibri" pitchFamily="34" charset="0"/>
-                <a:ea typeface="Calibri" pitchFamily="34" charset="-122"/>
-                <a:cs typeface="Calibri" pitchFamily="34" charset="-120"/>
-              </a:rPr>
-              <a:t>Implementations</a:t>
-            </a:r>
-            <a:endParaRPr lang="en-US" sz="1400" dirty="0"/>
-          </a:p>
-        </p:txBody>
-      </p:sp>
-      <p:sp>
-        <p:nvSpPr>
-          <p:cNvPr id="11" name="Text 9"/>
-          <p:cNvSpPr txBox="1"/>
-          <p:nvPr/>
-        </p:nvSpPr>
-        <p:spPr>
-          <a:xfrm>
-            <a:off x="2834640" y="3236976"/>
-            <a:ext cx="8716975" cy="603504"/>
-          </a:xfrm>
-          <a:prstGeom prst="rect">
-            <a:avLst/>
-          </a:prstGeom>
-          <a:noFill/>
-          <a:ln/>
-        </p:spPr>
-        <p:txBody>
-          <a:bodyPr wrap="square" lIns="0" tIns="0" rIns="0" bIns="0" rtlCol="0" anchor="t"/>
-          <a:lstStyle/>
-          <a:p>
-            <a:pPr indent="0" marL="0">
-              <a:buNone/>
-            </a:pPr>
-            <a:r>
-              <a:rPr lang="en-US" sz="1300" dirty="0">
-                <a:solidFill>
-                  <a:srgbClr val="E8ECF2"/>
-                </a:solidFill>
-                <a:latin typeface="Calibri" pitchFamily="34" charset="0"/>
-                <a:ea typeface="Calibri" pitchFamily="34" charset="-122"/>
-                <a:cs typeface="Calibri" pitchFamily="34" charset="-120"/>
-              </a:rPr>
-              <a:t>fcmaes ported from the fast-cma-es approach; Team HRI re-implemented from its paper, as no code was published; Spacekangaroos run as published, plus a 32-bit overflow fix.</a:t>
-            </a:r>
-            <a:endParaRPr lang="en-US" sz="1300" dirty="0"/>
-          </a:p>
-        </p:txBody>
-      </p:sp>
-      <p:sp>
-        <p:nvSpPr>
-          <p:cNvPr id="12" name="Shape 10"/>
-          <p:cNvSpPr/>
-          <p:nvPr/>
-        </p:nvSpPr>
-        <p:spPr>
-          <a:xfrm>
-            <a:off x="640080" y="3858768"/>
-            <a:ext cx="10911535" cy="0"/>
-          </a:xfrm>
-          <a:prstGeom prst="line">
-            <a:avLst/>
-          </a:prstGeom>
-          <a:noFill/>
-          <a:ln w="6350">
-            <a:solidFill>
-              <a:srgbClr val="2A3546"/>
-            </a:solidFill>
-            <a:prstDash val="solid"/>
-          </a:ln>
-        </p:spPr>
-      </p:sp>
-      <p:sp>
-        <p:nvSpPr>
-          <p:cNvPr id="13" name="Text 11"/>
-          <p:cNvSpPr txBox="1"/>
-          <p:nvPr/>
-        </p:nvSpPr>
-        <p:spPr>
-          <a:xfrm>
-            <a:off x="640080" y="3950208"/>
-            <a:ext cx="2011680" cy="548640"/>
-          </a:xfrm>
-          <a:prstGeom prst="rect">
-            <a:avLst/>
-          </a:prstGeom>
-          <a:noFill/>
-          <a:ln/>
-        </p:spPr>
-        <p:txBody>
-          <a:bodyPr wrap="square" lIns="0" tIns="0" rIns="0" bIns="0" rtlCol="0" anchor="t"/>
-          <a:lstStyle/>
-          <a:p>
-            <a:pPr indent="0" marL="0">
-              <a:buNone/>
-            </a:pPr>
-            <a:r>
-              <a:rPr lang="en-US" sz="1400" b="1" dirty="0">
-                <a:solidFill>
-                  <a:srgbClr val="3DDC97"/>
-                </a:solidFill>
-                <a:latin typeface="Calibri" pitchFamily="34" charset="0"/>
-                <a:ea typeface="Calibri" pitchFamily="34" charset="-122"/>
-                <a:cs typeface="Calibri" pitchFamily="34" charset="-120"/>
-              </a:rPr>
-              <a:t>Starts</a:t>
-            </a:r>
-            <a:endParaRPr lang="en-US" sz="1400" dirty="0"/>
-          </a:p>
-        </p:txBody>
-      </p:sp>
-      <p:sp>
-        <p:nvSpPr>
-          <p:cNvPr id="14" name="Text 12"/>
-          <p:cNvSpPr txBox="1"/>
-          <p:nvPr/>
-        </p:nvSpPr>
-        <p:spPr>
-          <a:xfrm>
-            <a:off x="2834640" y="3950208"/>
-            <a:ext cx="8716975" cy="603504"/>
-          </a:xfrm>
-          <a:prstGeom prst="rect">
-            <a:avLst/>
-          </a:prstGeom>
-          <a:noFill/>
-          <a:ln/>
-        </p:spPr>
-        <p:txBody>
-          <a:bodyPr wrap="square" lIns="0" tIns="0" rIns="0" bIns="0" rtlCol="0" anchor="t"/>
-          <a:lstStyle/>
-          <a:p>
-            <a:pPr indent="0" marL="0">
-              <a:buNone/>
-            </a:pPr>
-            <a:r>
-              <a:rPr lang="en-US" sz="1300" dirty="0">
-                <a:solidFill>
-                  <a:srgbClr val="E8ECF2"/>
-                </a:solidFill>
-                <a:latin typeface="Calibri" pitchFamily="34" charset="0"/>
-                <a:ea typeface="Calibri" pitchFamily="34" charset="-122"/>
-                <a:cs typeface="Calibri" pitchFamily="34" charset="-120"/>
-              </a:rPr>
-              <a:t>Both permutation-space solvers start from the same min-degree construction, computed fresh inside every run.</a:t>
-            </a:r>
-            <a:endParaRPr lang="en-US" sz="1300" dirty="0"/>
-          </a:p>
-        </p:txBody>
-      </p:sp>
-      <p:sp>
-        <p:nvSpPr>
-          <p:cNvPr id="15" name="Shape 13"/>
-          <p:cNvSpPr/>
-          <p:nvPr/>
-        </p:nvSpPr>
-        <p:spPr>
-          <a:xfrm>
-            <a:off x="640080" y="4572000"/>
-            <a:ext cx="10911535" cy="0"/>
-          </a:xfrm>
-          <a:prstGeom prst="line">
-            <a:avLst/>
-          </a:prstGeom>
-          <a:noFill/>
-          <a:ln w="6350">
-            <a:solidFill>
-              <a:srgbClr val="2A3546"/>
-            </a:solidFill>
-            <a:prstDash val="solid"/>
-          </a:ln>
-        </p:spPr>
-      </p:sp>
-      <p:sp>
-        <p:nvSpPr>
-          <p:cNvPr id="16" name="Text 14"/>
-          <p:cNvSpPr txBox="1"/>
-          <p:nvPr/>
-        </p:nvSpPr>
-        <p:spPr>
-          <a:xfrm>
-            <a:off x="640080" y="4663440"/>
-            <a:ext cx="2011680" cy="548640"/>
-          </a:xfrm>
-          <a:prstGeom prst="rect">
-            <a:avLst/>
-          </a:prstGeom>
-          <a:noFill/>
-          <a:ln/>
-        </p:spPr>
-        <p:txBody>
-          <a:bodyPr wrap="square" lIns="0" tIns="0" rIns="0" bIns="0" rtlCol="0" anchor="t"/>
-          <a:lstStyle/>
-          <a:p>
-            <a:pPr indent="0" marL="0">
-              <a:buNone/>
-            </a:pPr>
-            <a:r>
-              <a:rPr lang="en-US" sz="1400" b="1" dirty="0">
-                <a:solidFill>
-                  <a:srgbClr val="3DDC97"/>
-                </a:solidFill>
-                <a:latin typeface="Calibri" pitchFamily="34" charset="0"/>
-                <a:ea typeface="Calibri" pitchFamily="34" charset="-122"/>
-                <a:cs typeface="Calibri" pitchFamily="34" charset="-120"/>
-              </a:rPr>
-              <a:t>Scoring</a:t>
-            </a:r>
-            <a:endParaRPr lang="en-US" sz="1400" dirty="0"/>
-          </a:p>
-        </p:txBody>
-      </p:sp>
-      <p:sp>
-        <p:nvSpPr>
-          <p:cNvPr id="17" name="Text 15"/>
-          <p:cNvSpPr txBox="1"/>
-          <p:nvPr/>
-        </p:nvSpPr>
-        <p:spPr>
-          <a:xfrm>
-            <a:off x="2834640" y="4663440"/>
-            <a:ext cx="8716975" cy="603504"/>
-          </a:xfrm>
-          <a:prstGeom prst="rect">
-            <a:avLst/>
-          </a:prstGeom>
-          <a:noFill/>
-          <a:ln/>
-        </p:spPr>
-        <p:txBody>
-          <a:bodyPr wrap="square" lIns="0" tIns="0" rIns="0" bIns="0" rtlCol="0" anchor="t"/>
-          <a:lstStyle/>
-          <a:p>
-            <a:pPr indent="0" marL="0">
-              <a:buNone/>
-            </a:pPr>
-            <a:r>
-              <a:rPr lang="en-US" sz="1300" dirty="0">
-                <a:solidFill>
-                  <a:srgbClr val="E8ECF2"/>
-                </a:solidFill>
-                <a:latin typeface="Calibri" pitchFamily="34" charset="0"/>
-                <a:ea typeface="Calibri" pitchFamily="34" charset="-122"/>
-                <a:cs typeface="Calibri" pitchFamily="34" charset="-120"/>
-              </a:rPr>
-              <a:t>Every answer re-scored by esa_eval.py. ESA’s own evaluation code, run beside it, agrees on all ten instances: 220 orderings, 2,000 hypervolumes, the min-degree ×8 column. ESA scores an over-cap vector as width 501; this harness discards the submission.</a:t>
-            </a:r>
-            <a:endParaRPr lang="en-US" sz="1300" dirty="0"/>
-          </a:p>
-        </p:txBody>
-      </p:sp>
-      <p:sp>
-        <p:nvSpPr>
-          <p:cNvPr id="18" name="Shape 16"/>
-          <p:cNvSpPr/>
-          <p:nvPr/>
-        </p:nvSpPr>
-        <p:spPr>
-          <a:xfrm>
-            <a:off x="640080" y="5285232"/>
-            <a:ext cx="10911535" cy="0"/>
-          </a:xfrm>
-          <a:prstGeom prst="line">
-            <a:avLst/>
-          </a:prstGeom>
-          <a:noFill/>
-          <a:ln w="6350">
-            <a:solidFill>
-              <a:srgbClr val="2A3546"/>
-            </a:solidFill>
-            <a:prstDash val="solid"/>
-          </a:ln>
-        </p:spPr>
-      </p:sp>
-      <p:sp>
-        <p:nvSpPr>
-          <p:cNvPr id="19" name="Text 17"/>
-          <p:cNvSpPr txBox="1"/>
-          <p:nvPr/>
-        </p:nvSpPr>
-        <p:spPr>
-          <a:xfrm>
-            <a:off x="640080" y="5376672"/>
-            <a:ext cx="2011680" cy="548640"/>
-          </a:xfrm>
-          <a:prstGeom prst="rect">
-            <a:avLst/>
-          </a:prstGeom>
-          <a:noFill/>
-          <a:ln/>
-        </p:spPr>
-        <p:txBody>
-          <a:bodyPr wrap="square" lIns="0" tIns="0" rIns="0" bIns="0" rtlCol="0" anchor="t"/>
-          <a:lstStyle/>
-          <a:p>
-            <a:pPr indent="0" marL="0">
-              <a:buNone/>
-            </a:pPr>
-            <a:r>
-              <a:rPr lang="en-US" sz="1400" b="1" dirty="0">
-                <a:solidFill>
-                  <a:srgbClr val="F2C14E"/>
-                </a:solidFill>
-                <a:latin typeface="Calibri" pitchFamily="34" charset="0"/>
-                <a:ea typeface="Calibri" pitchFamily="34" charset="-122"/>
-                <a:cs typeface="Calibri" pitchFamily="34" charset="-120"/>
-              </a:rPr>
-              <a:t>Not controlled</a:t>
-            </a:r>
-            <a:endParaRPr lang="en-US" sz="1400" dirty="0"/>
-          </a:p>
-        </p:txBody>
-      </p:sp>
-      <p:sp>
-        <p:nvSpPr>
-          <p:cNvPr id="20" name="Text 18"/>
-          <p:cNvSpPr txBox="1"/>
-          <p:nvPr/>
-        </p:nvSpPr>
-        <p:spPr>
-          <a:xfrm>
-            <a:off x="2834640" y="5376672"/>
-            <a:ext cx="8716975" cy="603504"/>
-          </a:xfrm>
-          <a:prstGeom prst="rect">
-            <a:avLst/>
-          </a:prstGeom>
-          <a:noFill/>
-          <a:ln/>
-        </p:spPr>
-        <p:txBody>
-          <a:bodyPr wrap="square" lIns="0" tIns="0" rIns="0" bIns="0" rtlCol="0" anchor="t"/>
-          <a:lstStyle/>
-          <a:p>
-            <a:pPr indent="0" marL="0">
-              <a:buNone/>
-            </a:pPr>
-            <a:r>
-              <a:rPr lang="en-US" sz="1300" dirty="0">
-                <a:solidFill>
-                  <a:srgbClr val="E8ECF2"/>
-                </a:solidFill>
-                <a:latin typeface="Calibri" pitchFamily="34" charset="0"/>
-                <a:ea typeface="Calibri" pitchFamily="34" charset="-122"/>
-                <a:cs typeface="Calibri" pitchFamily="34" charset="-120"/>
-              </a:rPr>
-              <a:t>Best of three favours noisy methods, hence the seed-level verdicts. Three seeds per cell. The dense family is three variants of one graph.</a:t>
-            </a:r>
-            <a:endParaRPr lang="en-US" sz="1300" dirty="0"/>
-          </a:p>
-        </p:txBody>
-      </p:sp>
-      <p:sp>
-        <p:nvSpPr>
-          <p:cNvPr id="25" name="Slide Number Placeholder 0"/>
-          <p:cNvSpPr>
-            <a:spLocks noGrp="1"/>
-          </p:cNvSpPr>
-          <p:nvPr>
-            <p:ph type="sldNum" sz="quarter" idx="4294967295"/>
-          </p:nvPr>
-        </p:nvSpPr>
-        <p:spPr>
-          <a:xfrm>
-            <a:off x="11002975" y="6446520"/>
-            <a:ext cx="548640" cy="219456"/>
-          </a:xfrm>
-          <a:prstGeom prst="rect">
-            <a:avLst/>
-          </a:prstGeom>
-          <a:extLst>
-            <a:ext uri="{C572A759-6A51-4108-AA02-DFA0A04FC94B}">
-              <ma14:wrappingTextBoxFlag xmlns:ma14="http://schemas.microsoft.com/office/mac/drawingml/2011/main" val="0"/>
-            </a:ext>
-          </a:extLst>
-        </p:spPr>
-        <p:txBody>
-          <a:bodyPr/>
-          <a:lstStyle>
-            <a:lvl1pPr>
-              <a:defRPr sz="1000">
-                <a:solidFill>
-                  <a:srgbClr val="7D8AA0"/>
-                </a:solidFill>
-                <a:latin typeface="Calibri"/>
-                <a:ea typeface="Calibri"/>
-                <a:cs typeface="Calibri"/>
-              </a:defRPr>
-            </a:lvl1pPr>
-          </a:lstStyle>
-          <a:p>
-            <a:pPr algn="r"/>
-            <a:fld id="{F7021451-1387-4CA6-816F-3879F97B5CBC}" type="slidenum">
-              <a:rPr b="0" lang="en-US"/>
-              <a:t>17</a:t>
-            </a:fld>
-            <a:endParaRPr lang="en-US"/>
-          </a:p>
-        </p:txBody>
-      </p:sp>
-    </p:spTree>
-  </p:cSld>
-  <p:clrMapOvr>
-    <a:masterClrMapping/>
-  </p:clrMapOvr>
-</p:sld>
-</file>
-
-<file path=ppt/slides/slide18.xml><?xml version="1.0" encoding="utf-8"?>
-<p:sld xmlns:a="http://schemas.openxmlformats.org/drawingml/2006/main" xmlns:r="http://schemas.openxmlformats.org/officeDocument/2006/relationships" xmlns:p="http://schemas.openxmlformats.org/presentationml/2006/main">
-  <p:cSld name="Slide 18">
-    <p:spTree>
-      <p:nvGrpSpPr>
-        <p:cNvPr id="1" name=""/>
-        <p:cNvGrpSpPr/>
-        <p:nvPr/>
-      </p:nvGrpSpPr>
-      <p:grpSpPr>
-        <a:xfrm>
-          <a:off x="0" y="0"/>
-          <a:ext cx="0" cy="0"/>
-          <a:chOff x="0" y="0"/>
-          <a:chExt cx="0" cy="0"/>
-        </a:xfrm>
-      </p:grpSpPr>
-      <p:sp>
-        <p:nvSpPr>
-          <p:cNvPr id="2" name="Text 1"/>
-          <p:cNvSpPr/>
-          <p:nvPr>
-            <p:ph idx="101" type="body" hasCustomPrompt="1"/>
-          </p:nvPr>
-        </p:nvSpPr>
-        <p:spPr>
-          <a:xfrm>
-            <a:off x="640080" y="402336"/>
-            <a:ext cx="10911535" cy="256032"/>
-          </a:xfrm>
-          <a:prstGeom prst="rect">
-            <a:avLst/>
-          </a:prstGeom>
-          <a:noFill/>
-          <a:ln/>
-        </p:spPr>
-        <p:txBody>
-          <a:bodyPr wrap="square" lIns="0" tIns="0" rIns="0" bIns="0" rtlCol="0" anchor="t"/>
-          <a:lstStyle/>
-          <a:p>
-            <a:pPr algn="l" indent="0" marL="0">
-              <a:buNone/>
-            </a:pPr>
-            <a:r>
-              <a:rPr lang="en-US" sz="1050" b="1" spc="180" kern="0" dirty="0">
-                <a:solidFill>
-                  <a:srgbClr val="9AA6B6"/>
-                </a:solidFill>
-                <a:latin typeface="Calibri" pitchFamily="34" charset="0"/>
-                <a:ea typeface="Calibri" pitchFamily="34" charset="-122"/>
-                <a:cs typeface="Calibri" pitchFamily="34" charset="-120"/>
-              </a:rPr>
-              <a:t>BACKUP</a:t>
-            </a:r>
-            <a:endParaRPr lang="en-US" sz="1050" dirty="0"/>
-          </a:p>
-        </p:txBody>
-      </p:sp>
-      <p:sp>
-        <p:nvSpPr>
-          <p:cNvPr id="3" name="Text 1"/>
-          <p:cNvSpPr/>
-          <p:nvPr>
-            <p:ph idx="102" type="title" hasCustomPrompt="1"/>
-          </p:nvPr>
-        </p:nvSpPr>
-        <p:spPr>
-          <a:xfrm>
-            <a:off x="640080" y="676656"/>
-            <a:ext cx="10911535" cy="868680"/>
-          </a:xfrm>
-          <a:prstGeom prst="rect">
-            <a:avLst/>
-          </a:prstGeom>
-          <a:noFill/>
-          <a:ln/>
-        </p:spPr>
-        <p:txBody>
-          <a:bodyPr wrap="square" lIns="0" tIns="0" rIns="0" bIns="0" rtlCol="0" anchor="t"/>
-          <a:lstStyle/>
-          <a:p>
-            <a:pPr algn="l" indent="0" marL="0">
-              <a:buNone/>
-            </a:pPr>
-            <a:r>
-              <a:rPr lang="en-US" sz="2700" dirty="0">
-                <a:solidFill>
-                  <a:srgbClr val="E8ECF2"/>
-                </a:solidFill>
-                <a:latin typeface="Century Schoolbook" pitchFamily="34" charset="0"/>
-                <a:ea typeface="Century Schoolbook" pitchFamily="34" charset="-122"/>
-                <a:cs typeface="Century Schoolbook" pitchFamily="34" charset="-120"/>
-              </a:rPr>
-              <a:t>Every seed behind the table</a:t>
-            </a:r>
-            <a:endParaRPr lang="en-US" sz="2700" dirty="0"/>
-          </a:p>
-        </p:txBody>
-      </p:sp>
       <p:graphicFrame>
         <p:nvGraphicFramePr>
-          <p:cNvPr id="19" name="Table 0"/>
+          <p:cNvPr id="18" name="Table 0"/>
           <p:cNvGraphicFramePr>
             <a:graphicFrameLocks noGrp="1"/>
           </p:cNvGraphicFramePr>
@@ -22582,6 +21874,997 @@
             <a:pPr algn="r"/>
             <a:fld id="{F7021451-1387-4CA6-816F-3879F97B5CBC}" type="slidenum">
               <a:rPr b="0" lang="en-US"/>
+              <a:t>17</a:t>
+            </a:fld>
+            <a:endParaRPr lang="en-US"/>
+          </a:p>
+        </p:txBody>
+      </p:sp>
+    </p:spTree>
+  </p:cSld>
+  <p:clrMapOvr>
+    <a:masterClrMapping/>
+  </p:clrMapOvr>
+</p:sld>
+</file>
+
+<file path=ppt/slides/slide18.xml><?xml version="1.0" encoding="utf-8"?>
+<p:sld xmlns:a="http://schemas.openxmlformats.org/drawingml/2006/main" xmlns:r="http://schemas.openxmlformats.org/officeDocument/2006/relationships" xmlns:p="http://schemas.openxmlformats.org/presentationml/2006/main" show="0">
+  <p:cSld name="Slide 18">
+    <p:spTree>
+      <p:nvGrpSpPr>
+        <p:cNvPr id="1" name=""/>
+        <p:cNvGrpSpPr/>
+        <p:nvPr/>
+      </p:nvGrpSpPr>
+      <p:grpSpPr>
+        <a:xfrm>
+          <a:off x="0" y="0"/>
+          <a:ext cx="0" cy="0"/>
+          <a:chOff x="0" y="0"/>
+          <a:chExt cx="0" cy="0"/>
+        </a:xfrm>
+      </p:grpSpPr>
+      <p:sp>
+        <p:nvSpPr>
+          <p:cNvPr id="2" name="Text 1"/>
+          <p:cNvSpPr/>
+          <p:nvPr>
+            <p:ph idx="101" type="body" hasCustomPrompt="1"/>
+          </p:nvPr>
+        </p:nvSpPr>
+        <p:spPr>
+          <a:xfrm>
+            <a:off x="640080" y="402336"/>
+            <a:ext cx="10911535" cy="256032"/>
+          </a:xfrm>
+          <a:prstGeom prst="rect">
+            <a:avLst/>
+          </a:prstGeom>
+          <a:noFill/>
+          <a:ln/>
+        </p:spPr>
+        <p:txBody>
+          <a:bodyPr wrap="square" lIns="0" tIns="0" rIns="0" bIns="0" rtlCol="0" anchor="t"/>
+          <a:lstStyle/>
+          <a:p>
+            <a:pPr algn="l" indent="0" marL="0">
+              <a:buNone/>
+            </a:pPr>
+            <a:r>
+              <a:rPr lang="en-US" sz="1050" b="1" spc="180" kern="0" dirty="0">
+                <a:solidFill>
+                  <a:srgbClr val="9AA6B6"/>
+                </a:solidFill>
+                <a:latin typeface="Calibri" pitchFamily="34" charset="0"/>
+                <a:ea typeface="Calibri" pitchFamily="34" charset="-122"/>
+                <a:cs typeface="Calibri" pitchFamily="34" charset="-120"/>
+              </a:rPr>
+              <a:t>BACKUP</a:t>
+            </a:r>
+            <a:endParaRPr lang="en-US" sz="1050" dirty="0"/>
+          </a:p>
+        </p:txBody>
+      </p:sp>
+      <p:sp>
+        <p:nvSpPr>
+          <p:cNvPr id="3" name="Text 1"/>
+          <p:cNvSpPr/>
+          <p:nvPr>
+            <p:ph idx="102" type="title" hasCustomPrompt="1"/>
+          </p:nvPr>
+        </p:nvSpPr>
+        <p:spPr>
+          <a:xfrm>
+            <a:off x="640080" y="676656"/>
+            <a:ext cx="10911535" cy="868680"/>
+          </a:xfrm>
+          <a:prstGeom prst="rect">
+            <a:avLst/>
+          </a:prstGeom>
+          <a:noFill/>
+          <a:ln/>
+        </p:spPr>
+        <p:txBody>
+          <a:bodyPr wrap="square" lIns="0" tIns="0" rIns="0" bIns="0" rtlCol="0" anchor="t"/>
+          <a:lstStyle/>
+          <a:p>
+            <a:pPr algn="l" indent="0" marL="0">
+              <a:buNone/>
+            </a:pPr>
+            <a:r>
+              <a:rPr lang="en-US" sz="2700" dirty="0">
+                <a:solidFill>
+                  <a:srgbClr val="E8ECF2"/>
+                </a:solidFill>
+                <a:latin typeface="Century Schoolbook" pitchFamily="34" charset="0"/>
+                <a:ea typeface="Century Schoolbook" pitchFamily="34" charset="-122"/>
+                <a:cs typeface="Century Schoolbook" pitchFamily="34" charset="-120"/>
+              </a:rPr>
+              <a:t>On sparse instances the problem is one-dimensional</a:t>
+            </a:r>
+            <a:endParaRPr lang="en-US" sz="2700" dirty="0"/>
+          </a:p>
+        </p:txBody>
+      </p:sp>
+      <p:sp>
+        <p:nvSpPr>
+          <p:cNvPr id="4" name="Text 2"/>
+          <p:cNvSpPr txBox="1"/>
+          <p:nvPr/>
+        </p:nvSpPr>
+        <p:spPr>
+          <a:xfrm>
+            <a:off x="640080" y="1810512"/>
+            <a:ext cx="5852160" cy="1280160"/>
+          </a:xfrm>
+          <a:prstGeom prst="rect">
+            <a:avLst/>
+          </a:prstGeom>
+          <a:noFill/>
+          <a:ln/>
+        </p:spPr>
+        <p:txBody>
+          <a:bodyPr wrap="square" lIns="0" tIns="0" rIns="0" bIns="0" rtlCol="0" anchor="t"/>
+          <a:lstStyle/>
+          <a:p>
+            <a:pPr indent="0" marL="0">
+              <a:buNone/>
+            </a:pPr>
+            <a:r>
+              <a:rPr lang="en-US" sz="1400" dirty="0">
+                <a:solidFill>
+                  <a:srgbClr val="E8ECF2"/>
+                </a:solidFill>
+                <a:latin typeface="Calibri" pitchFamily="34" charset="0"/>
+                <a:ea typeface="Calibri" pitchFamily="34" charset="-122"/>
+                <a:cs typeface="Calibri" pitchFamily="34" charset="-120"/>
+              </a:rPr>
+              <a:t>A point at </a:t>
+            </a:r>
+            <a:pPr indent="0" marL="0">
+              <a:buNone/>
+            </a:pPr>
+            <a:r>
+              <a:rPr lang="en-US" sz="1400" i="1" dirty="0">
+                <a:solidFill>
+                  <a:srgbClr val="E8ECF2"/>
+                </a:solidFill>
+                <a:latin typeface="Calibri" pitchFamily="34" charset="0"/>
+                <a:ea typeface="Calibri" pitchFamily="34" charset="-122"/>
+                <a:cs typeface="Calibri" pitchFamily="34" charset="-120"/>
+              </a:rPr>
+              <a:t>t</a:t>
+            </a:r>
+            <a:pPr indent="0" marL="0">
+              <a:buNone/>
+            </a:pPr>
+            <a:r>
+              <a:rPr lang="en-US" sz="1400" dirty="0">
+                <a:solidFill>
+                  <a:srgbClr val="E8ECF2"/>
+                </a:solidFill>
+                <a:latin typeface="Calibri" pitchFamily="34" charset="0"/>
+                <a:ea typeface="Calibri" pitchFamily="34" charset="-122"/>
+                <a:cs typeface="Calibri" pitchFamily="34" charset="-120"/>
+              </a:rPr>
+              <a:t> = 0 covers (</a:t>
+            </a:r>
+            <a:pPr indent="0" marL="0">
+              <a:buNone/>
+            </a:pPr>
+            <a:r>
+              <a:rPr lang="en-US" sz="1400" i="1" dirty="0">
+                <a:solidFill>
+                  <a:srgbClr val="E8ECF2"/>
+                </a:solidFill>
+                <a:latin typeface="Calibri" pitchFamily="34" charset="0"/>
+                <a:ea typeface="Calibri" pitchFamily="34" charset="-122"/>
+                <a:cs typeface="Calibri" pitchFamily="34" charset="-120"/>
+              </a:rPr>
+              <a:t>n</a:t>
+            </a:r>
+            <a:pPr indent="0" marL="0">
+              <a:buNone/>
+            </a:pPr>
+            <a:r>
+              <a:rPr lang="en-US" sz="1400" dirty="0">
+                <a:solidFill>
+                  <a:srgbClr val="E8ECF2"/>
+                </a:solidFill>
+                <a:latin typeface="Calibri" pitchFamily="34" charset="0"/>
+                <a:ea typeface="Calibri" pitchFamily="34" charset="-122"/>
+                <a:cs typeface="Calibri" pitchFamily="34" charset="-120"/>
+              </a:rPr>
+              <a:t> − </a:t>
+            </a:r>
+            <a:pPr indent="0" marL="0">
+              <a:buNone/>
+            </a:pPr>
+            <a:r>
+              <a:rPr lang="en-US" sz="1400" i="1" dirty="0">
+                <a:solidFill>
+                  <a:srgbClr val="E8ECF2"/>
+                </a:solidFill>
+                <a:latin typeface="Calibri" pitchFamily="34" charset="0"/>
+                <a:ea typeface="Calibri" pitchFamily="34" charset="-122"/>
+                <a:cs typeface="Calibri" pitchFamily="34" charset="-120"/>
+              </a:rPr>
+              <a:t>w</a:t>
+            </a:r>
+            <a:pPr indent="0" marL="0">
+              <a:buNone/>
+            </a:pPr>
+            <a:r>
+              <a:rPr lang="en-US" sz="1400" dirty="0">
+                <a:solidFill>
+                  <a:srgbClr val="E8ECF2"/>
+                </a:solidFill>
+                <a:latin typeface="Calibri" pitchFamily="34" charset="0"/>
+                <a:ea typeface="Calibri" pitchFamily="34" charset="-122"/>
+                <a:cs typeface="Calibri" pitchFamily="34" charset="-120"/>
+              </a:rPr>
+              <a:t>)·</a:t>
+            </a:r>
+            <a:pPr indent="0" marL="0">
+              <a:buNone/>
+            </a:pPr>
+            <a:r>
+              <a:rPr lang="en-US" sz="1400" i="1" dirty="0">
+                <a:solidFill>
+                  <a:srgbClr val="E8ECF2"/>
+                </a:solidFill>
+                <a:latin typeface="Calibri" pitchFamily="34" charset="0"/>
+                <a:ea typeface="Calibri" pitchFamily="34" charset="-122"/>
+                <a:cs typeface="Calibri" pitchFamily="34" charset="-120"/>
+              </a:rPr>
+              <a:t>n</a:t>
+            </a:r>
+            <a:pPr indent="0" marL="0">
+              <a:buNone/>
+            </a:pPr>
+            <a:r>
+              <a:rPr lang="en-US" sz="1400" dirty="0">
+                <a:solidFill>
+                  <a:srgbClr val="E8ECF2"/>
+                </a:solidFill>
+                <a:latin typeface="Calibri" pitchFamily="34" charset="0"/>
+                <a:ea typeface="Calibri" pitchFamily="34" charset="-122"/>
+                <a:cs typeface="Calibri" pitchFamily="34" charset="-120"/>
+              </a:rPr>
+              <a:t> of the </a:t>
+            </a:r>
+            <a:pPr indent="0" marL="0">
+              <a:buNone/>
+            </a:pPr>
+            <a:r>
+              <a:rPr lang="en-US" sz="1400" i="1" dirty="0">
+                <a:solidFill>
+                  <a:srgbClr val="E8ECF2"/>
+                </a:solidFill>
+                <a:latin typeface="Calibri" pitchFamily="34" charset="0"/>
+                <a:ea typeface="Calibri" pitchFamily="34" charset="-122"/>
+                <a:cs typeface="Calibri" pitchFamily="34" charset="-120"/>
+              </a:rPr>
+              <a:t>n</a:t>
+            </a:r>
+            <a:pPr indent="0" marL="0">
+              <a:buNone/>
+            </a:pPr>
+            <a:r>
+              <a:rPr lang="en-US" sz="1400" dirty="0">
+                <a:solidFill>
+                  <a:srgbClr val="E8ECF2"/>
+                </a:solidFill>
+                <a:latin typeface="Calibri" pitchFamily="34" charset="0"/>
+                <a:ea typeface="Calibri" pitchFamily="34" charset="-122"/>
+                <a:cs typeface="Calibri" pitchFamily="34" charset="-120"/>
+              </a:rPr>
+              <a:t> × </a:t>
+            </a:r>
+            <a:pPr indent="0" marL="0">
+              <a:buNone/>
+            </a:pPr>
+            <a:r>
+              <a:rPr lang="en-US" sz="1400" i="1" dirty="0">
+                <a:solidFill>
+                  <a:srgbClr val="E8ECF2"/>
+                </a:solidFill>
+                <a:latin typeface="Calibri" pitchFamily="34" charset="0"/>
+                <a:ea typeface="Calibri" pitchFamily="34" charset="-122"/>
+                <a:cs typeface="Calibri" pitchFamily="34" charset="-120"/>
+              </a:rPr>
+              <a:t>n</a:t>
+            </a:r>
+            <a:pPr indent="0" marL="0">
+              <a:buNone/>
+            </a:pPr>
+            <a:r>
+              <a:rPr lang="en-US" sz="1400" dirty="0">
+                <a:solidFill>
+                  <a:srgbClr val="E8ECF2"/>
+                </a:solidFill>
+                <a:latin typeface="Calibri" pitchFamily="34" charset="0"/>
+                <a:ea typeface="Calibri" pitchFamily="34" charset="-122"/>
+                <a:cs typeface="Calibri" pitchFamily="34" charset="-120"/>
+              </a:rPr>
+              <a:t> square. On small-graph the construction’s </a:t>
+            </a:r>
+            <a:pPr indent="0" marL="0">
+              <a:buNone/>
+            </a:pPr>
+            <a:r>
+              <a:rPr lang="en-US" sz="1400" i="1" dirty="0">
+                <a:solidFill>
+                  <a:srgbClr val="E8ECF2"/>
+                </a:solidFill>
+                <a:latin typeface="Calibri" pitchFamily="34" charset="0"/>
+                <a:ea typeface="Calibri" pitchFamily="34" charset="-122"/>
+                <a:cs typeface="Calibri" pitchFamily="34" charset="-120"/>
+              </a:rPr>
+              <a:t>t</a:t>
+            </a:r>
+            <a:pPr indent="0" marL="0">
+              <a:buNone/>
+            </a:pPr>
+            <a:r>
+              <a:rPr lang="en-US" sz="1400" dirty="0">
+                <a:solidFill>
+                  <a:srgbClr val="E8ECF2"/>
+                </a:solidFill>
+                <a:latin typeface="Calibri" pitchFamily="34" charset="0"/>
+                <a:ea typeface="Calibri" pitchFamily="34" charset="-122"/>
+                <a:cs typeface="Calibri" pitchFamily="34" charset="-120"/>
+              </a:rPr>
+              <a:t> = 0 point, width 20, carries 99.99% of its whole score; on medium-graph, width 277, it carries 97.7%.</a:t>
+            </a:r>
+            <a:endParaRPr lang="en-US" sz="1400" dirty="0"/>
+          </a:p>
+        </p:txBody>
+      </p:sp>
+      <p:sp>
+        <p:nvSpPr>
+          <p:cNvPr id="5" name="Text 3"/>
+          <p:cNvSpPr txBox="1"/>
+          <p:nvPr/>
+        </p:nvSpPr>
+        <p:spPr>
+          <a:xfrm>
+            <a:off x="640080" y="3182112"/>
+            <a:ext cx="5852160" cy="1280160"/>
+          </a:xfrm>
+          <a:prstGeom prst="rect">
+            <a:avLst/>
+          </a:prstGeom>
+          <a:noFill/>
+          <a:ln/>
+        </p:spPr>
+        <p:txBody>
+          <a:bodyPr wrap="square" lIns="0" tIns="0" rIns="0" bIns="0" rtlCol="0" anchor="t"/>
+          <a:lstStyle/>
+          <a:p>
+            <a:pPr indent="0" marL="0">
+              <a:buNone/>
+            </a:pPr>
+            <a:r>
+              <a:rPr lang="en-US" sz="1400" dirty="0">
+                <a:solidFill>
+                  <a:srgbClr val="E8ECF2"/>
+                </a:solidFill>
+                <a:latin typeface="Calibri" pitchFamily="34" charset="0"/>
+                <a:ea typeface="Calibri" pitchFamily="34" charset="-122"/>
+                <a:cs typeface="Calibri" pitchFamily="34" charset="-120"/>
+              </a:rPr>
+              <a:t>On large-graph no single point can exceed (</a:t>
+            </a:r>
+            <a:pPr indent="0" marL="0">
+              <a:buNone/>
+            </a:pPr>
+            <a:r>
+              <a:rPr lang="en-US" sz="1400" i="1" dirty="0">
+                <a:solidFill>
+                  <a:srgbClr val="E8ECF2"/>
+                </a:solidFill>
+                <a:latin typeface="Calibri" pitchFamily="34" charset="0"/>
+                <a:ea typeface="Calibri" pitchFamily="34" charset="-122"/>
+                <a:cs typeface="Calibri" pitchFamily="34" charset="-120"/>
+              </a:rPr>
+              <a:t>n</a:t>
+            </a:r>
+            <a:pPr indent="0" marL="0">
+              <a:buNone/>
+            </a:pPr>
+            <a:r>
+              <a:rPr lang="en-US" sz="1400" dirty="0">
+                <a:solidFill>
+                  <a:srgbClr val="E8ECF2"/>
+                </a:solidFill>
+                <a:latin typeface="Calibri" pitchFamily="34" charset="0"/>
+                <a:ea typeface="Calibri" pitchFamily="34" charset="-122"/>
+                <a:cs typeface="Calibri" pitchFamily="34" charset="-120"/>
+              </a:rPr>
+              <a:t> − 499)·</a:t>
+            </a:r>
+            <a:pPr indent="0" marL="0">
+              <a:buNone/>
+            </a:pPr>
+            <a:r>
+              <a:rPr lang="en-US" sz="1400" i="1" dirty="0">
+                <a:solidFill>
+                  <a:srgbClr val="E8ECF2"/>
+                </a:solidFill>
+                <a:latin typeface="Calibri" pitchFamily="34" charset="0"/>
+                <a:ea typeface="Calibri" pitchFamily="34" charset="-122"/>
+                <a:cs typeface="Calibri" pitchFamily="34" charset="-120"/>
+              </a:rPr>
+              <a:t>n</a:t>
+            </a:r>
+            <a:pPr indent="0" marL="0">
+              <a:buNone/>
+            </a:pPr>
+            <a:r>
+              <a:rPr lang="en-US" sz="1400" dirty="0">
+                <a:solidFill>
+                  <a:srgbClr val="E8ECF2"/>
+                </a:solidFill>
+                <a:latin typeface="Calibri" pitchFamily="34" charset="0"/>
+                <a:ea typeface="Calibri" pitchFamily="34" charset="-122"/>
+                <a:cs typeface="Calibri" pitchFamily="34" charset="-120"/>
+              </a:rPr>
+              <a:t>, 79.4% of the square, yet the best known reaches 93.3%: only on the dense family does the staircase earn its keep.</a:t>
+            </a:r>
+            <a:endParaRPr lang="en-US" sz="1400" dirty="0"/>
+          </a:p>
+        </p:txBody>
+      </p:sp>
+      <p:sp>
+        <p:nvSpPr>
+          <p:cNvPr id="6" name="Text 4"/>
+          <p:cNvSpPr txBox="1"/>
+          <p:nvPr/>
+        </p:nvSpPr>
+        <p:spPr>
+          <a:xfrm>
+            <a:off x="640080" y="4553712"/>
+            <a:ext cx="5852160" cy="1280160"/>
+          </a:xfrm>
+          <a:prstGeom prst="rect">
+            <a:avLst/>
+          </a:prstGeom>
+          <a:noFill/>
+          <a:ln/>
+        </p:spPr>
+        <p:txBody>
+          <a:bodyPr wrap="square" lIns="0" tIns="0" rIns="0" bIns="0" rtlCol="0" anchor="t"/>
+          <a:lstStyle/>
+          <a:p>
+            <a:pPr indent="0" marL="0">
+              <a:buNone/>
+            </a:pPr>
+            <a:r>
+              <a:rPr lang="en-US" sz="1400" dirty="0">
+                <a:solidFill>
+                  <a:srgbClr val="9AA6B6"/>
+                </a:solidFill>
+                <a:latin typeface="Calibri" pitchFamily="34" charset="0"/>
+                <a:ea typeface="Calibri" pitchFamily="34" charset="-122"/>
+                <a:cs typeface="Calibri" pitchFamily="34" charset="-120"/>
+              </a:rPr>
+              <a:t>And the problem is hard twice over: choose which </a:t>
+            </a:r>
+            <a:pPr indent="0" marL="0">
+              <a:buNone/>
+            </a:pPr>
+            <a:r>
+              <a:rPr lang="en-US" sz="1400" i="1" dirty="0">
+                <a:solidFill>
+                  <a:srgbClr val="9AA6B6"/>
+                </a:solidFill>
+                <a:latin typeface="Calibri" pitchFamily="34" charset="0"/>
+                <a:ea typeface="Calibri" pitchFamily="34" charset="-122"/>
+                <a:cs typeface="Calibri" pitchFamily="34" charset="-120"/>
+              </a:rPr>
+              <a:t>t</a:t>
+            </a:r>
+            <a:pPr indent="0" marL="0">
+              <a:buNone/>
+            </a:pPr>
+            <a:r>
+              <a:rPr lang="en-US" sz="1400" dirty="0">
+                <a:solidFill>
+                  <a:srgbClr val="9AA6B6"/>
+                </a:solidFill>
+                <a:latin typeface="Calibri" pitchFamily="34" charset="0"/>
+                <a:ea typeface="Calibri" pitchFamily="34" charset="-122"/>
+                <a:cs typeface="Calibri" pitchFamily="34" charset="-120"/>
+              </a:rPr>
+              <a:t> vertices to give up (about 10⁴⁰³ subsets at </a:t>
+            </a:r>
+            <a:pPr indent="0" marL="0">
+              <a:buNone/>
+            </a:pPr>
+            <a:r>
+              <a:rPr lang="en-US" sz="1400" i="1" dirty="0">
+                <a:solidFill>
+                  <a:srgbClr val="9AA6B6"/>
+                </a:solidFill>
+                <a:latin typeface="Calibri" pitchFamily="34" charset="0"/>
+                <a:ea typeface="Calibri" pitchFamily="34" charset="-122"/>
+                <a:cs typeface="Calibri" pitchFamily="34" charset="-120"/>
+              </a:rPr>
+              <a:t>n</a:t>
+            </a:r>
+            <a:pPr indent="0" marL="0">
+              <a:buNone/>
+            </a:pPr>
+            <a:r>
+              <a:rPr lang="en-US" sz="1400" dirty="0">
+                <a:solidFill>
+                  <a:srgbClr val="9AA6B6"/>
+                </a:solidFill>
+                <a:latin typeface="Calibri" pitchFamily="34" charset="0"/>
+                <a:ea typeface="Calibri" pitchFamily="34" charset="-122"/>
+                <a:cs typeface="Calibri" pitchFamily="34" charset="-120"/>
+              </a:rPr>
+              <a:t> = 1,357, </a:t>
+            </a:r>
+            <a:pPr indent="0" marL="0">
+              <a:buNone/>
+            </a:pPr>
+            <a:r>
+              <a:rPr lang="en-US" sz="1400" i="1" dirty="0">
+                <a:solidFill>
+                  <a:srgbClr val="9AA6B6"/>
+                </a:solidFill>
+                <a:latin typeface="Calibri" pitchFamily="34" charset="0"/>
+                <a:ea typeface="Calibri" pitchFamily="34" charset="-122"/>
+                <a:cs typeface="Calibri" pitchFamily="34" charset="-120"/>
+              </a:rPr>
+              <a:t>t</a:t>
+            </a:r>
+            <a:pPr indent="0" marL="0">
+              <a:buNone/>
+            </a:pPr>
+            <a:r>
+              <a:rPr lang="en-US" sz="1400" dirty="0">
+                <a:solidFill>
+                  <a:srgbClr val="9AA6B6"/>
+                </a:solidFill>
+                <a:latin typeface="Calibri" pitchFamily="34" charset="0"/>
+                <a:ea typeface="Calibri" pitchFamily="34" charset="-122"/>
+                <a:cs typeface="Calibri" pitchFamily="34" charset="-120"/>
+              </a:rPr>
+              <a:t> = 600), then minimise the width of what is left, which is treewidth itself, NP-hard (Arnborg, Corneil and Proskurowski, 1987).</a:t>
+            </a:r>
+            <a:endParaRPr lang="en-US" sz="1400" dirty="0"/>
+          </a:p>
+        </p:txBody>
+      </p:sp>
+      <p:sp>
+        <p:nvSpPr>
+          <p:cNvPr id="7" name="Shape 5"/>
+          <p:cNvSpPr/>
+          <p:nvPr/>
+        </p:nvSpPr>
+        <p:spPr>
+          <a:xfrm>
+            <a:off x="6949440" y="2148840"/>
+            <a:ext cx="2194560" cy="2194560"/>
+          </a:xfrm>
+          <a:prstGeom prst="rect">
+            <a:avLst/>
+          </a:prstGeom>
+          <a:ln w="12700">
+            <a:solidFill>
+              <a:srgbClr val="9AA6B6"/>
+            </a:solidFill>
+            <a:prstDash val="solid"/>
+          </a:ln>
+        </p:spPr>
+      </p:sp>
+      <p:sp>
+        <p:nvSpPr>
+          <p:cNvPr id="8" name="Shape 6"/>
+          <p:cNvSpPr/>
+          <p:nvPr/>
+        </p:nvSpPr>
+        <p:spPr>
+          <a:xfrm>
+            <a:off x="6981784" y="2148840"/>
+            <a:ext cx="2162216" cy="2194560"/>
+          </a:xfrm>
+          <a:prstGeom prst="rect">
+            <a:avLst/>
+          </a:prstGeom>
+          <a:solidFill>
+            <a:srgbClr val="3DDC97">
+              <a:alpha val="30000"/>
+            </a:srgbClr>
+          </a:solidFill>
+          <a:ln/>
+        </p:spPr>
+      </p:sp>
+      <p:sp>
+        <p:nvSpPr>
+          <p:cNvPr id="9" name="Text 7"/>
+          <p:cNvSpPr txBox="1"/>
+          <p:nvPr/>
+        </p:nvSpPr>
+        <p:spPr>
+          <a:xfrm>
+            <a:off x="6949440" y="4453128"/>
+            <a:ext cx="2194560" cy="256032"/>
+          </a:xfrm>
+          <a:prstGeom prst="rect">
+            <a:avLst/>
+          </a:prstGeom>
+          <a:noFill/>
+          <a:ln/>
+        </p:spPr>
+        <p:txBody>
+          <a:bodyPr wrap="square" lIns="0" tIns="0" rIns="0" bIns="0" rtlCol="0" anchor="t"/>
+          <a:lstStyle/>
+          <a:p>
+            <a:pPr algn="ctr" indent="0" marL="0">
+              <a:buNone/>
+            </a:pPr>
+            <a:r>
+              <a:rPr lang="en-US" sz="1300" b="1" dirty="0">
+                <a:solidFill>
+                  <a:srgbClr val="E8ECF2"/>
+                </a:solidFill>
+                <a:latin typeface="Calibri" pitchFamily="34" charset="0"/>
+                <a:ea typeface="Calibri" pitchFamily="34" charset="-122"/>
+                <a:cs typeface="Calibri" pitchFamily="34" charset="-120"/>
+              </a:rPr>
+              <a:t>small-graph</a:t>
+            </a:r>
+            <a:endParaRPr lang="en-US" sz="1300" dirty="0"/>
+          </a:p>
+        </p:txBody>
+      </p:sp>
+      <p:sp>
+        <p:nvSpPr>
+          <p:cNvPr id="10" name="Text 8"/>
+          <p:cNvSpPr txBox="1"/>
+          <p:nvPr/>
+        </p:nvSpPr>
+        <p:spPr>
+          <a:xfrm>
+            <a:off x="6949440" y="3017520"/>
+            <a:ext cx="2194560" cy="457200"/>
+          </a:xfrm>
+          <a:prstGeom prst="rect">
+            <a:avLst/>
+          </a:prstGeom>
+          <a:noFill/>
+          <a:ln/>
+        </p:spPr>
+        <p:txBody>
+          <a:bodyPr wrap="square" lIns="0" tIns="0" rIns="0" bIns="0" rtlCol="0" anchor="t"/>
+          <a:lstStyle/>
+          <a:p>
+            <a:pPr algn="ctr" indent="0" marL="0">
+              <a:buNone/>
+            </a:pPr>
+            <a:r>
+              <a:rPr lang="en-US" sz="2400" dirty="0">
+                <a:solidFill>
+                  <a:srgbClr val="FFFFFF"/>
+                </a:solidFill>
+                <a:latin typeface="Century Schoolbook" pitchFamily="34" charset="0"/>
+                <a:ea typeface="Century Schoolbook" pitchFamily="34" charset="-122"/>
+                <a:cs typeface="Century Schoolbook" pitchFamily="34" charset="-120"/>
+              </a:rPr>
+              <a:t>98.5%</a:t>
+            </a:r>
+            <a:endParaRPr lang="en-US" sz="2400" dirty="0"/>
+          </a:p>
+        </p:txBody>
+      </p:sp>
+      <p:sp>
+        <p:nvSpPr>
+          <p:cNvPr id="11" name="Text 9"/>
+          <p:cNvSpPr txBox="1"/>
+          <p:nvPr/>
+        </p:nvSpPr>
+        <p:spPr>
+          <a:xfrm>
+            <a:off x="6858000" y="4727448"/>
+            <a:ext cx="2377440" cy="219456"/>
+          </a:xfrm>
+          <a:prstGeom prst="rect">
+            <a:avLst/>
+          </a:prstGeom>
+          <a:noFill/>
+          <a:ln/>
+        </p:spPr>
+        <p:txBody>
+          <a:bodyPr wrap="square" lIns="0" tIns="0" rIns="0" bIns="0" rtlCol="0" anchor="t"/>
+          <a:lstStyle/>
+          <a:p>
+            <a:pPr algn="ctr" indent="0" marL="0">
+              <a:buNone/>
+            </a:pPr>
+            <a:r>
+              <a:rPr lang="en-US" sz="1050" dirty="0">
+                <a:solidFill>
+                  <a:srgbClr val="9AA6B6"/>
+                </a:solidFill>
+                <a:latin typeface="Calibri" pitchFamily="34" charset="0"/>
+                <a:ea typeface="Calibri" pitchFamily="34" charset="-122"/>
+                <a:cs typeface="Calibri" pitchFamily="34" charset="-120"/>
+              </a:rPr>
+              <a:t>w = 20 of n = 1,357 · 99.99% of its score</a:t>
+            </a:r>
+            <a:endParaRPr lang="en-US" sz="1050" dirty="0"/>
+          </a:p>
+        </p:txBody>
+      </p:sp>
+      <p:sp>
+        <p:nvSpPr>
+          <p:cNvPr id="12" name="Shape 10"/>
+          <p:cNvSpPr/>
+          <p:nvPr/>
+        </p:nvSpPr>
+        <p:spPr>
+          <a:xfrm>
+            <a:off x="9372600" y="2148840"/>
+            <a:ext cx="2194560" cy="2194560"/>
+          </a:xfrm>
+          <a:prstGeom prst="rect">
+            <a:avLst/>
+          </a:prstGeom>
+          <a:ln w="12700">
+            <a:solidFill>
+              <a:srgbClr val="9AA6B6"/>
+            </a:solidFill>
+            <a:prstDash val="solid"/>
+          </a:ln>
+        </p:spPr>
+      </p:sp>
+      <p:sp>
+        <p:nvSpPr>
+          <p:cNvPr id="13" name="Shape 11"/>
+          <p:cNvSpPr/>
+          <p:nvPr/>
+        </p:nvSpPr>
+        <p:spPr>
+          <a:xfrm>
+            <a:off x="9823995" y="2148840"/>
+            <a:ext cx="1743165" cy="2194560"/>
+          </a:xfrm>
+          <a:prstGeom prst="rect">
+            <a:avLst/>
+          </a:prstGeom>
+          <a:solidFill>
+            <a:srgbClr val="3DDC97">
+              <a:alpha val="30000"/>
+            </a:srgbClr>
+          </a:solidFill>
+          <a:ln/>
+        </p:spPr>
+      </p:sp>
+      <p:sp>
+        <p:nvSpPr>
+          <p:cNvPr id="14" name="Text 12"/>
+          <p:cNvSpPr txBox="1"/>
+          <p:nvPr/>
+        </p:nvSpPr>
+        <p:spPr>
+          <a:xfrm>
+            <a:off x="9372600" y="4453128"/>
+            <a:ext cx="2194560" cy="256032"/>
+          </a:xfrm>
+          <a:prstGeom prst="rect">
+            <a:avLst/>
+          </a:prstGeom>
+          <a:noFill/>
+          <a:ln/>
+        </p:spPr>
+        <p:txBody>
+          <a:bodyPr wrap="square" lIns="0" tIns="0" rIns="0" bIns="0" rtlCol="0" anchor="t"/>
+          <a:lstStyle/>
+          <a:p>
+            <a:pPr algn="ctr" indent="0" marL="0">
+              <a:buNone/>
+            </a:pPr>
+            <a:r>
+              <a:rPr lang="en-US" sz="1300" b="1" dirty="0">
+                <a:solidFill>
+                  <a:srgbClr val="E8ECF2"/>
+                </a:solidFill>
+                <a:latin typeface="Calibri" pitchFamily="34" charset="0"/>
+                <a:ea typeface="Calibri" pitchFamily="34" charset="-122"/>
+                <a:cs typeface="Calibri" pitchFamily="34" charset="-120"/>
+              </a:rPr>
+              <a:t>large-graph</a:t>
+            </a:r>
+            <a:endParaRPr lang="en-US" sz="1300" dirty="0"/>
+          </a:p>
+        </p:txBody>
+      </p:sp>
+      <p:sp>
+        <p:nvSpPr>
+          <p:cNvPr id="15" name="Text 13"/>
+          <p:cNvSpPr txBox="1"/>
+          <p:nvPr/>
+        </p:nvSpPr>
+        <p:spPr>
+          <a:xfrm>
+            <a:off x="9372600" y="3017520"/>
+            <a:ext cx="2194560" cy="457200"/>
+          </a:xfrm>
+          <a:prstGeom prst="rect">
+            <a:avLst/>
+          </a:prstGeom>
+          <a:noFill/>
+          <a:ln/>
+        </p:spPr>
+        <p:txBody>
+          <a:bodyPr wrap="square" lIns="0" tIns="0" rIns="0" bIns="0" rtlCol="0" anchor="t"/>
+          <a:lstStyle/>
+          <a:p>
+            <a:pPr algn="ctr" indent="0" marL="0">
+              <a:buNone/>
+            </a:pPr>
+            <a:r>
+              <a:rPr lang="en-US" sz="2400" dirty="0">
+                <a:solidFill>
+                  <a:srgbClr val="FFFFFF"/>
+                </a:solidFill>
+                <a:latin typeface="Century Schoolbook" pitchFamily="34" charset="0"/>
+                <a:ea typeface="Century Schoolbook" pitchFamily="34" charset="-122"/>
+                <a:cs typeface="Century Schoolbook" pitchFamily="34" charset="-120"/>
+              </a:rPr>
+              <a:t>79.4%</a:t>
+            </a:r>
+            <a:endParaRPr lang="en-US" sz="2400" dirty="0"/>
+          </a:p>
+        </p:txBody>
+      </p:sp>
+      <p:sp>
+        <p:nvSpPr>
+          <p:cNvPr id="16" name="Text 14"/>
+          <p:cNvSpPr txBox="1"/>
+          <p:nvPr/>
+        </p:nvSpPr>
+        <p:spPr>
+          <a:xfrm>
+            <a:off x="9281160" y="4727448"/>
+            <a:ext cx="2377440" cy="219456"/>
+          </a:xfrm>
+          <a:prstGeom prst="rect">
+            <a:avLst/>
+          </a:prstGeom>
+          <a:noFill/>
+          <a:ln/>
+        </p:spPr>
+        <p:txBody>
+          <a:bodyPr wrap="square" lIns="0" tIns="0" rIns="0" bIns="0" rtlCol="0" anchor="t"/>
+          <a:lstStyle/>
+          <a:p>
+            <a:pPr algn="ctr" indent="0" marL="0">
+              <a:buNone/>
+            </a:pPr>
+            <a:r>
+              <a:rPr lang="en-US" sz="1050" dirty="0">
+                <a:solidFill>
+                  <a:srgbClr val="9AA6B6"/>
+                </a:solidFill>
+                <a:latin typeface="Calibri" pitchFamily="34" charset="0"/>
+                <a:ea typeface="Calibri" pitchFamily="34" charset="-122"/>
+                <a:cs typeface="Calibri" pitchFamily="34" charset="-120"/>
+              </a:rPr>
+              <a:t>w ≥ 499 of n = 2,426 · best known 93.3%</a:t>
+            </a:r>
+            <a:endParaRPr lang="en-US" sz="1050" dirty="0"/>
+          </a:p>
+        </p:txBody>
+      </p:sp>
+      <p:sp>
+        <p:nvSpPr>
+          <p:cNvPr id="17" name="Shape 15"/>
+          <p:cNvSpPr/>
+          <p:nvPr/>
+        </p:nvSpPr>
+        <p:spPr>
+          <a:xfrm>
+            <a:off x="6949440" y="5257800"/>
+            <a:ext cx="228600" cy="128016"/>
+          </a:xfrm>
+          <a:prstGeom prst="rect">
+            <a:avLst/>
+          </a:prstGeom>
+          <a:solidFill>
+            <a:srgbClr val="3DDC97">
+              <a:alpha val="30000"/>
+            </a:srgbClr>
+          </a:solidFill>
+          <a:ln/>
+        </p:spPr>
+      </p:sp>
+      <p:sp>
+        <p:nvSpPr>
+          <p:cNvPr id="18" name="Text 16"/>
+          <p:cNvSpPr txBox="1"/>
+          <p:nvPr/>
+        </p:nvSpPr>
+        <p:spPr>
+          <a:xfrm>
+            <a:off x="7251192" y="5202936"/>
+            <a:ext cx="2194560" cy="228600"/>
+          </a:xfrm>
+          <a:prstGeom prst="rect">
+            <a:avLst/>
+          </a:prstGeom>
+          <a:noFill/>
+          <a:ln/>
+        </p:spPr>
+        <p:txBody>
+          <a:bodyPr wrap="square" lIns="0" tIns="0" rIns="0" bIns="0" rtlCol="0" anchor="t"/>
+          <a:lstStyle/>
+          <a:p>
+            <a:pPr indent="0" marL="0">
+              <a:buNone/>
+            </a:pPr>
+            <a:r>
+              <a:rPr lang="en-US" sz="1050" dirty="0">
+                <a:solidFill>
+                  <a:srgbClr val="9AA6B6"/>
+                </a:solidFill>
+                <a:latin typeface="Calibri" pitchFamily="34" charset="0"/>
+                <a:ea typeface="Calibri" pitchFamily="34" charset="-122"/>
+                <a:cs typeface="Calibri" pitchFamily="34" charset="-120"/>
+              </a:rPr>
+              <a:t>one point at t = 0</a:t>
+            </a:r>
+            <a:endParaRPr lang="en-US" sz="1050" dirty="0"/>
+          </a:p>
+        </p:txBody>
+      </p:sp>
+      <p:sp>
+        <p:nvSpPr>
+          <p:cNvPr id="25" name="Slide Number Placeholder 0"/>
+          <p:cNvSpPr>
+            <a:spLocks noGrp="1"/>
+          </p:cNvSpPr>
+          <p:nvPr>
+            <p:ph type="sldNum" sz="quarter" idx="4294967295"/>
+          </p:nvPr>
+        </p:nvSpPr>
+        <p:spPr>
+          <a:xfrm>
+            <a:off x="11002975" y="6446520"/>
+            <a:ext cx="548640" cy="219456"/>
+          </a:xfrm>
+          <a:prstGeom prst="rect">
+            <a:avLst/>
+          </a:prstGeom>
+          <a:extLst>
+            <a:ext uri="{C572A759-6A51-4108-AA02-DFA0A04FC94B}">
+              <ma14:wrappingTextBoxFlag xmlns:ma14="http://schemas.microsoft.com/office/mac/drawingml/2011/main" val="0"/>
+            </a:ext>
+          </a:extLst>
+        </p:spPr>
+        <p:txBody>
+          <a:bodyPr/>
+          <a:lstStyle>
+            <a:lvl1pPr>
+              <a:defRPr sz="1000">
+                <a:solidFill>
+                  <a:srgbClr val="7D8AA0"/>
+                </a:solidFill>
+                <a:latin typeface="Calibri"/>
+                <a:ea typeface="Calibri"/>
+                <a:cs typeface="Calibri"/>
+              </a:defRPr>
+            </a:lvl1pPr>
+          </a:lstStyle>
+          <a:p>
+            <a:pPr algn="r"/>
+            <a:fld id="{F7021451-1387-4CA6-816F-3879F97B5CBC}" type="slidenum">
+              <a:rPr b="0" lang="en-US"/>
               <a:t>18</a:t>
             </a:fld>
             <a:endParaRPr lang="en-US"/>
@@ -22597,7 +22880,7 @@
 </file>
 
 <file path=ppt/slides/slide19.xml><?xml version="1.0" encoding="utf-8"?>
-<p:sld xmlns:a="http://schemas.openxmlformats.org/drawingml/2006/main" xmlns:r="http://schemas.openxmlformats.org/officeDocument/2006/relationships" xmlns:p="http://schemas.openxmlformats.org/presentationml/2006/main">
+<p:sld xmlns:a="http://schemas.openxmlformats.org/drawingml/2006/main" xmlns:r="http://schemas.openxmlformats.org/officeDocument/2006/relationships" xmlns:p="http://schemas.openxmlformats.org/presentationml/2006/main" show="0">
   <p:cSld name="Slide 19">
     <p:spTree>
       <p:nvGrpSpPr>
@@ -22689,7 +22972,7 @@
                 <a:ea typeface="Century Schoolbook" pitchFamily="34" charset="-122"/>
                 <a:cs typeface="Century Schoolbook" pitchFamily="34" charset="-120"/>
               </a:rPr>
-              <a:t>On sparse instances the problem is one-dimensional</a:t>
+              <a:t>Two findings about the problem, not the search</a:t>
             </a:r>
             <a:endParaRPr lang="en-US" sz="2700" dirty="0"/>
           </a:p>
@@ -22704,7 +22987,7 @@
         <p:spPr>
           <a:xfrm>
             <a:off x="640080" y="1810512"/>
-            <a:ext cx="5852160" cy="1280160"/>
+            <a:ext cx="5212080" cy="365760"/>
           </a:xfrm>
           <a:prstGeom prst="rect">
             <a:avLst/>
@@ -22720,213 +23003,17 @@
               <a:buNone/>
             </a:pPr>
             <a:r>
-              <a:rPr lang="en-US" sz="1400" dirty="0">
+              <a:rPr lang="en-US" sz="1800" dirty="0">
                 <a:solidFill>
                   <a:srgbClr val="E8ECF2"/>
                 </a:solidFill>
-                <a:latin typeface="Calibri" pitchFamily="34" charset="0"/>
-                <a:ea typeface="Calibri" pitchFamily="34" charset="-122"/>
-                <a:cs typeface="Calibri" pitchFamily="34" charset="-120"/>
-              </a:rPr>
-              <a:t>A point at </a:t>
-            </a:r>
-            <a:pPr indent="0" marL="0">
-              <a:buNone/>
-            </a:pPr>
-            <a:r>
-              <a:rPr lang="en-US" sz="1400" i="1" dirty="0">
-                <a:solidFill>
-                  <a:srgbClr val="E8ECF2"/>
-                </a:solidFill>
-                <a:latin typeface="Calibri" pitchFamily="34" charset="0"/>
-                <a:ea typeface="Calibri" pitchFamily="34" charset="-122"/>
-                <a:cs typeface="Calibri" pitchFamily="34" charset="-120"/>
-              </a:rPr>
-              <a:t>t</a:t>
-            </a:r>
-            <a:pPr indent="0" marL="0">
-              <a:buNone/>
-            </a:pPr>
-            <a:r>
-              <a:rPr lang="en-US" sz="1400" dirty="0">
-                <a:solidFill>
-                  <a:srgbClr val="E8ECF2"/>
-                </a:solidFill>
-                <a:latin typeface="Calibri" pitchFamily="34" charset="0"/>
-                <a:ea typeface="Calibri" pitchFamily="34" charset="-122"/>
-                <a:cs typeface="Calibri" pitchFamily="34" charset="-120"/>
-              </a:rPr>
-              <a:t> = 0 covers (</a:t>
-            </a:r>
-            <a:pPr indent="0" marL="0">
-              <a:buNone/>
-            </a:pPr>
-            <a:r>
-              <a:rPr lang="en-US" sz="1400" i="1" dirty="0">
-                <a:solidFill>
-                  <a:srgbClr val="E8ECF2"/>
-                </a:solidFill>
-                <a:latin typeface="Calibri" pitchFamily="34" charset="0"/>
-                <a:ea typeface="Calibri" pitchFamily="34" charset="-122"/>
-                <a:cs typeface="Calibri" pitchFamily="34" charset="-120"/>
-              </a:rPr>
-              <a:t>n</a:t>
-            </a:r>
-            <a:pPr indent="0" marL="0">
-              <a:buNone/>
-            </a:pPr>
-            <a:r>
-              <a:rPr lang="en-US" sz="1400" dirty="0">
-                <a:solidFill>
-                  <a:srgbClr val="E8ECF2"/>
-                </a:solidFill>
-                <a:latin typeface="Calibri" pitchFamily="34" charset="0"/>
-                <a:ea typeface="Calibri" pitchFamily="34" charset="-122"/>
-                <a:cs typeface="Calibri" pitchFamily="34" charset="-120"/>
-              </a:rPr>
-              <a:t> − </a:t>
-            </a:r>
-            <a:pPr indent="0" marL="0">
-              <a:buNone/>
-            </a:pPr>
-            <a:r>
-              <a:rPr lang="en-US" sz="1400" i="1" dirty="0">
-                <a:solidFill>
-                  <a:srgbClr val="E8ECF2"/>
-                </a:solidFill>
-                <a:latin typeface="Calibri" pitchFamily="34" charset="0"/>
-                <a:ea typeface="Calibri" pitchFamily="34" charset="-122"/>
-                <a:cs typeface="Calibri" pitchFamily="34" charset="-120"/>
-              </a:rPr>
-              <a:t>w</a:t>
-            </a:r>
-            <a:pPr indent="0" marL="0">
-              <a:buNone/>
-            </a:pPr>
-            <a:r>
-              <a:rPr lang="en-US" sz="1400" dirty="0">
-                <a:solidFill>
-                  <a:srgbClr val="E8ECF2"/>
-                </a:solidFill>
-                <a:latin typeface="Calibri" pitchFamily="34" charset="0"/>
-                <a:ea typeface="Calibri" pitchFamily="34" charset="-122"/>
-                <a:cs typeface="Calibri" pitchFamily="34" charset="-120"/>
-              </a:rPr>
-              <a:t>)·</a:t>
-            </a:r>
-            <a:pPr indent="0" marL="0">
-              <a:buNone/>
-            </a:pPr>
-            <a:r>
-              <a:rPr lang="en-US" sz="1400" i="1" dirty="0">
-                <a:solidFill>
-                  <a:srgbClr val="E8ECF2"/>
-                </a:solidFill>
-                <a:latin typeface="Calibri" pitchFamily="34" charset="0"/>
-                <a:ea typeface="Calibri" pitchFamily="34" charset="-122"/>
-                <a:cs typeface="Calibri" pitchFamily="34" charset="-120"/>
-              </a:rPr>
-              <a:t>n</a:t>
-            </a:r>
-            <a:pPr indent="0" marL="0">
-              <a:buNone/>
-            </a:pPr>
-            <a:r>
-              <a:rPr lang="en-US" sz="1400" dirty="0">
-                <a:solidFill>
-                  <a:srgbClr val="E8ECF2"/>
-                </a:solidFill>
-                <a:latin typeface="Calibri" pitchFamily="34" charset="0"/>
-                <a:ea typeface="Calibri" pitchFamily="34" charset="-122"/>
-                <a:cs typeface="Calibri" pitchFamily="34" charset="-120"/>
-              </a:rPr>
-              <a:t> of the </a:t>
-            </a:r>
-            <a:pPr indent="0" marL="0">
-              <a:buNone/>
-            </a:pPr>
-            <a:r>
-              <a:rPr lang="en-US" sz="1400" i="1" dirty="0">
-                <a:solidFill>
-                  <a:srgbClr val="E8ECF2"/>
-                </a:solidFill>
-                <a:latin typeface="Calibri" pitchFamily="34" charset="0"/>
-                <a:ea typeface="Calibri" pitchFamily="34" charset="-122"/>
-                <a:cs typeface="Calibri" pitchFamily="34" charset="-120"/>
-              </a:rPr>
-              <a:t>n</a:t>
-            </a:r>
-            <a:pPr indent="0" marL="0">
-              <a:buNone/>
-            </a:pPr>
-            <a:r>
-              <a:rPr lang="en-US" sz="1400" dirty="0">
-                <a:solidFill>
-                  <a:srgbClr val="E8ECF2"/>
-                </a:solidFill>
-                <a:latin typeface="Calibri" pitchFamily="34" charset="0"/>
-                <a:ea typeface="Calibri" pitchFamily="34" charset="-122"/>
-                <a:cs typeface="Calibri" pitchFamily="34" charset="-120"/>
-              </a:rPr>
-              <a:t> × </a:t>
-            </a:r>
-            <a:pPr indent="0" marL="0">
-              <a:buNone/>
-            </a:pPr>
-            <a:r>
-              <a:rPr lang="en-US" sz="1400" i="1" dirty="0">
-                <a:solidFill>
-                  <a:srgbClr val="E8ECF2"/>
-                </a:solidFill>
-                <a:latin typeface="Calibri" pitchFamily="34" charset="0"/>
-                <a:ea typeface="Calibri" pitchFamily="34" charset="-122"/>
-                <a:cs typeface="Calibri" pitchFamily="34" charset="-120"/>
-              </a:rPr>
-              <a:t>n</a:t>
-            </a:r>
-            <a:pPr indent="0" marL="0">
-              <a:buNone/>
-            </a:pPr>
-            <a:r>
-              <a:rPr lang="en-US" sz="1400" dirty="0">
-                <a:solidFill>
-                  <a:srgbClr val="E8ECF2"/>
-                </a:solidFill>
-                <a:latin typeface="Calibri" pitchFamily="34" charset="0"/>
-                <a:ea typeface="Calibri" pitchFamily="34" charset="-122"/>
-                <a:cs typeface="Calibri" pitchFamily="34" charset="-120"/>
-              </a:rPr>
-              <a:t> square. On small-graph the construction’s </a:t>
-            </a:r>
-            <a:pPr indent="0" marL="0">
-              <a:buNone/>
-            </a:pPr>
-            <a:r>
-              <a:rPr lang="en-US" sz="1400" i="1" dirty="0">
-                <a:solidFill>
-                  <a:srgbClr val="E8ECF2"/>
-                </a:solidFill>
-                <a:latin typeface="Calibri" pitchFamily="34" charset="0"/>
-                <a:ea typeface="Calibri" pitchFamily="34" charset="-122"/>
-                <a:cs typeface="Calibri" pitchFamily="34" charset="-120"/>
-              </a:rPr>
-              <a:t>t</a:t>
-            </a:r>
-            <a:pPr indent="0" marL="0">
-              <a:buNone/>
-            </a:pPr>
-            <a:r>
-              <a:rPr lang="en-US" sz="1400" dirty="0">
-                <a:solidFill>
-                  <a:srgbClr val="E8ECF2"/>
-                </a:solidFill>
-                <a:latin typeface="Calibri" pitchFamily="34" charset="0"/>
-                <a:ea typeface="Calibri" pitchFamily="34" charset="-122"/>
-                <a:cs typeface="Calibri" pitchFamily="34" charset="-120"/>
-              </a:rPr>
-              <a:t> = 0 point, width 20, carries 99.99% of its whole score; on medium-graph, width 277, it carries 97.7%.</a:t>
-            </a:r>
-            <a:endParaRPr lang="en-US" sz="1400" dirty="0"/>
+                <a:latin typeface="Century Schoolbook" pitchFamily="34" charset="0"/>
+                <a:ea typeface="Century Schoolbook" pitchFamily="34" charset="-122"/>
+                <a:cs typeface="Century Schoolbook" pitchFamily="34" charset="-120"/>
+              </a:rPr>
+              <a:t>Plain k-opt does not transfer</a:t>
+            </a:r>
+            <a:endParaRPr lang="en-US" sz="1800" dirty="0"/>
           </a:p>
         </p:txBody>
       </p:sp>
@@ -22938,8 +23025,8 @@
         </p:nvSpPr>
         <p:spPr>
           <a:xfrm>
-            <a:off x="640080" y="3182112"/>
-            <a:ext cx="5852160" cy="1280160"/>
+            <a:off x="640080" y="2240280"/>
+            <a:ext cx="5212080" cy="1828800"/>
           </a:xfrm>
           <a:prstGeom prst="rect">
             <a:avLst/>
@@ -22955,7 +23042,7 @@
               <a:buNone/>
             </a:pPr>
             <a:r>
-              <a:rPr lang="en-US" sz="1400" dirty="0">
+              <a:rPr lang="en-US" sz="1300" dirty="0">
                 <a:solidFill>
                   <a:srgbClr val="E8ECF2"/>
                 </a:solidFill>
@@ -22963,65 +23050,9 @@
                 <a:ea typeface="Calibri" pitchFamily="34" charset="-122"/>
                 <a:cs typeface="Calibri" pitchFamily="34" charset="-120"/>
               </a:rPr>
-              <a:t>On large-graph no single point can exceed (</a:t>
-            </a:r>
-            <a:pPr indent="0" marL="0">
-              <a:buNone/>
-            </a:pPr>
-            <a:r>
-              <a:rPr lang="en-US" sz="1400" i="1" dirty="0">
-                <a:solidFill>
-                  <a:srgbClr val="E8ECF2"/>
-                </a:solidFill>
-                <a:latin typeface="Calibri" pitchFamily="34" charset="0"/>
-                <a:ea typeface="Calibri" pitchFamily="34" charset="-122"/>
-                <a:cs typeface="Calibri" pitchFamily="34" charset="-120"/>
-              </a:rPr>
-              <a:t>n</a:t>
-            </a:r>
-            <a:pPr indent="0" marL="0">
-              <a:buNone/>
-            </a:pPr>
-            <a:r>
-              <a:rPr lang="en-US" sz="1400" dirty="0">
-                <a:solidFill>
-                  <a:srgbClr val="E8ECF2"/>
-                </a:solidFill>
-                <a:latin typeface="Calibri" pitchFamily="34" charset="0"/>
-                <a:ea typeface="Calibri" pitchFamily="34" charset="-122"/>
-                <a:cs typeface="Calibri" pitchFamily="34" charset="-120"/>
-              </a:rPr>
-              <a:t> − 499)·</a:t>
-            </a:r>
-            <a:pPr indent="0" marL="0">
-              <a:buNone/>
-            </a:pPr>
-            <a:r>
-              <a:rPr lang="en-US" sz="1400" i="1" dirty="0">
-                <a:solidFill>
-                  <a:srgbClr val="E8ECF2"/>
-                </a:solidFill>
-                <a:latin typeface="Calibri" pitchFamily="34" charset="0"/>
-                <a:ea typeface="Calibri" pitchFamily="34" charset="-122"/>
-                <a:cs typeface="Calibri" pitchFamily="34" charset="-120"/>
-              </a:rPr>
-              <a:t>n</a:t>
-            </a:r>
-            <a:pPr indent="0" marL="0">
-              <a:buNone/>
-            </a:pPr>
-            <a:r>
-              <a:rPr lang="en-US" sz="1400" dirty="0">
-                <a:solidFill>
-                  <a:srgbClr val="E8ECF2"/>
-                </a:solidFill>
-                <a:latin typeface="Calibri" pitchFamily="34" charset="0"/>
-                <a:ea typeface="Calibri" pitchFamily="34" charset="-122"/>
-                <a:cs typeface="Calibri" pitchFamily="34" charset="-120"/>
-              </a:rPr>
-              <a:t>, 79.4% of the square, yet the best known reaches 93.3%: only on the dense family does the staircase earn its keep.</a:t>
-            </a:r>
-            <a:endParaRPr lang="en-US" sz="1400" dirty="0"/>
+              <a:t>In the travelling-salesman setting 2-opt is cheap because exchanging two edges updates the objective in constant time. Here eliminating a vertex merges its surviving neighbours into a clique, so one change cascades: a move over a span of L positions costs O(L), however few edges it exchanges.</a:t>
+            </a:r>
+            <a:endParaRPr lang="en-US" sz="1300" dirty="0"/>
           </a:p>
         </p:txBody>
       </p:sp>
@@ -23033,8 +23064,8 @@
         </p:nvSpPr>
         <p:spPr>
           <a:xfrm>
-            <a:off x="640080" y="4553712"/>
-            <a:ext cx="5852160" cy="1280160"/>
+            <a:off x="6400800" y="1810512"/>
+            <a:ext cx="5150815" cy="365760"/>
           </a:xfrm>
           <a:prstGeom prst="rect">
             <a:avLst/>
@@ -23050,458 +23081,30 @@
               <a:buNone/>
             </a:pPr>
             <a:r>
-              <a:rPr lang="en-US" sz="1400" dirty="0">
-                <a:solidFill>
-                  <a:srgbClr val="9AA6B6"/>
-                </a:solidFill>
-                <a:latin typeface="Calibri" pitchFamily="34" charset="0"/>
-                <a:ea typeface="Calibri" pitchFamily="34" charset="-122"/>
-                <a:cs typeface="Calibri" pitchFamily="34" charset="-120"/>
-              </a:rPr>
-              <a:t>And the problem is hard twice over: choose which </a:t>
-            </a:r>
-            <a:pPr indent="0" marL="0">
-              <a:buNone/>
-            </a:pPr>
-            <a:r>
-              <a:rPr lang="en-US" sz="1400" i="1" dirty="0">
-                <a:solidFill>
-                  <a:srgbClr val="9AA6B6"/>
-                </a:solidFill>
-                <a:latin typeface="Calibri" pitchFamily="34" charset="0"/>
-                <a:ea typeface="Calibri" pitchFamily="34" charset="-122"/>
-                <a:cs typeface="Calibri" pitchFamily="34" charset="-120"/>
-              </a:rPr>
-              <a:t>t</a:t>
-            </a:r>
-            <a:pPr indent="0" marL="0">
-              <a:buNone/>
-            </a:pPr>
-            <a:r>
-              <a:rPr lang="en-US" sz="1400" dirty="0">
-                <a:solidFill>
-                  <a:srgbClr val="9AA6B6"/>
-                </a:solidFill>
-                <a:latin typeface="Calibri" pitchFamily="34" charset="0"/>
-                <a:ea typeface="Calibri" pitchFamily="34" charset="-122"/>
-                <a:cs typeface="Calibri" pitchFamily="34" charset="-120"/>
-              </a:rPr>
-              <a:t> vertices to give up (about 10⁴⁰³ subsets at </a:t>
-            </a:r>
-            <a:pPr indent="0" marL="0">
-              <a:buNone/>
-            </a:pPr>
-            <a:r>
-              <a:rPr lang="en-US" sz="1400" i="1" dirty="0">
-                <a:solidFill>
-                  <a:srgbClr val="9AA6B6"/>
-                </a:solidFill>
-                <a:latin typeface="Calibri" pitchFamily="34" charset="0"/>
-                <a:ea typeface="Calibri" pitchFamily="34" charset="-122"/>
-                <a:cs typeface="Calibri" pitchFamily="34" charset="-120"/>
-              </a:rPr>
-              <a:t>n</a:t>
-            </a:r>
-            <a:pPr indent="0" marL="0">
-              <a:buNone/>
-            </a:pPr>
-            <a:r>
-              <a:rPr lang="en-US" sz="1400" dirty="0">
-                <a:solidFill>
-                  <a:srgbClr val="9AA6B6"/>
-                </a:solidFill>
-                <a:latin typeface="Calibri" pitchFamily="34" charset="0"/>
-                <a:ea typeface="Calibri" pitchFamily="34" charset="-122"/>
-                <a:cs typeface="Calibri" pitchFamily="34" charset="-120"/>
-              </a:rPr>
-              <a:t> = 1,357, </a:t>
-            </a:r>
-            <a:pPr indent="0" marL="0">
-              <a:buNone/>
-            </a:pPr>
-            <a:r>
-              <a:rPr lang="en-US" sz="1400" i="1" dirty="0">
-                <a:solidFill>
-                  <a:srgbClr val="9AA6B6"/>
-                </a:solidFill>
-                <a:latin typeface="Calibri" pitchFamily="34" charset="0"/>
-                <a:ea typeface="Calibri" pitchFamily="34" charset="-122"/>
-                <a:cs typeface="Calibri" pitchFamily="34" charset="-120"/>
-              </a:rPr>
-              <a:t>t</a:t>
-            </a:r>
-            <a:pPr indent="0" marL="0">
-              <a:buNone/>
-            </a:pPr>
-            <a:r>
-              <a:rPr lang="en-US" sz="1400" dirty="0">
-                <a:solidFill>
-                  <a:srgbClr val="9AA6B6"/>
-                </a:solidFill>
-                <a:latin typeface="Calibri" pitchFamily="34" charset="0"/>
-                <a:ea typeface="Calibri" pitchFamily="34" charset="-122"/>
-                <a:cs typeface="Calibri" pitchFamily="34" charset="-120"/>
-              </a:rPr>
-              <a:t> = 600), then minimise the width of what is left, which is treewidth itself, NP-hard (Arnborg, Corneil and Proskurowski, 1987).</a:t>
-            </a:r>
-            <a:endParaRPr lang="en-US" sz="1400" dirty="0"/>
-          </a:p>
-        </p:txBody>
-      </p:sp>
-      <p:sp>
-        <p:nvSpPr>
-          <p:cNvPr id="7" name="Shape 5"/>
-          <p:cNvSpPr/>
-          <p:nvPr/>
-        </p:nvSpPr>
-        <p:spPr>
-          <a:xfrm>
-            <a:off x="6949440" y="2148840"/>
-            <a:ext cx="2194560" cy="2194560"/>
-          </a:xfrm>
-          <a:prstGeom prst="rect">
-            <a:avLst/>
-          </a:prstGeom>
-          <a:ln w="12700">
-            <a:solidFill>
-              <a:srgbClr val="9AA6B6"/>
-            </a:solidFill>
-            <a:prstDash val="solid"/>
-          </a:ln>
-        </p:spPr>
-      </p:sp>
-      <p:sp>
-        <p:nvSpPr>
-          <p:cNvPr id="8" name="Shape 6"/>
-          <p:cNvSpPr/>
-          <p:nvPr/>
-        </p:nvSpPr>
-        <p:spPr>
-          <a:xfrm>
-            <a:off x="6981784" y="2148840"/>
-            <a:ext cx="2162216" cy="2194560"/>
-          </a:xfrm>
-          <a:prstGeom prst="rect">
-            <a:avLst/>
-          </a:prstGeom>
-          <a:solidFill>
-            <a:srgbClr val="3DDC97">
-              <a:alpha val="30000"/>
-            </a:srgbClr>
-          </a:solidFill>
-          <a:ln/>
-        </p:spPr>
-      </p:sp>
-      <p:sp>
-        <p:nvSpPr>
-          <p:cNvPr id="9" name="Text 7"/>
-          <p:cNvSpPr txBox="1"/>
-          <p:nvPr/>
-        </p:nvSpPr>
-        <p:spPr>
-          <a:xfrm>
-            <a:off x="6949440" y="4453128"/>
-            <a:ext cx="2194560" cy="256032"/>
-          </a:xfrm>
-          <a:prstGeom prst="rect">
-            <a:avLst/>
-          </a:prstGeom>
-          <a:noFill/>
-          <a:ln/>
-        </p:spPr>
-        <p:txBody>
-          <a:bodyPr wrap="square" lIns="0" tIns="0" rIns="0" bIns="0" rtlCol="0" anchor="t"/>
-          <a:lstStyle/>
-          <a:p>
-            <a:pPr algn="ctr" indent="0" marL="0">
-              <a:buNone/>
-            </a:pPr>
-            <a:r>
-              <a:rPr lang="en-US" sz="1300" b="1" dirty="0">
+              <a:rPr lang="en-US" sz="1800" dirty="0">
                 <a:solidFill>
                   <a:srgbClr val="E8ECF2"/>
-                </a:solidFill>
-                <a:latin typeface="Calibri" pitchFamily="34" charset="0"/>
-                <a:ea typeface="Calibri" pitchFamily="34" charset="-122"/>
-                <a:cs typeface="Calibri" pitchFamily="34" charset="-120"/>
-              </a:rPr>
-              <a:t>small-graph</a:t>
-            </a:r>
-            <a:endParaRPr lang="en-US" sz="1300" dirty="0"/>
-          </a:p>
-        </p:txBody>
-      </p:sp>
-      <p:sp>
-        <p:nvSpPr>
-          <p:cNvPr id="10" name="Text 8"/>
-          <p:cNvSpPr txBox="1"/>
-          <p:nvPr/>
-        </p:nvSpPr>
-        <p:spPr>
-          <a:xfrm>
-            <a:off x="6949440" y="3017520"/>
-            <a:ext cx="2194560" cy="457200"/>
-          </a:xfrm>
-          <a:prstGeom prst="rect">
-            <a:avLst/>
-          </a:prstGeom>
-          <a:noFill/>
-          <a:ln/>
-        </p:spPr>
-        <p:txBody>
-          <a:bodyPr wrap="square" lIns="0" tIns="0" rIns="0" bIns="0" rtlCol="0" anchor="t"/>
-          <a:lstStyle/>
-          <a:p>
-            <a:pPr algn="ctr" indent="0" marL="0">
-              <a:buNone/>
-            </a:pPr>
-            <a:r>
-              <a:rPr lang="en-US" sz="2400" dirty="0">
-                <a:solidFill>
-                  <a:srgbClr val="FFFFFF"/>
                 </a:solidFill>
                 <a:latin typeface="Century Schoolbook" pitchFamily="34" charset="0"/>
                 <a:ea typeface="Century Schoolbook" pitchFamily="34" charset="-122"/>
                 <a:cs typeface="Century Schoolbook" pitchFamily="34" charset="-120"/>
               </a:rPr>
-              <a:t>98.5%</a:t>
-            </a:r>
-            <a:endParaRPr lang="en-US" sz="2400" dirty="0"/>
+              <a:t>A delta evaluator, from one structural fact</a:t>
+            </a:r>
+            <a:endParaRPr lang="en-US" sz="1800" dirty="0"/>
           </a:p>
         </p:txBody>
       </p:sp>
       <p:sp>
         <p:nvSpPr>
-          <p:cNvPr id="11" name="Text 9"/>
+          <p:cNvPr id="7" name="Text 5"/>
           <p:cNvSpPr txBox="1"/>
           <p:nvPr/>
         </p:nvSpPr>
         <p:spPr>
           <a:xfrm>
-            <a:off x="6858000" y="4727448"/>
-            <a:ext cx="2377440" cy="219456"/>
-          </a:xfrm>
-          <a:prstGeom prst="rect">
-            <a:avLst/>
-          </a:prstGeom>
-          <a:noFill/>
-          <a:ln/>
-        </p:spPr>
-        <p:txBody>
-          <a:bodyPr wrap="square" lIns="0" tIns="0" rIns="0" bIns="0" rtlCol="0" anchor="t"/>
-          <a:lstStyle/>
-          <a:p>
-            <a:pPr algn="ctr" indent="0" marL="0">
-              <a:buNone/>
-            </a:pPr>
-            <a:r>
-              <a:rPr lang="en-US" sz="1050" dirty="0">
-                <a:solidFill>
-                  <a:srgbClr val="9AA6B6"/>
-                </a:solidFill>
-                <a:latin typeface="Calibri" pitchFamily="34" charset="0"/>
-                <a:ea typeface="Calibri" pitchFamily="34" charset="-122"/>
-                <a:cs typeface="Calibri" pitchFamily="34" charset="-120"/>
-              </a:rPr>
-              <a:t>w = 20 of n = 1,357 · 99.99% of its score</a:t>
-            </a:r>
-            <a:endParaRPr lang="en-US" sz="1050" dirty="0"/>
-          </a:p>
-        </p:txBody>
-      </p:sp>
-      <p:sp>
-        <p:nvSpPr>
-          <p:cNvPr id="12" name="Shape 10"/>
-          <p:cNvSpPr/>
-          <p:nvPr/>
-        </p:nvSpPr>
-        <p:spPr>
-          <a:xfrm>
-            <a:off x="9372600" y="2148840"/>
-            <a:ext cx="2194560" cy="2194560"/>
-          </a:xfrm>
-          <a:prstGeom prst="rect">
-            <a:avLst/>
-          </a:prstGeom>
-          <a:ln w="12700">
-            <a:solidFill>
-              <a:srgbClr val="9AA6B6"/>
-            </a:solidFill>
-            <a:prstDash val="solid"/>
-          </a:ln>
-        </p:spPr>
-      </p:sp>
-      <p:sp>
-        <p:nvSpPr>
-          <p:cNvPr id="13" name="Shape 11"/>
-          <p:cNvSpPr/>
-          <p:nvPr/>
-        </p:nvSpPr>
-        <p:spPr>
-          <a:xfrm>
-            <a:off x="9823995" y="2148840"/>
-            <a:ext cx="1743165" cy="2194560"/>
-          </a:xfrm>
-          <a:prstGeom prst="rect">
-            <a:avLst/>
-          </a:prstGeom>
-          <a:solidFill>
-            <a:srgbClr val="3DDC97">
-              <a:alpha val="30000"/>
-            </a:srgbClr>
-          </a:solidFill>
-          <a:ln/>
-        </p:spPr>
-      </p:sp>
-      <p:sp>
-        <p:nvSpPr>
-          <p:cNvPr id="14" name="Text 12"/>
-          <p:cNvSpPr txBox="1"/>
-          <p:nvPr/>
-        </p:nvSpPr>
-        <p:spPr>
-          <a:xfrm>
-            <a:off x="9372600" y="4453128"/>
-            <a:ext cx="2194560" cy="256032"/>
-          </a:xfrm>
-          <a:prstGeom prst="rect">
-            <a:avLst/>
-          </a:prstGeom>
-          <a:noFill/>
-          <a:ln/>
-        </p:spPr>
-        <p:txBody>
-          <a:bodyPr wrap="square" lIns="0" tIns="0" rIns="0" bIns="0" rtlCol="0" anchor="t"/>
-          <a:lstStyle/>
-          <a:p>
-            <a:pPr algn="ctr" indent="0" marL="0">
-              <a:buNone/>
-            </a:pPr>
-            <a:r>
-              <a:rPr lang="en-US" sz="1300" b="1" dirty="0">
-                <a:solidFill>
-                  <a:srgbClr val="E8ECF2"/>
-                </a:solidFill>
-                <a:latin typeface="Calibri" pitchFamily="34" charset="0"/>
-                <a:ea typeface="Calibri" pitchFamily="34" charset="-122"/>
-                <a:cs typeface="Calibri" pitchFamily="34" charset="-120"/>
-              </a:rPr>
-              <a:t>large-graph</a:t>
-            </a:r>
-            <a:endParaRPr lang="en-US" sz="1300" dirty="0"/>
-          </a:p>
-        </p:txBody>
-      </p:sp>
-      <p:sp>
-        <p:nvSpPr>
-          <p:cNvPr id="15" name="Text 13"/>
-          <p:cNvSpPr txBox="1"/>
-          <p:nvPr/>
-        </p:nvSpPr>
-        <p:spPr>
-          <a:xfrm>
-            <a:off x="9372600" y="3017520"/>
-            <a:ext cx="2194560" cy="457200"/>
-          </a:xfrm>
-          <a:prstGeom prst="rect">
-            <a:avLst/>
-          </a:prstGeom>
-          <a:noFill/>
-          <a:ln/>
-        </p:spPr>
-        <p:txBody>
-          <a:bodyPr wrap="square" lIns="0" tIns="0" rIns="0" bIns="0" rtlCol="0" anchor="t"/>
-          <a:lstStyle/>
-          <a:p>
-            <a:pPr algn="ctr" indent="0" marL="0">
-              <a:buNone/>
-            </a:pPr>
-            <a:r>
-              <a:rPr lang="en-US" sz="2400" dirty="0">
-                <a:solidFill>
-                  <a:srgbClr val="FFFFFF"/>
-                </a:solidFill>
-                <a:latin typeface="Century Schoolbook" pitchFamily="34" charset="0"/>
-                <a:ea typeface="Century Schoolbook" pitchFamily="34" charset="-122"/>
-                <a:cs typeface="Century Schoolbook" pitchFamily="34" charset="-120"/>
-              </a:rPr>
-              <a:t>79.4%</a:t>
-            </a:r>
-            <a:endParaRPr lang="en-US" sz="2400" dirty="0"/>
-          </a:p>
-        </p:txBody>
-      </p:sp>
-      <p:sp>
-        <p:nvSpPr>
-          <p:cNvPr id="16" name="Text 14"/>
-          <p:cNvSpPr txBox="1"/>
-          <p:nvPr/>
-        </p:nvSpPr>
-        <p:spPr>
-          <a:xfrm>
-            <a:off x="9281160" y="4727448"/>
-            <a:ext cx="2377440" cy="219456"/>
-          </a:xfrm>
-          <a:prstGeom prst="rect">
-            <a:avLst/>
-          </a:prstGeom>
-          <a:noFill/>
-          <a:ln/>
-        </p:spPr>
-        <p:txBody>
-          <a:bodyPr wrap="square" lIns="0" tIns="0" rIns="0" bIns="0" rtlCol="0" anchor="t"/>
-          <a:lstStyle/>
-          <a:p>
-            <a:pPr algn="ctr" indent="0" marL="0">
-              <a:buNone/>
-            </a:pPr>
-            <a:r>
-              <a:rPr lang="en-US" sz="1050" dirty="0">
-                <a:solidFill>
-                  <a:srgbClr val="9AA6B6"/>
-                </a:solidFill>
-                <a:latin typeface="Calibri" pitchFamily="34" charset="0"/>
-                <a:ea typeface="Calibri" pitchFamily="34" charset="-122"/>
-                <a:cs typeface="Calibri" pitchFamily="34" charset="-120"/>
-              </a:rPr>
-              <a:t>w ≥ 499 of n = 2,426 · best known 93.3%</a:t>
-            </a:r>
-            <a:endParaRPr lang="en-US" sz="1050" dirty="0"/>
-          </a:p>
-        </p:txBody>
-      </p:sp>
-      <p:sp>
-        <p:nvSpPr>
-          <p:cNvPr id="17" name="Shape 15"/>
-          <p:cNvSpPr/>
-          <p:nvPr/>
-        </p:nvSpPr>
-        <p:spPr>
-          <a:xfrm>
-            <a:off x="6949440" y="5257800"/>
-            <a:ext cx="228600" cy="128016"/>
-          </a:xfrm>
-          <a:prstGeom prst="rect">
-            <a:avLst/>
-          </a:prstGeom>
-          <a:solidFill>
-            <a:srgbClr val="3DDC97">
-              <a:alpha val="30000"/>
-            </a:srgbClr>
-          </a:solidFill>
-          <a:ln/>
-        </p:spPr>
-      </p:sp>
-      <p:sp>
-        <p:nvSpPr>
-          <p:cNvPr id="18" name="Text 16"/>
-          <p:cNvSpPr txBox="1"/>
-          <p:nvPr/>
-        </p:nvSpPr>
-        <p:spPr>
-          <a:xfrm>
-            <a:off x="7251192" y="5202936"/>
-            <a:ext cx="2194560" cy="228600"/>
+            <a:off x="6400800" y="2240280"/>
+            <a:ext cx="5150815" cy="1280160"/>
           </a:xfrm>
           <a:prstGeom prst="rect">
             <a:avLst/>
@@ -23517,17 +23120,232 @@
               <a:buNone/>
             </a:pPr>
             <a:r>
-              <a:rPr lang="en-US" sz="1050" dirty="0">
-                <a:solidFill>
-                  <a:srgbClr val="9AA6B6"/>
+              <a:rPr lang="en-US" sz="1300" dirty="0">
+                <a:solidFill>
+                  <a:srgbClr val="E8ECF2"/>
                 </a:solidFill>
                 <a:latin typeface="Calibri" pitchFamily="34" charset="0"/>
                 <a:ea typeface="Calibri" pitchFamily="34" charset="-122"/>
                 <a:cs typeface="Calibri" pitchFamily="34" charset="-120"/>
               </a:rPr>
-              <a:t>one point at t = 0</a:t>
-            </a:r>
-            <a:endParaRPr lang="en-US" sz="1050" dirty="0"/>
+              <a:t>The torso over a set does not depend on the order within the set, so the degree at a position depends only on the vertex there and the set below it. A move inside a window cannot change anything outside it.</a:t>
+            </a:r>
+            <a:endParaRPr lang="en-US" sz="1300" dirty="0"/>
+          </a:p>
+        </p:txBody>
+      </p:sp>
+      <p:sp>
+        <p:nvSpPr>
+          <p:cNvPr id="8" name="Text 6"/>
+          <p:cNvSpPr txBox="1"/>
+          <p:nvPr/>
+        </p:nvSpPr>
+        <p:spPr>
+          <a:xfrm>
+            <a:off x="6400800" y="3611880"/>
+            <a:ext cx="2468880" cy="548640"/>
+          </a:xfrm>
+          <a:prstGeom prst="rect">
+            <a:avLst/>
+          </a:prstGeom>
+          <a:noFill/>
+          <a:ln/>
+        </p:spPr>
+        <p:txBody>
+          <a:bodyPr wrap="square" lIns="0" tIns="0" rIns="0" bIns="0" rtlCol="0" anchor="t"/>
+          <a:lstStyle/>
+          <a:p>
+            <a:pPr indent="0" marL="0">
+              <a:buNone/>
+            </a:pPr>
+            <a:r>
+              <a:rPr lang="en-US" sz="2600" dirty="0">
+                <a:solidFill>
+                  <a:srgbClr val="4DA3FF"/>
+                </a:solidFill>
+                <a:latin typeface="Century Schoolbook" pitchFamily="34" charset="0"/>
+                <a:ea typeface="Century Schoolbook" pitchFamily="34" charset="-122"/>
+                <a:cs typeface="Century Schoolbook" pitchFamily="34" charset="-120"/>
+              </a:rPr>
+              <a:t>exact</a:t>
+            </a:r>
+            <a:endParaRPr lang="en-US" sz="2600" dirty="0"/>
+          </a:p>
+        </p:txBody>
+      </p:sp>
+      <p:sp>
+        <p:nvSpPr>
+          <p:cNvPr id="9" name="Text 7"/>
+          <p:cNvSpPr txBox="1"/>
+          <p:nvPr/>
+        </p:nvSpPr>
+        <p:spPr>
+          <a:xfrm>
+            <a:off x="6400800" y="4160520"/>
+            <a:ext cx="2423160" cy="731520"/>
+          </a:xfrm>
+          <a:prstGeom prst="rect">
+            <a:avLst/>
+          </a:prstGeom>
+          <a:noFill/>
+          <a:ln/>
+        </p:spPr>
+        <p:txBody>
+          <a:bodyPr wrap="square" lIns="0" tIns="0" rIns="0" bIns="0" rtlCol="0" anchor="t"/>
+          <a:lstStyle/>
+          <a:p>
+            <a:pPr indent="0" marL="0">
+              <a:buNone/>
+            </a:pPr>
+            <a:r>
+              <a:rPr lang="en-US" sz="1150" dirty="0">
+                <a:solidFill>
+                  <a:srgbClr val="9AA6B6"/>
+                </a:solidFill>
+                <a:latin typeface="Calibri" pitchFamily="34" charset="0"/>
+                <a:ea typeface="Calibri" pitchFamily="34" charset="-122"/>
+                <a:cs typeface="Calibri" pitchFamily="34" charset="-120"/>
+              </a:rPr>
+              <a:t>identical step degrees on 600 chained candidates from all 17 operators, all ten instances</a:t>
+            </a:r>
+            <a:endParaRPr lang="en-US" sz="1150" dirty="0"/>
+          </a:p>
+        </p:txBody>
+      </p:sp>
+      <p:sp>
+        <p:nvSpPr>
+          <p:cNvPr id="10" name="Text 8"/>
+          <p:cNvSpPr txBox="1"/>
+          <p:nvPr/>
+        </p:nvSpPr>
+        <p:spPr>
+          <a:xfrm>
+            <a:off x="9006840" y="3611880"/>
+            <a:ext cx="2468880" cy="548640"/>
+          </a:xfrm>
+          <a:prstGeom prst="rect">
+            <a:avLst/>
+          </a:prstGeom>
+          <a:noFill/>
+          <a:ln/>
+        </p:spPr>
+        <p:txBody>
+          <a:bodyPr wrap="square" lIns="0" tIns="0" rIns="0" bIns="0" rtlCol="0" anchor="t"/>
+          <a:lstStyle/>
+          <a:p>
+            <a:pPr indent="0" marL="0">
+              <a:buNone/>
+            </a:pPr>
+            <a:r>
+              <a:rPr lang="en-US" sz="2600" dirty="0">
+                <a:solidFill>
+                  <a:srgbClr val="4DA3FF"/>
+                </a:solidFill>
+                <a:latin typeface="Century Schoolbook" pitchFamily="34" charset="0"/>
+                <a:ea typeface="Century Schoolbook" pitchFamily="34" charset="-122"/>
+                <a:cs typeface="Century Schoolbook" pitchFamily="34" charset="-120"/>
+              </a:rPr>
+              <a:t>1.81×</a:t>
+            </a:r>
+            <a:endParaRPr lang="en-US" sz="2600" dirty="0"/>
+          </a:p>
+        </p:txBody>
+      </p:sp>
+      <p:sp>
+        <p:nvSpPr>
+          <p:cNvPr id="11" name="Text 9"/>
+          <p:cNvSpPr txBox="1"/>
+          <p:nvPr/>
+        </p:nvSpPr>
+        <p:spPr>
+          <a:xfrm>
+            <a:off x="9006840" y="4160520"/>
+            <a:ext cx="2423160" cy="731520"/>
+          </a:xfrm>
+          <a:prstGeom prst="rect">
+            <a:avLst/>
+          </a:prstGeom>
+          <a:noFill/>
+          <a:ln/>
+        </p:spPr>
+        <p:txBody>
+          <a:bodyPr wrap="square" lIns="0" tIns="0" rIns="0" bIns="0" rtlCol="0" anchor="t"/>
+          <a:lstStyle/>
+          <a:p>
+            <a:pPr indent="0" marL="0">
+              <a:buNone/>
+            </a:pPr>
+            <a:r>
+              <a:rPr lang="en-US" sz="1150" dirty="0">
+                <a:solidFill>
+                  <a:srgbClr val="9AA6B6"/>
+                </a:solidFill>
+                <a:latin typeface="Calibri" pitchFamily="34" charset="0"/>
+                <a:ea typeface="Calibri" pitchFamily="34" charset="-122"/>
+                <a:cs typeface="Calibri" pitchFamily="34" charset="-120"/>
+              </a:rPr>
+              <a:t>more candidates in the same wall-clock, geometric mean over ten instances (1.7× sparse to 1.9× dense)</a:t>
+            </a:r>
+            <a:endParaRPr lang="en-US" sz="1150" dirty="0"/>
+          </a:p>
+        </p:txBody>
+      </p:sp>
+      <p:sp>
+        <p:nvSpPr>
+          <p:cNvPr id="12" name="Shape 10"/>
+          <p:cNvSpPr/>
+          <p:nvPr/>
+        </p:nvSpPr>
+        <p:spPr>
+          <a:xfrm>
+            <a:off x="640080" y="5074920"/>
+            <a:ext cx="10911535" cy="1051560"/>
+          </a:xfrm>
+          <a:prstGeom prst="rect">
+            <a:avLst/>
+          </a:prstGeom>
+          <a:solidFill>
+            <a:srgbClr val="131B28"/>
+          </a:solidFill>
+          <a:ln/>
+        </p:spPr>
+      </p:sp>
+      <p:sp>
+        <p:nvSpPr>
+          <p:cNvPr id="13" name="Text 11"/>
+          <p:cNvSpPr txBox="1"/>
+          <p:nvPr/>
+        </p:nvSpPr>
+        <p:spPr>
+          <a:xfrm>
+            <a:off x="914400" y="5193792"/>
+            <a:ext cx="10362895" cy="868680"/>
+          </a:xfrm>
+          <a:prstGeom prst="rect">
+            <a:avLst/>
+          </a:prstGeom>
+          <a:noFill/>
+          <a:ln/>
+        </p:spPr>
+        <p:txBody>
+          <a:bodyPr wrap="square" lIns="0" tIns="0" rIns="0" bIns="0" rtlCol="0" anchor="ctr"/>
+          <a:lstStyle/>
+          <a:p>
+            <a:pPr indent="0" marL="0">
+              <a:buNone/>
+            </a:pPr>
+            <a:r>
+              <a:rPr lang="en-US" sz="1300" dirty="0">
+                <a:solidFill>
+                  <a:srgbClr val="E8ECF2"/>
+                </a:solidFill>
+                <a:latin typeface="Calibri" pitchFamily="34" charset="0"/>
+                <a:ea typeface="Calibri" pitchFamily="34" charset="-122"/>
+                <a:cs typeface="Calibri" pitchFamily="34" charset="-120"/>
+              </a:rPr>
+              <a:t>Why accepted moves barely matter: every evaluated candidate donates its whole staircase to a shared front. On synth-7 the four original operators accepted nothing at all, and their scores still differ by 1,841 HV.</a:t>
+            </a:r>
+            <a:endParaRPr lang="en-US" sz="1300" dirty="0"/>
           </a:p>
         </p:txBody>
       </p:sp>
@@ -24920,7 +24738,7 @@
 </file>
 
 <file path=ppt/slides/slide20.xml><?xml version="1.0" encoding="utf-8"?>
-<p:sld xmlns:a="http://schemas.openxmlformats.org/drawingml/2006/main" xmlns:r="http://schemas.openxmlformats.org/officeDocument/2006/relationships" xmlns:p="http://schemas.openxmlformats.org/presentationml/2006/main">
+<p:sld xmlns:a="http://schemas.openxmlformats.org/drawingml/2006/main" xmlns:r="http://schemas.openxmlformats.org/officeDocument/2006/relationships" xmlns:p="http://schemas.openxmlformats.org/presentationml/2006/main" show="0">
   <p:cSld name="Slide 20">
     <p:spTree>
       <p:nvGrpSpPr>
@@ -25012,541 +24830,15 @@
                 <a:ea typeface="Century Schoolbook" pitchFamily="34" charset="-122"/>
                 <a:cs typeface="Century Schoolbook" pitchFamily="34" charset="-120"/>
               </a:rPr>
-              <a:t>Two findings about the problem, not the search</a:t>
+              <a:t>The budget sweep, in full</a:t>
             </a:r>
             <a:endParaRPr lang="en-US" sz="2700" dirty="0"/>
           </a:p>
         </p:txBody>
       </p:sp>
-      <p:sp>
-        <p:nvSpPr>
-          <p:cNvPr id="4" name="Text 2"/>
-          <p:cNvSpPr txBox="1"/>
-          <p:nvPr/>
-        </p:nvSpPr>
-        <p:spPr>
-          <a:xfrm>
-            <a:off x="640080" y="1810512"/>
-            <a:ext cx="5212080" cy="365760"/>
-          </a:xfrm>
-          <a:prstGeom prst="rect">
-            <a:avLst/>
-          </a:prstGeom>
-          <a:noFill/>
-          <a:ln/>
-        </p:spPr>
-        <p:txBody>
-          <a:bodyPr wrap="square" lIns="0" tIns="0" rIns="0" bIns="0" rtlCol="0" anchor="t"/>
-          <a:lstStyle/>
-          <a:p>
-            <a:pPr indent="0" marL="0">
-              <a:buNone/>
-            </a:pPr>
-            <a:r>
-              <a:rPr lang="en-US" sz="1800" dirty="0">
-                <a:solidFill>
-                  <a:srgbClr val="E8ECF2"/>
-                </a:solidFill>
-                <a:latin typeface="Century Schoolbook" pitchFamily="34" charset="0"/>
-                <a:ea typeface="Century Schoolbook" pitchFamily="34" charset="-122"/>
-                <a:cs typeface="Century Schoolbook" pitchFamily="34" charset="-120"/>
-              </a:rPr>
-              <a:t>Plain k-opt does not transfer</a:t>
-            </a:r>
-            <a:endParaRPr lang="en-US" sz="1800" dirty="0"/>
-          </a:p>
-        </p:txBody>
-      </p:sp>
-      <p:sp>
-        <p:nvSpPr>
-          <p:cNvPr id="5" name="Text 3"/>
-          <p:cNvSpPr txBox="1"/>
-          <p:nvPr/>
-        </p:nvSpPr>
-        <p:spPr>
-          <a:xfrm>
-            <a:off x="640080" y="2240280"/>
-            <a:ext cx="5212080" cy="1828800"/>
-          </a:xfrm>
-          <a:prstGeom prst="rect">
-            <a:avLst/>
-          </a:prstGeom>
-          <a:noFill/>
-          <a:ln/>
-        </p:spPr>
-        <p:txBody>
-          <a:bodyPr wrap="square" lIns="0" tIns="0" rIns="0" bIns="0" rtlCol="0" anchor="t"/>
-          <a:lstStyle/>
-          <a:p>
-            <a:pPr indent="0" marL="0">
-              <a:buNone/>
-            </a:pPr>
-            <a:r>
-              <a:rPr lang="en-US" sz="1300" dirty="0">
-                <a:solidFill>
-                  <a:srgbClr val="E8ECF2"/>
-                </a:solidFill>
-                <a:latin typeface="Calibri" pitchFamily="34" charset="0"/>
-                <a:ea typeface="Calibri" pitchFamily="34" charset="-122"/>
-                <a:cs typeface="Calibri" pitchFamily="34" charset="-120"/>
-              </a:rPr>
-              <a:t>In the travelling-salesman setting 2-opt is cheap because exchanging two edges updates the objective in constant time. Here eliminating a vertex merges its surviving neighbours into a clique, so one change cascades: a move over a span of L positions costs O(L), however few edges it exchanges.</a:t>
-            </a:r>
-            <a:endParaRPr lang="en-US" sz="1300" dirty="0"/>
-          </a:p>
-        </p:txBody>
-      </p:sp>
-      <p:sp>
-        <p:nvSpPr>
-          <p:cNvPr id="6" name="Text 4"/>
-          <p:cNvSpPr txBox="1"/>
-          <p:nvPr/>
-        </p:nvSpPr>
-        <p:spPr>
-          <a:xfrm>
-            <a:off x="6400800" y="1810512"/>
-            <a:ext cx="5150815" cy="365760"/>
-          </a:xfrm>
-          <a:prstGeom prst="rect">
-            <a:avLst/>
-          </a:prstGeom>
-          <a:noFill/>
-          <a:ln/>
-        </p:spPr>
-        <p:txBody>
-          <a:bodyPr wrap="square" lIns="0" tIns="0" rIns="0" bIns="0" rtlCol="0" anchor="t"/>
-          <a:lstStyle/>
-          <a:p>
-            <a:pPr indent="0" marL="0">
-              <a:buNone/>
-            </a:pPr>
-            <a:r>
-              <a:rPr lang="en-US" sz="1800" dirty="0">
-                <a:solidFill>
-                  <a:srgbClr val="E8ECF2"/>
-                </a:solidFill>
-                <a:latin typeface="Century Schoolbook" pitchFamily="34" charset="0"/>
-                <a:ea typeface="Century Schoolbook" pitchFamily="34" charset="-122"/>
-                <a:cs typeface="Century Schoolbook" pitchFamily="34" charset="-120"/>
-              </a:rPr>
-              <a:t>A delta evaluator, from one structural fact</a:t>
-            </a:r>
-            <a:endParaRPr lang="en-US" sz="1800" dirty="0"/>
-          </a:p>
-        </p:txBody>
-      </p:sp>
-      <p:sp>
-        <p:nvSpPr>
-          <p:cNvPr id="7" name="Text 5"/>
-          <p:cNvSpPr txBox="1"/>
-          <p:nvPr/>
-        </p:nvSpPr>
-        <p:spPr>
-          <a:xfrm>
-            <a:off x="6400800" y="2240280"/>
-            <a:ext cx="5150815" cy="1280160"/>
-          </a:xfrm>
-          <a:prstGeom prst="rect">
-            <a:avLst/>
-          </a:prstGeom>
-          <a:noFill/>
-          <a:ln/>
-        </p:spPr>
-        <p:txBody>
-          <a:bodyPr wrap="square" lIns="0" tIns="0" rIns="0" bIns="0" rtlCol="0" anchor="t"/>
-          <a:lstStyle/>
-          <a:p>
-            <a:pPr indent="0" marL="0">
-              <a:buNone/>
-            </a:pPr>
-            <a:r>
-              <a:rPr lang="en-US" sz="1300" dirty="0">
-                <a:solidFill>
-                  <a:srgbClr val="E8ECF2"/>
-                </a:solidFill>
-                <a:latin typeface="Calibri" pitchFamily="34" charset="0"/>
-                <a:ea typeface="Calibri" pitchFamily="34" charset="-122"/>
-                <a:cs typeface="Calibri" pitchFamily="34" charset="-120"/>
-              </a:rPr>
-              <a:t>The torso over a set does not depend on the order within the set, so the degree at a position depends only on the vertex there and the set below it. A move inside a window cannot change anything outside it.</a:t>
-            </a:r>
-            <a:endParaRPr lang="en-US" sz="1300" dirty="0"/>
-          </a:p>
-        </p:txBody>
-      </p:sp>
-      <p:sp>
-        <p:nvSpPr>
-          <p:cNvPr id="8" name="Text 6"/>
-          <p:cNvSpPr txBox="1"/>
-          <p:nvPr/>
-        </p:nvSpPr>
-        <p:spPr>
-          <a:xfrm>
-            <a:off x="6400800" y="3611880"/>
-            <a:ext cx="2468880" cy="548640"/>
-          </a:xfrm>
-          <a:prstGeom prst="rect">
-            <a:avLst/>
-          </a:prstGeom>
-          <a:noFill/>
-          <a:ln/>
-        </p:spPr>
-        <p:txBody>
-          <a:bodyPr wrap="square" lIns="0" tIns="0" rIns="0" bIns="0" rtlCol="0" anchor="t"/>
-          <a:lstStyle/>
-          <a:p>
-            <a:pPr indent="0" marL="0">
-              <a:buNone/>
-            </a:pPr>
-            <a:r>
-              <a:rPr lang="en-US" sz="2600" dirty="0">
-                <a:solidFill>
-                  <a:srgbClr val="4DA3FF"/>
-                </a:solidFill>
-                <a:latin typeface="Century Schoolbook" pitchFamily="34" charset="0"/>
-                <a:ea typeface="Century Schoolbook" pitchFamily="34" charset="-122"/>
-                <a:cs typeface="Century Schoolbook" pitchFamily="34" charset="-120"/>
-              </a:rPr>
-              <a:t>exact</a:t>
-            </a:r>
-            <a:endParaRPr lang="en-US" sz="2600" dirty="0"/>
-          </a:p>
-        </p:txBody>
-      </p:sp>
-      <p:sp>
-        <p:nvSpPr>
-          <p:cNvPr id="9" name="Text 7"/>
-          <p:cNvSpPr txBox="1"/>
-          <p:nvPr/>
-        </p:nvSpPr>
-        <p:spPr>
-          <a:xfrm>
-            <a:off x="6400800" y="4160520"/>
-            <a:ext cx="2423160" cy="731520"/>
-          </a:xfrm>
-          <a:prstGeom prst="rect">
-            <a:avLst/>
-          </a:prstGeom>
-          <a:noFill/>
-          <a:ln/>
-        </p:spPr>
-        <p:txBody>
-          <a:bodyPr wrap="square" lIns="0" tIns="0" rIns="0" bIns="0" rtlCol="0" anchor="t"/>
-          <a:lstStyle/>
-          <a:p>
-            <a:pPr indent="0" marL="0">
-              <a:buNone/>
-            </a:pPr>
-            <a:r>
-              <a:rPr lang="en-US" sz="1150" dirty="0">
-                <a:solidFill>
-                  <a:srgbClr val="9AA6B6"/>
-                </a:solidFill>
-                <a:latin typeface="Calibri" pitchFamily="34" charset="0"/>
-                <a:ea typeface="Calibri" pitchFamily="34" charset="-122"/>
-                <a:cs typeface="Calibri" pitchFamily="34" charset="-120"/>
-              </a:rPr>
-              <a:t>identical step degrees on 600 chained candidates from all 17 operators, all ten instances</a:t>
-            </a:r>
-            <a:endParaRPr lang="en-US" sz="1150" dirty="0"/>
-          </a:p>
-        </p:txBody>
-      </p:sp>
-      <p:sp>
-        <p:nvSpPr>
-          <p:cNvPr id="10" name="Text 8"/>
-          <p:cNvSpPr txBox="1"/>
-          <p:nvPr/>
-        </p:nvSpPr>
-        <p:spPr>
-          <a:xfrm>
-            <a:off x="9006840" y="3611880"/>
-            <a:ext cx="2468880" cy="548640"/>
-          </a:xfrm>
-          <a:prstGeom prst="rect">
-            <a:avLst/>
-          </a:prstGeom>
-          <a:noFill/>
-          <a:ln/>
-        </p:spPr>
-        <p:txBody>
-          <a:bodyPr wrap="square" lIns="0" tIns="0" rIns="0" bIns="0" rtlCol="0" anchor="t"/>
-          <a:lstStyle/>
-          <a:p>
-            <a:pPr indent="0" marL="0">
-              <a:buNone/>
-            </a:pPr>
-            <a:r>
-              <a:rPr lang="en-US" sz="2600" dirty="0">
-                <a:solidFill>
-                  <a:srgbClr val="4DA3FF"/>
-                </a:solidFill>
-                <a:latin typeface="Century Schoolbook" pitchFamily="34" charset="0"/>
-                <a:ea typeface="Century Schoolbook" pitchFamily="34" charset="-122"/>
-                <a:cs typeface="Century Schoolbook" pitchFamily="34" charset="-120"/>
-              </a:rPr>
-              <a:t>1.81×</a:t>
-            </a:r>
-            <a:endParaRPr lang="en-US" sz="2600" dirty="0"/>
-          </a:p>
-        </p:txBody>
-      </p:sp>
-      <p:sp>
-        <p:nvSpPr>
-          <p:cNvPr id="11" name="Text 9"/>
-          <p:cNvSpPr txBox="1"/>
-          <p:nvPr/>
-        </p:nvSpPr>
-        <p:spPr>
-          <a:xfrm>
-            <a:off x="9006840" y="4160520"/>
-            <a:ext cx="2423160" cy="731520"/>
-          </a:xfrm>
-          <a:prstGeom prst="rect">
-            <a:avLst/>
-          </a:prstGeom>
-          <a:noFill/>
-          <a:ln/>
-        </p:spPr>
-        <p:txBody>
-          <a:bodyPr wrap="square" lIns="0" tIns="0" rIns="0" bIns="0" rtlCol="0" anchor="t"/>
-          <a:lstStyle/>
-          <a:p>
-            <a:pPr indent="0" marL="0">
-              <a:buNone/>
-            </a:pPr>
-            <a:r>
-              <a:rPr lang="en-US" sz="1150" dirty="0">
-                <a:solidFill>
-                  <a:srgbClr val="9AA6B6"/>
-                </a:solidFill>
-                <a:latin typeface="Calibri" pitchFamily="34" charset="0"/>
-                <a:ea typeface="Calibri" pitchFamily="34" charset="-122"/>
-                <a:cs typeface="Calibri" pitchFamily="34" charset="-120"/>
-              </a:rPr>
-              <a:t>more candidates in the same wall-clock, geometric mean over ten instances (1.7× sparse to 1.9× dense)</a:t>
-            </a:r>
-            <a:endParaRPr lang="en-US" sz="1150" dirty="0"/>
-          </a:p>
-        </p:txBody>
-      </p:sp>
-      <p:sp>
-        <p:nvSpPr>
-          <p:cNvPr id="12" name="Shape 10"/>
-          <p:cNvSpPr/>
-          <p:nvPr/>
-        </p:nvSpPr>
-        <p:spPr>
-          <a:xfrm>
-            <a:off x="640080" y="5074920"/>
-            <a:ext cx="10911535" cy="1051560"/>
-          </a:xfrm>
-          <a:prstGeom prst="rect">
-            <a:avLst/>
-          </a:prstGeom>
-          <a:solidFill>
-            <a:srgbClr val="131B28"/>
-          </a:solidFill>
-          <a:ln/>
-        </p:spPr>
-      </p:sp>
-      <p:sp>
-        <p:nvSpPr>
-          <p:cNvPr id="13" name="Text 11"/>
-          <p:cNvSpPr txBox="1"/>
-          <p:nvPr/>
-        </p:nvSpPr>
-        <p:spPr>
-          <a:xfrm>
-            <a:off x="914400" y="5193792"/>
-            <a:ext cx="10362895" cy="868680"/>
-          </a:xfrm>
-          <a:prstGeom prst="rect">
-            <a:avLst/>
-          </a:prstGeom>
-          <a:noFill/>
-          <a:ln/>
-        </p:spPr>
-        <p:txBody>
-          <a:bodyPr wrap="square" lIns="0" tIns="0" rIns="0" bIns="0" rtlCol="0" anchor="ctr"/>
-          <a:lstStyle/>
-          <a:p>
-            <a:pPr indent="0" marL="0">
-              <a:buNone/>
-            </a:pPr>
-            <a:r>
-              <a:rPr lang="en-US" sz="1300" dirty="0">
-                <a:solidFill>
-                  <a:srgbClr val="E8ECF2"/>
-                </a:solidFill>
-                <a:latin typeface="Calibri" pitchFamily="34" charset="0"/>
-                <a:ea typeface="Calibri" pitchFamily="34" charset="-122"/>
-                <a:cs typeface="Calibri" pitchFamily="34" charset="-120"/>
-              </a:rPr>
-              <a:t>Why accepted moves barely matter: every evaluated candidate donates its whole staircase to a shared front. On synth-7 the four original operators accepted nothing at all, and their scores still differ by 1,841 HV.</a:t>
-            </a:r>
-            <a:endParaRPr lang="en-US" sz="1300" dirty="0"/>
-          </a:p>
-        </p:txBody>
-      </p:sp>
-      <p:sp>
-        <p:nvSpPr>
-          <p:cNvPr id="25" name="Slide Number Placeholder 0"/>
-          <p:cNvSpPr>
-            <a:spLocks noGrp="1"/>
-          </p:cNvSpPr>
-          <p:nvPr>
-            <p:ph type="sldNum" sz="quarter" idx="4294967295"/>
-          </p:nvPr>
-        </p:nvSpPr>
-        <p:spPr>
-          <a:xfrm>
-            <a:off x="11002975" y="6446520"/>
-            <a:ext cx="548640" cy="219456"/>
-          </a:xfrm>
-          <a:prstGeom prst="rect">
-            <a:avLst/>
-          </a:prstGeom>
-          <a:extLst>
-            <a:ext uri="{C572A759-6A51-4108-AA02-DFA0A04FC94B}">
-              <ma14:wrappingTextBoxFlag xmlns:ma14="http://schemas.microsoft.com/office/mac/drawingml/2011/main" val="0"/>
-            </a:ext>
-          </a:extLst>
-        </p:spPr>
-        <p:txBody>
-          <a:bodyPr/>
-          <a:lstStyle>
-            <a:lvl1pPr>
-              <a:defRPr sz="1000">
-                <a:solidFill>
-                  <a:srgbClr val="7D8AA0"/>
-                </a:solidFill>
-                <a:latin typeface="Calibri"/>
-                <a:ea typeface="Calibri"/>
-                <a:cs typeface="Calibri"/>
-              </a:defRPr>
-            </a:lvl1pPr>
-          </a:lstStyle>
-          <a:p>
-            <a:pPr algn="r"/>
-            <a:fld id="{F7021451-1387-4CA6-816F-3879F97B5CBC}" type="slidenum">
-              <a:rPr b="0" lang="en-US"/>
-              <a:t>20</a:t>
-            </a:fld>
-            <a:endParaRPr lang="en-US"/>
-          </a:p>
-        </p:txBody>
-      </p:sp>
-    </p:spTree>
-  </p:cSld>
-  <p:clrMapOvr>
-    <a:masterClrMapping/>
-  </p:clrMapOvr>
-</p:sld>
-</file>
-
-<file path=ppt/slides/slide21.xml><?xml version="1.0" encoding="utf-8"?>
-<p:sld xmlns:a="http://schemas.openxmlformats.org/drawingml/2006/main" xmlns:r="http://schemas.openxmlformats.org/officeDocument/2006/relationships" xmlns:p="http://schemas.openxmlformats.org/presentationml/2006/main">
-  <p:cSld name="Slide 21">
-    <p:spTree>
-      <p:nvGrpSpPr>
-        <p:cNvPr id="1" name=""/>
-        <p:cNvGrpSpPr/>
-        <p:nvPr/>
-      </p:nvGrpSpPr>
-      <p:grpSpPr>
-        <a:xfrm>
-          <a:off x="0" y="0"/>
-          <a:ext cx="0" cy="0"/>
-          <a:chOff x="0" y="0"/>
-          <a:chExt cx="0" cy="0"/>
-        </a:xfrm>
-      </p:grpSpPr>
-      <p:sp>
-        <p:nvSpPr>
-          <p:cNvPr id="2" name="Text 1"/>
-          <p:cNvSpPr/>
-          <p:nvPr>
-            <p:ph idx="101" type="body" hasCustomPrompt="1"/>
-          </p:nvPr>
-        </p:nvSpPr>
-        <p:spPr>
-          <a:xfrm>
-            <a:off x="640080" y="402336"/>
-            <a:ext cx="10911535" cy="256032"/>
-          </a:xfrm>
-          <a:prstGeom prst="rect">
-            <a:avLst/>
-          </a:prstGeom>
-          <a:noFill/>
-          <a:ln/>
-        </p:spPr>
-        <p:txBody>
-          <a:bodyPr wrap="square" lIns="0" tIns="0" rIns="0" bIns="0" rtlCol="0" anchor="t"/>
-          <a:lstStyle/>
-          <a:p>
-            <a:pPr algn="l" indent="0" marL="0">
-              <a:buNone/>
-            </a:pPr>
-            <a:r>
-              <a:rPr lang="en-US" sz="1050" b="1" spc="180" kern="0" dirty="0">
-                <a:solidFill>
-                  <a:srgbClr val="9AA6B6"/>
-                </a:solidFill>
-                <a:latin typeface="Calibri" pitchFamily="34" charset="0"/>
-                <a:ea typeface="Calibri" pitchFamily="34" charset="-122"/>
-                <a:cs typeface="Calibri" pitchFamily="34" charset="-120"/>
-              </a:rPr>
-              <a:t>BACKUP</a:t>
-            </a:r>
-            <a:endParaRPr lang="en-US" sz="1050" dirty="0"/>
-          </a:p>
-        </p:txBody>
-      </p:sp>
-      <p:sp>
-        <p:nvSpPr>
-          <p:cNvPr id="3" name="Text 1"/>
-          <p:cNvSpPr/>
-          <p:nvPr>
-            <p:ph idx="102" type="title" hasCustomPrompt="1"/>
-          </p:nvPr>
-        </p:nvSpPr>
-        <p:spPr>
-          <a:xfrm>
-            <a:off x="640080" y="676656"/>
-            <a:ext cx="10911535" cy="868680"/>
-          </a:xfrm>
-          <a:prstGeom prst="rect">
-            <a:avLst/>
-          </a:prstGeom>
-          <a:noFill/>
-          <a:ln/>
-        </p:spPr>
-        <p:txBody>
-          <a:bodyPr wrap="square" lIns="0" tIns="0" rIns="0" bIns="0" rtlCol="0" anchor="t"/>
-          <a:lstStyle/>
-          <a:p>
-            <a:pPr algn="l" indent="0" marL="0">
-              <a:buNone/>
-            </a:pPr>
-            <a:r>
-              <a:rPr lang="en-US" sz="2700" dirty="0">
-                <a:solidFill>
-                  <a:srgbClr val="E8ECF2"/>
-                </a:solidFill>
-                <a:latin typeface="Century Schoolbook" pitchFamily="34" charset="0"/>
-                <a:ea typeface="Century Schoolbook" pitchFamily="34" charset="-122"/>
-                <a:cs typeface="Century Schoolbook" pitchFamily="34" charset="-120"/>
-              </a:rPr>
-              <a:t>The budget sweep, in full</a:t>
-            </a:r>
-            <a:endParaRPr lang="en-US" sz="2700" dirty="0"/>
-          </a:p>
-        </p:txBody>
-      </p:sp>
       <p:graphicFrame>
         <p:nvGraphicFramePr>
-          <p:cNvPr id="22" name="Table 0"/>
+          <p:cNvPr id="21" name="Table 0"/>
           <p:cNvGraphicFramePr>
             <a:graphicFrameLocks noGrp="1"/>
           </p:cNvGraphicFramePr>
@@ -27046,9 +26338,721 @@
             <a:pPr algn="r"/>
             <a:fld id="{F7021451-1387-4CA6-816F-3879F97B5CBC}" type="slidenum">
               <a:rPr b="0" lang="en-US"/>
-              <a:t>21</a:t>
+              <a:t>20</a:t>
             </a:fld>
             <a:endParaRPr lang="en-US"/>
+          </a:p>
+        </p:txBody>
+      </p:sp>
+    </p:spTree>
+  </p:cSld>
+  <p:clrMapOvr>
+    <a:masterClrMapping/>
+  </p:clrMapOvr>
+</p:sld>
+</file>
+
+<file path=ppt/slides/slide21.xml><?xml version="1.0" encoding="utf-8"?>
+<p:sld xmlns:a="http://schemas.openxmlformats.org/drawingml/2006/main" xmlns:r="http://schemas.openxmlformats.org/officeDocument/2006/relationships" xmlns:p="http://schemas.openxmlformats.org/presentationml/2006/main">
+  <p:cSld name="Slide 21">
+    <p:spTree>
+      <p:nvGrpSpPr>
+        <p:cNvPr id="1" name=""/>
+        <p:cNvGrpSpPr/>
+        <p:nvPr/>
+      </p:nvGrpSpPr>
+      <p:grpSpPr>
+        <a:xfrm>
+          <a:off x="0" y="0"/>
+          <a:ext cx="0" cy="0"/>
+          <a:chOff x="0" y="0"/>
+          <a:chExt cx="0" cy="0"/>
+        </a:xfrm>
+      </p:grpSpPr>
+      <p:pic>
+        <p:nvPicPr>
+          <p:cNvPr id="2" name="Image 0" descr="University of Prishtina">    </p:cNvPr>
+          <p:cNvPicPr>
+            <a:picLocks noChangeAspect="1"/>
+          </p:cNvPicPr>
+          <p:nvPr/>
+        </p:nvPicPr>
+        <p:blipFill>
+          <a:blip r:embed="rId1"/>
+          <a:stretch>
+            <a:fillRect/>
+          </a:stretch>
+        </p:blipFill>
+        <p:spPr>
+          <a:xfrm>
+            <a:off x="640080" y="274320"/>
+            <a:ext cx="713232" cy="713232"/>
+          </a:xfrm>
+          <a:prstGeom prst="rect">
+            <a:avLst/>
+          </a:prstGeom>
+        </p:spPr>
+      </p:pic>
+      <p:sp>
+        <p:nvSpPr>
+          <p:cNvPr id="3" name="Text 0"/>
+          <p:cNvSpPr txBox="1"/>
+          <p:nvPr/>
+        </p:nvSpPr>
+        <p:spPr>
+          <a:xfrm>
+            <a:off x="640080" y="1143000"/>
+            <a:ext cx="5943600" cy="777240"/>
+          </a:xfrm>
+          <a:prstGeom prst="rect">
+            <a:avLst/>
+          </a:prstGeom>
+          <a:noFill/>
+          <a:ln/>
+        </p:spPr>
+        <p:txBody>
+          <a:bodyPr wrap="square" lIns="0" tIns="0" rIns="0" bIns="0" rtlCol="0" anchor="t"/>
+          <a:lstStyle/>
+          <a:p>
+            <a:pPr indent="0" marL="0">
+              <a:buNone/>
+            </a:pPr>
+            <a:r>
+              <a:rPr lang="en-US" sz="4400" dirty="0">
+                <a:solidFill>
+                  <a:srgbClr val="FFFFFF"/>
+                </a:solidFill>
+                <a:latin typeface="Century Schoolbook" pitchFamily="34" charset="0"/>
+                <a:ea typeface="Century Schoolbook" pitchFamily="34" charset="-122"/>
+                <a:cs typeface="Century Schoolbook" pitchFamily="34" charset="-120"/>
+              </a:rPr>
+              <a:t>Thank you</a:t>
+            </a:r>
+            <a:endParaRPr lang="en-US" sz="4400" dirty="0"/>
+          </a:p>
+        </p:txBody>
+      </p:sp>
+      <p:sp>
+        <p:nvSpPr>
+          <p:cNvPr id="4" name="Text 1"/>
+          <p:cNvSpPr txBox="1"/>
+          <p:nvPr/>
+        </p:nvSpPr>
+        <p:spPr>
+          <a:xfrm>
+            <a:off x="640080" y="1901952"/>
+            <a:ext cx="5943600" cy="548640"/>
+          </a:xfrm>
+          <a:prstGeom prst="rect">
+            <a:avLst/>
+          </a:prstGeom>
+          <a:noFill/>
+          <a:ln/>
+        </p:spPr>
+        <p:txBody>
+          <a:bodyPr wrap="square" lIns="0" tIns="0" rIns="0" bIns="0" rtlCol="0" anchor="t"/>
+          <a:lstStyle/>
+          <a:p>
+            <a:pPr indent="0" marL="0">
+              <a:buNone/>
+            </a:pPr>
+            <a:r>
+              <a:rPr lang="en-US" sz="2800" dirty="0">
+                <a:solidFill>
+                  <a:srgbClr val="3DDC97"/>
+                </a:solidFill>
+                <a:latin typeface="Century Schoolbook" pitchFamily="34" charset="0"/>
+                <a:ea typeface="Century Schoolbook" pitchFamily="34" charset="-122"/>
+                <a:cs typeface="Century Schoolbook" pitchFamily="34" charset="-120"/>
+              </a:rPr>
+              <a:t>Questions</a:t>
+            </a:r>
+            <a:endParaRPr lang="en-US" sz="2800" dirty="0"/>
+          </a:p>
+        </p:txBody>
+      </p:sp>
+      <p:sp>
+        <p:nvSpPr>
+          <p:cNvPr id="5" name="Text 2"/>
+          <p:cNvSpPr txBox="1"/>
+          <p:nvPr/>
+        </p:nvSpPr>
+        <p:spPr>
+          <a:xfrm>
+            <a:off x="640080" y="2743200"/>
+            <a:ext cx="5943600" cy="237744"/>
+          </a:xfrm>
+          <a:prstGeom prst="rect">
+            <a:avLst/>
+          </a:prstGeom>
+          <a:noFill/>
+          <a:ln/>
+        </p:spPr>
+        <p:txBody>
+          <a:bodyPr wrap="square" lIns="0" tIns="0" rIns="0" bIns="0" rtlCol="0" anchor="t"/>
+          <a:lstStyle/>
+          <a:p>
+            <a:pPr indent="0" marL="0">
+              <a:buNone/>
+            </a:pPr>
+            <a:r>
+              <a:rPr lang="en-US" sz="1050" b="1" spc="160" kern="0" dirty="0">
+                <a:solidFill>
+                  <a:srgbClr val="9AA6B6"/>
+                </a:solidFill>
+                <a:latin typeface="Calibri" pitchFamily="34" charset="0"/>
+                <a:ea typeface="Calibri" pitchFamily="34" charset="-122"/>
+                <a:cs typeface="Calibri" pitchFamily="34" charset="-120"/>
+              </a:rPr>
+              <a:t>FIGURES FOR THE DISCUSSION</a:t>
+            </a:r>
+            <a:endParaRPr lang="en-US" sz="1050" dirty="0"/>
+          </a:p>
+        </p:txBody>
+      </p:sp>
+      <p:sp>
+        <p:nvSpPr>
+          <p:cNvPr id="6" name="Text 3"/>
+          <p:cNvSpPr txBox="1"/>
+          <p:nvPr/>
+        </p:nvSpPr>
+        <p:spPr>
+          <a:xfrm>
+            <a:off x="640080" y="3090672"/>
+            <a:ext cx="2926080" cy="365760"/>
+          </a:xfrm>
+          <a:prstGeom prst="rect">
+            <a:avLst/>
+          </a:prstGeom>
+          <a:noFill/>
+          <a:ln/>
+        </p:spPr>
+        <p:txBody>
+          <a:bodyPr wrap="square" lIns="0" tIns="0" rIns="0" bIns="0" rtlCol="0" anchor="t"/>
+          <a:lstStyle/>
+          <a:p>
+            <a:pPr indent="0" marL="0">
+              <a:buNone/>
+            </a:pPr>
+            <a:r>
+              <a:rPr lang="en-US" sz="1900" dirty="0">
+                <a:solidFill>
+                  <a:srgbClr val="FFFFFF"/>
+                </a:solidFill>
+                <a:latin typeface="Century Schoolbook" pitchFamily="34" charset="0"/>
+                <a:ea typeface="Century Schoolbook" pitchFamily="34" charset="-122"/>
+                <a:cs typeface="Century Schoolbook" pitchFamily="34" charset="-120"/>
+              </a:rPr>
+              <a:t>5 of 10</a:t>
+            </a:r>
+            <a:endParaRPr lang="en-US" sz="1900" dirty="0"/>
+          </a:p>
+        </p:txBody>
+      </p:sp>
+      <p:sp>
+        <p:nvSpPr>
+          <p:cNvPr id="7" name="Text 4"/>
+          <p:cNvSpPr txBox="1"/>
+          <p:nvPr/>
+        </p:nvSpPr>
+        <p:spPr>
+          <a:xfrm>
+            <a:off x="640080" y="3438144"/>
+            <a:ext cx="2834640" cy="420624"/>
+          </a:xfrm>
+          <a:prstGeom prst="rect">
+            <a:avLst/>
+          </a:prstGeom>
+          <a:noFill/>
+          <a:ln/>
+        </p:spPr>
+        <p:txBody>
+          <a:bodyPr wrap="square" lIns="0" tIns="0" rIns="0" bIns="0" rtlCol="0" anchor="t"/>
+          <a:lstStyle/>
+          <a:p>
+            <a:pPr indent="0" marL="0">
+              <a:buNone/>
+            </a:pPr>
+            <a:r>
+              <a:rPr lang="en-US" sz="1050" dirty="0">
+                <a:solidFill>
+                  <a:srgbClr val="9AA6B6"/>
+                </a:solidFill>
+                <a:latin typeface="Calibri" pitchFamily="34" charset="0"/>
+                <a:ea typeface="Calibri" pitchFamily="34" charset="-122"/>
+                <a:cs typeface="Calibri" pitchFamily="34" charset="-120"/>
+              </a:rPr>
+              <a:t>rows the seeds resolve</a:t>
+            </a:r>
+            <a:endParaRPr lang="en-US" sz="1050" dirty="0"/>
+          </a:p>
+        </p:txBody>
+      </p:sp>
+      <p:sp>
+        <p:nvSpPr>
+          <p:cNvPr id="8" name="Text 5"/>
+          <p:cNvSpPr txBox="1"/>
+          <p:nvPr/>
+        </p:nvSpPr>
+        <p:spPr>
+          <a:xfrm>
+            <a:off x="3703320" y="3090672"/>
+            <a:ext cx="2926080" cy="365760"/>
+          </a:xfrm>
+          <a:prstGeom prst="rect">
+            <a:avLst/>
+          </a:prstGeom>
+          <a:noFill/>
+          <a:ln/>
+        </p:spPr>
+        <p:txBody>
+          <a:bodyPr wrap="square" lIns="0" tIns="0" rIns="0" bIns="0" rtlCol="0" anchor="t"/>
+          <a:lstStyle/>
+          <a:p>
+            <a:pPr indent="0" marL="0">
+              <a:buNone/>
+            </a:pPr>
+            <a:r>
+              <a:rPr lang="en-US" sz="1900" dirty="0">
+                <a:solidFill>
+                  <a:srgbClr val="FFFFFF"/>
+                </a:solidFill>
+                <a:latin typeface="Century Schoolbook" pitchFamily="34" charset="0"/>
+                <a:ea typeface="Century Schoolbook" pitchFamily="34" charset="-122"/>
+                <a:cs typeface="Century Schoolbook" pitchFamily="34" charset="-120"/>
+              </a:rPr>
+              <a:t>15.9×</a:t>
+            </a:r>
+            <a:endParaRPr lang="en-US" sz="1900" dirty="0"/>
+          </a:p>
+        </p:txBody>
+      </p:sp>
+      <p:sp>
+        <p:nvSpPr>
+          <p:cNvPr id="9" name="Text 6"/>
+          <p:cNvSpPr txBox="1"/>
+          <p:nvPr/>
+        </p:nvSpPr>
+        <p:spPr>
+          <a:xfrm>
+            <a:off x="3703320" y="3438144"/>
+            <a:ext cx="2834640" cy="420624"/>
+          </a:xfrm>
+          <a:prstGeom prst="rect">
+            <a:avLst/>
+          </a:prstGeom>
+          <a:noFill/>
+          <a:ln/>
+        </p:spPr>
+        <p:txBody>
+          <a:bodyPr wrap="square" lIns="0" tIns="0" rIns="0" bIns="0" rtlCol="0" anchor="t"/>
+          <a:lstStyle/>
+          <a:p>
+            <a:pPr indent="0" marL="0">
+              <a:buNone/>
+            </a:pPr>
+            <a:r>
+              <a:rPr lang="en-US" sz="1050" dirty="0">
+                <a:solidFill>
+                  <a:srgbClr val="9AA6B6"/>
+                </a:solidFill>
+                <a:latin typeface="Calibri" pitchFamily="34" charset="0"/>
+                <a:ea typeface="Calibri" pitchFamily="34" charset="-122"/>
+                <a:cs typeface="Calibri" pitchFamily="34" charset="-120"/>
+              </a:rPr>
+              <a:t>construction against the control’s re-draw; search arms 0.4–2.0×</a:t>
+            </a:r>
+            <a:endParaRPr lang="en-US" sz="1050" dirty="0"/>
+          </a:p>
+        </p:txBody>
+      </p:sp>
+      <p:sp>
+        <p:nvSpPr>
+          <p:cNvPr id="10" name="Text 7"/>
+          <p:cNvSpPr txBox="1"/>
+          <p:nvPr/>
+        </p:nvSpPr>
+        <p:spPr>
+          <a:xfrm>
+            <a:off x="640080" y="3931920"/>
+            <a:ext cx="2926080" cy="365760"/>
+          </a:xfrm>
+          <a:prstGeom prst="rect">
+            <a:avLst/>
+          </a:prstGeom>
+          <a:noFill/>
+          <a:ln/>
+        </p:spPr>
+        <p:txBody>
+          <a:bodyPr wrap="square" lIns="0" tIns="0" rIns="0" bIns="0" rtlCol="0" anchor="t"/>
+          <a:lstStyle/>
+          <a:p>
+            <a:pPr indent="0" marL="0">
+              <a:buNone/>
+            </a:pPr>
+            <a:r>
+              <a:rPr lang="en-US" sz="1900" dirty="0">
+                <a:solidFill>
+                  <a:srgbClr val="FFFFFF"/>
+                </a:solidFill>
+                <a:latin typeface="Century Schoolbook" pitchFamily="34" charset="0"/>
+                <a:ea typeface="Century Schoolbook" pitchFamily="34" charset="-122"/>
+                <a:cs typeface="Century Schoolbook" pitchFamily="34" charset="-120"/>
+              </a:rPr>
+              <a:t>21,519 HV</a:t>
+            </a:r>
+            <a:endParaRPr lang="en-US" sz="1900" dirty="0"/>
+          </a:p>
+        </p:txBody>
+      </p:sp>
+      <p:sp>
+        <p:nvSpPr>
+          <p:cNvPr id="11" name="Text 8"/>
+          <p:cNvSpPr txBox="1"/>
+          <p:nvPr/>
+        </p:nvSpPr>
+        <p:spPr>
+          <a:xfrm>
+            <a:off x="640080" y="4279392"/>
+            <a:ext cx="2834640" cy="420624"/>
+          </a:xfrm>
+          <a:prstGeom prst="rect">
+            <a:avLst/>
+          </a:prstGeom>
+          <a:noFill/>
+          <a:ln/>
+        </p:spPr>
+        <p:txBody>
+          <a:bodyPr wrap="square" lIns="0" tIns="0" rIns="0" bIns="0" rtlCol="0" anchor="t"/>
+          <a:lstStyle/>
+          <a:p>
+            <a:pPr indent="0" marL="0">
+              <a:buNone/>
+            </a:pPr>
+            <a:r>
+              <a:rPr lang="en-US" sz="1050" dirty="0">
+                <a:solidFill>
+                  <a:srgbClr val="9AA6B6"/>
+                </a:solidFill>
+                <a:latin typeface="Calibri" pitchFamily="34" charset="0"/>
+                <a:ea typeface="Calibri" pitchFamily="34" charset="-122"/>
+                <a:cs typeface="Calibri" pitchFamily="34" charset="-120"/>
+              </a:rPr>
+              <a:t>session shift of the ten-instance total (p ≈ 0.05)</a:t>
+            </a:r>
+            <a:endParaRPr lang="en-US" sz="1050" dirty="0"/>
+          </a:p>
+        </p:txBody>
+      </p:sp>
+      <p:sp>
+        <p:nvSpPr>
+          <p:cNvPr id="12" name="Text 9"/>
+          <p:cNvSpPr txBox="1"/>
+          <p:nvPr/>
+        </p:nvSpPr>
+        <p:spPr>
+          <a:xfrm>
+            <a:off x="3703320" y="3931920"/>
+            <a:ext cx="2926080" cy="365760"/>
+          </a:xfrm>
+          <a:prstGeom prst="rect">
+            <a:avLst/>
+          </a:prstGeom>
+          <a:noFill/>
+          <a:ln/>
+        </p:spPr>
+        <p:txBody>
+          <a:bodyPr wrap="square" lIns="0" tIns="0" rIns="0" bIns="0" rtlCol="0" anchor="t"/>
+          <a:lstStyle/>
+          <a:p>
+            <a:pPr indent="0" marL="0">
+              <a:buNone/>
+            </a:pPr>
+            <a:r>
+              <a:rPr lang="en-US" sz="1900" dirty="0">
+                <a:solidFill>
+                  <a:srgbClr val="FFFFFF"/>
+                </a:solidFill>
+                <a:latin typeface="Century Schoolbook" pitchFamily="34" charset="0"/>
+                <a:ea typeface="Century Schoolbook" pitchFamily="34" charset="-122"/>
+                <a:cs typeface="Century Schoolbook" pitchFamily="34" charset="-120"/>
+              </a:rPr>
+              <a:t>0.23%</a:t>
+            </a:r>
+            <a:endParaRPr lang="en-US" sz="1900" dirty="0"/>
+          </a:p>
+        </p:txBody>
+      </p:sp>
+      <p:sp>
+        <p:nvSpPr>
+          <p:cNvPr id="13" name="Text 10"/>
+          <p:cNvSpPr txBox="1"/>
+          <p:nvPr/>
+        </p:nvSpPr>
+        <p:spPr>
+          <a:xfrm>
+            <a:off x="3703320" y="4279392"/>
+            <a:ext cx="2834640" cy="420624"/>
+          </a:xfrm>
+          <a:prstGeom prst="rect">
+            <a:avLst/>
+          </a:prstGeom>
+          <a:noFill/>
+          <a:ln/>
+        </p:spPr>
+        <p:txBody>
+          <a:bodyPr wrap="square" lIns="0" tIns="0" rIns="0" bIns="0" rtlCol="0" anchor="t"/>
+          <a:lstStyle/>
+          <a:p>
+            <a:pPr indent="0" marL="0">
+              <a:buNone/>
+            </a:pPr>
+            <a:r>
+              <a:rPr lang="en-US" sz="1050" dirty="0">
+                <a:solidFill>
+                  <a:srgbClr val="9AA6B6"/>
+                </a:solidFill>
+                <a:latin typeface="Calibri" pitchFamily="34" charset="0"/>
+                <a:ea typeface="Calibri" pitchFamily="34" charset="-122"/>
+                <a:cs typeface="Calibri" pitchFamily="34" charset="-120"/>
+              </a:rPr>
+              <a:t>the highest accept rate measured anywhere</a:t>
+            </a:r>
+            <a:endParaRPr lang="en-US" sz="1050" dirty="0"/>
+          </a:p>
+        </p:txBody>
+      </p:sp>
+      <p:sp>
+        <p:nvSpPr>
+          <p:cNvPr id="14" name="Text 11"/>
+          <p:cNvSpPr txBox="1"/>
+          <p:nvPr/>
+        </p:nvSpPr>
+        <p:spPr>
+          <a:xfrm>
+            <a:off x="640080" y="4773168"/>
+            <a:ext cx="2926080" cy="365760"/>
+          </a:xfrm>
+          <a:prstGeom prst="rect">
+            <a:avLst/>
+          </a:prstGeom>
+          <a:noFill/>
+          <a:ln/>
+        </p:spPr>
+        <p:txBody>
+          <a:bodyPr wrap="square" lIns="0" tIns="0" rIns="0" bIns="0" rtlCol="0" anchor="t"/>
+          <a:lstStyle/>
+          <a:p>
+            <a:pPr indent="0" marL="0">
+              <a:buNone/>
+            </a:pPr>
+            <a:r>
+              <a:rPr lang="en-US" sz="1900" dirty="0">
+                <a:solidFill>
+                  <a:srgbClr val="FFFFFF"/>
+                </a:solidFill>
+                <a:latin typeface="Century Schoolbook" pitchFamily="34" charset="0"/>
+                <a:ea typeface="Century Schoolbook" pitchFamily="34" charset="-122"/>
+                <a:cs typeface="Century Schoolbook" pitchFamily="34" charset="-120"/>
+              </a:rPr>
+              <a:t>+33,043 HV</a:t>
+            </a:r>
+            <a:endParaRPr lang="en-US" sz="1900" dirty="0"/>
+          </a:p>
+        </p:txBody>
+      </p:sp>
+      <p:sp>
+        <p:nvSpPr>
+          <p:cNvPr id="15" name="Text 12"/>
+          <p:cNvSpPr txBox="1"/>
+          <p:nvPr/>
+        </p:nvSpPr>
+        <p:spPr>
+          <a:xfrm>
+            <a:off x="640080" y="5120640"/>
+            <a:ext cx="2834640" cy="420624"/>
+          </a:xfrm>
+          <a:prstGeom prst="rect">
+            <a:avLst/>
+          </a:prstGeom>
+          <a:noFill/>
+          <a:ln/>
+        </p:spPr>
+        <p:txBody>
+          <a:bodyPr wrap="square" lIns="0" tIns="0" rIns="0" bIns="0" rtlCol="0" anchor="t"/>
+          <a:lstStyle/>
+          <a:p>
+            <a:pPr indent="0" marL="0">
+              <a:buNone/>
+            </a:pPr>
+            <a:r>
+              <a:rPr lang="en-US" sz="1050" dirty="0">
+                <a:solidFill>
+                  <a:srgbClr val="9AA6B6"/>
+                </a:solidFill>
+                <a:latin typeface="Calibri" pitchFamily="34" charset="0"/>
+                <a:ea typeface="Calibri" pitchFamily="34" charset="-122"/>
+                <a:cs typeface="Calibri" pitchFamily="34" charset="-120"/>
+              </a:rPr>
+              <a:t>what 10× the budget buys search, against a lead ≥ 269,607</a:t>
+            </a:r>
+            <a:endParaRPr lang="en-US" sz="1050" dirty="0"/>
+          </a:p>
+        </p:txBody>
+      </p:sp>
+      <p:sp>
+        <p:nvSpPr>
+          <p:cNvPr id="16" name="Text 13"/>
+          <p:cNvSpPr txBox="1"/>
+          <p:nvPr/>
+        </p:nvSpPr>
+        <p:spPr>
+          <a:xfrm>
+            <a:off x="3703320" y="4773168"/>
+            <a:ext cx="2926080" cy="365760"/>
+          </a:xfrm>
+          <a:prstGeom prst="rect">
+            <a:avLst/>
+          </a:prstGeom>
+          <a:noFill/>
+          <a:ln/>
+        </p:spPr>
+        <p:txBody>
+          <a:bodyPr wrap="square" lIns="0" tIns="0" rIns="0" bIns="0" rtlCol="0" anchor="t"/>
+          <a:lstStyle/>
+          <a:p>
+            <a:pPr indent="0" marL="0">
+              <a:buNone/>
+            </a:pPr>
+            <a:r>
+              <a:rPr lang="en-US" sz="1900" dirty="0">
+                <a:solidFill>
+                  <a:srgbClr val="FFFFFF"/>
+                </a:solidFill>
+                <a:latin typeface="Century Schoolbook" pitchFamily="34" charset="0"/>
+                <a:ea typeface="Century Schoolbook" pitchFamily="34" charset="-122"/>
+                <a:cs typeface="Century Schoolbook" pitchFamily="34" charset="-120"/>
+              </a:rPr>
+              <a:t>0.63%</a:t>
+            </a:r>
+            <a:endParaRPr lang="en-US" sz="1900" dirty="0"/>
+          </a:p>
+        </p:txBody>
+      </p:sp>
+      <p:sp>
+        <p:nvSpPr>
+          <p:cNvPr id="17" name="Text 14"/>
+          <p:cNvSpPr txBox="1"/>
+          <p:nvPr/>
+        </p:nvSpPr>
+        <p:spPr>
+          <a:xfrm>
+            <a:off x="3703320" y="5120640"/>
+            <a:ext cx="2834640" cy="420624"/>
+          </a:xfrm>
+          <a:prstGeom prst="rect">
+            <a:avLst/>
+          </a:prstGeom>
+          <a:noFill/>
+          <a:ln/>
+        </p:spPr>
+        <p:txBody>
+          <a:bodyPr wrap="square" lIns="0" tIns="0" rIns="0" bIns="0" rtlCol="0" anchor="t"/>
+          <a:lstStyle/>
+          <a:p>
+            <a:pPr indent="0" marL="0">
+              <a:buNone/>
+            </a:pPr>
+            <a:r>
+              <a:rPr lang="en-US" sz="1050" dirty="0">
+                <a:solidFill>
+                  <a:srgbClr val="9AA6B6"/>
+                </a:solidFill>
+                <a:latin typeface="Calibri" pitchFamily="34" charset="0"/>
+                <a:ea typeface="Calibri" pitchFamily="34" charset="-122"/>
+                <a:cs typeface="Calibri" pitchFamily="34" charset="-120"/>
+              </a:rPr>
+              <a:t>best known small-graph score below a provable ceiling</a:t>
+            </a:r>
+            <a:endParaRPr lang="en-US" sz="1050" dirty="0"/>
+          </a:p>
+        </p:txBody>
+      </p:sp>
+      <p:sp>
+        <p:nvSpPr>
+          <p:cNvPr id="18" name="Text 15"/>
+          <p:cNvSpPr txBox="1"/>
+          <p:nvPr/>
+        </p:nvSpPr>
+        <p:spPr>
+          <a:xfrm>
+            <a:off x="640080" y="5833872"/>
+            <a:ext cx="6858000" cy="274320"/>
+          </a:xfrm>
+          <a:prstGeom prst="rect">
+            <a:avLst/>
+          </a:prstGeom>
+          <a:noFill/>
+          <a:ln/>
+        </p:spPr>
+        <p:txBody>
+          <a:bodyPr wrap="square" lIns="0" tIns="0" rIns="0" bIns="0" rtlCol="0" anchor="t"/>
+          <a:lstStyle/>
+          <a:p>
+            <a:pPr indent="0" marL="0">
+              <a:buNone/>
+            </a:pPr>
+            <a:r>
+              <a:rPr lang="en-US" sz="1300" dirty="0">
+                <a:solidFill>
+                  <a:srgbClr val="E8ECF2"/>
+                </a:solidFill>
+                <a:latin typeface="Calibri" pitchFamily="34" charset="0"/>
+                <a:ea typeface="Calibri" pitchFamily="34" charset="-122"/>
+                <a:cs typeface="Calibri" pitchFamily="34" charset="-120"/>
+              </a:rPr>
+              <a:t>Adrian Ymeri · adrian.ymeri@uni-pr.edu · University of Prishtina</a:t>
+            </a:r>
+            <a:endParaRPr lang="en-US" sz="1300" dirty="0"/>
+          </a:p>
+        </p:txBody>
+      </p:sp>
+      <p:sp>
+        <p:nvSpPr>
+          <p:cNvPr id="19" name="Text 16"/>
+          <p:cNvSpPr txBox="1"/>
+          <p:nvPr/>
+        </p:nvSpPr>
+        <p:spPr>
+          <a:xfrm>
+            <a:off x="640080" y="6163056"/>
+            <a:ext cx="6858000" cy="237744"/>
+          </a:xfrm>
+          <a:prstGeom prst="rect">
+            <a:avLst/>
+          </a:prstGeom>
+          <a:noFill/>
+          <a:ln/>
+        </p:spPr>
+        <p:txBody>
+          <a:bodyPr wrap="square" lIns="0" tIns="0" rIns="0" bIns="0" rtlCol="0" anchor="t"/>
+          <a:lstStyle/>
+          <a:p>
+            <a:pPr indent="0" marL="0">
+              <a:buNone/>
+            </a:pPr>
+            <a:r>
+              <a:rPr lang="en-US" sz="1050" dirty="0">
+                <a:solidFill>
+                  <a:srgbClr val="7D8AA0"/>
+                </a:solidFill>
+                <a:latin typeface="Calibri" pitchFamily="34" charset="0"/>
+                <a:ea typeface="Calibri" pitchFamily="34" charset="-122"/>
+                <a:cs typeface="Calibri" pitchFamily="34" charset="-120"/>
+              </a:rPr>
+              <a:t>Code, raw CSVs and every figure in this talk regenerate from the study’s harness.</a:t>
+            </a:r>
+            <a:endParaRPr lang="en-US" sz="1050" dirty="0"/>
           </a:p>
         </p:txBody>
       </p:sp>
